--- a/deck/СвояЕда.pptx
+++ b/deck/СвояЕда.pptx
@@ -111,27 +111,27 @@
   <p:extLst>
     <p:ext uri="{521415D9-36F7-43E2-AB2F-B90AF26B5E84}">
       <p14:sectionLst xmlns:p14="http://schemas.microsoft.com/office/powerpoint/2010/main">
-        <p14:section name="Открытие" id="{967e3eec-a24d-1df1-f80b-bcb079a8bf34}">
+        <p14:section name="Открытие" id="{b3709cfc-e0e4-ca36-9002-1a257c5a0898}">
           <p14:sldIdLst>
             <p14:sldId id="256"/>
           </p14:sldIdLst>
         </p14:section>
-        <p14:section name="Проблема" id="{1e044d41-bfdc-39ea-0ef6-ffe677e8692e}">
+        <p14:section name="Проблема" id="{0430261f-54ec-ec97-a98f-140ebfae3a87}">
           <p14:sldIdLst>
             <p14:sldId id="257"/>
           </p14:sldIdLst>
         </p14:section>
-        <p14:section name="Решение" id="{afb335e0-ff9b-410a-c1d3-9345b11af591}">
+        <p14:section name="Решение" id="{000d24fe-b3ef-7932-d52c-a2a16e5d1f65}">
           <p14:sldIdLst>
             <p14:sldId id="258"/>
           </p14:sldIdLst>
         </p14:section>
-        <p14:section name="Рынок" id="{79b7e4eb-df1a-137c-463a-8b0b78721d1f}">
+        <p14:section name="Рынок" id="{df04bf14-b21a-482d-5790-f7c9a7304b63}">
           <p14:sldIdLst>
             <p14:sldId id="259"/>
           </p14:sldIdLst>
         </p14:section>
-        <p14:section name="Итог" id="{d44bd40a-fafd-e55b-d689-d31c0f30403f}">
+        <p14:section name="Итог" id="{9e04cc75-4a9d-fef1-536d-1e86949156b6}">
           <p14:sldIdLst>
             <p14:sldId id="260"/>
           </p14:sldIdLst>
@@ -628,7 +628,7 @@
           <a:p>
             <a:r>
               <a:rPr lang="en-US" dirty="0"/>
-              <a:t>Историю про клубнику рассказать своими словами, не читать. Цифры: 401 тысяча ЛПХ и 142,2 млрд рублей — Минсельхоз Татарстана. ДОБАВИТЬ число жителей Урусу, если успеешь узнать.</a:t>
+              <a:t>Историю про клубнику рассказать своими словами, не читать. Сразу подчеркнуть, что это пример: та же задача у домашних поваров и мини-пекарен в городе. Цифры — Минсельхоз Татарстана.</a:t>
             </a:r>
             <a:endParaRPr lang="en-US" dirty="0"/>
           </a:p>
@@ -1666,7 +1666,7 @@
                   <a:srgbClr val="E8DDCB"/>
                 </a:solidFill>
               </a:rPr>
-              <a:t>Площадка, где соседи продают друг другу домашнюю еду — всё на одной карте рядом с вами</a:t>
+              <a:t>Домашние повара, мини-пекарни, огородники и бабушки с картошкой — всё на одной карте рядом с вами</a:t>
             </a:r>
             <a:endParaRPr lang="en-US" sz="1700" dirty="0"/>
           </a:p>
@@ -1805,7 +1805,7 @@
                   <a:srgbClr val="3E2B14"/>
                 </a:solidFill>
               </a:rPr>
-              <a:t>Урожай есть, покупателя нет</a:t>
+              <a:t>Рядом, но не находят друг друга</a:t>
             </a:r>
             <a:endParaRPr lang="en-US" sz="3800" dirty="0"/>
           </a:p>
@@ -1819,8 +1819,8 @@
         </p:nvSpPr>
         <p:spPr>
           <a:xfrm>
-            <a:off x="640080" y="1325880"/>
-            <a:ext cx="10881360" cy="914400"/>
+            <a:off x="640080" y="1280160"/>
+            <a:ext cx="10881360" cy="822960"/>
           </a:xfrm>
           <a:prstGeom prst="rect">
             <a:avLst/>
@@ -1836,42 +1836,67 @@
               <a:buNone/>
             </a:pPr>
             <a:r>
-              <a:rPr lang="en-US" sz="1700" dirty="0">
+              <a:rPr lang="en-US" sz="1600" dirty="0">
                 <a:solidFill>
                   <a:schemeClr val="tx1"/>
                 </a:solidFill>
               </a:rPr>
-              <a:t>Бабушка в Урусу собрала ведро клубники. Через два дня она испортится. </a:t>
-            </a:r>
+              <a:t>Бабушка в Урусу собрала ведро клубники. Через два дня она испортится. Ехать на рынок — стоять там полдня. Выложить на Авито — пока найдут и договорятся, ягоды пропадут. А на соседней улице есть человек, который купил бы её сегодня вечером.</a:t>
+            </a:r>
+            <a:endParaRPr lang="en-US" sz="1600" dirty="0"/>
+          </a:p>
+        </p:txBody>
+      </p:sp>
+      <p:sp>
+        <p:nvSpPr>
+          <p:cNvPr id="4" name="Text 2"/>
+          <p:cNvSpPr txBox="1"/>
+          <p:nvPr/>
+        </p:nvSpPr>
+        <p:spPr>
+          <a:xfrm>
+            <a:off x="640080" y="2103120"/>
+            <a:ext cx="10881360" cy="365760"/>
+          </a:xfrm>
+          <a:prstGeom prst="rect">
+            <a:avLst/>
+          </a:prstGeom>
+          <a:noFill/>
+          <a:ln/>
+        </p:spPr>
+        <p:txBody>
+          <a:bodyPr wrap="square" lIns="0" tIns="0" rIns="0" bIns="0" rtlCol="0" anchor="t"/>
+          <a:lstStyle/>
+          <a:p>
             <a:pPr indent="0" marL="0">
               <a:buNone/>
             </a:pPr>
             <a:r>
-              <a:rPr lang="en-US" sz="1700" dirty="0">
-                <a:solidFill>
-                  <a:schemeClr val="tx1"/>
-                </a:solidFill>
-              </a:rPr>
-              <a:t>Ехать на рынок — стоять там полдня. Выложить на Авито — пока найдут и договорятся, ягоды пропадут. А на соседней улице есть человек, который купил бы её сегодня вечером.</a:t>
-            </a:r>
-            <a:endParaRPr lang="en-US" sz="1700" dirty="0"/>
+              <a:rPr lang="en-US" sz="1500" i="1" dirty="0">
+                <a:solidFill>
+                  <a:srgbClr val="7A746B"/>
+                </a:solidFill>
+              </a:rPr>
+              <a:t>То же самое у домашнего повара в городе, у мини-пекарни и у любого, кто готовит или выращивает на продажу</a:t>
+            </a:r>
+            <a:endParaRPr lang="en-US" sz="1500" dirty="0"/>
           </a:p>
         </p:txBody>
       </p:sp>
       <p:sp>
         <p:nvSpPr>
-          <p:cNvPr id="4" name="лпх"/>
+          <p:cNvPr id="5" name="лпх"/>
           <p:cNvSpPr/>
           <p:nvPr/>
         </p:nvSpPr>
         <p:spPr>
           <a:xfrm>
-            <a:off x="640080" y="2468880"/>
-            <a:ext cx="3383280" cy="1737360"/>
+            <a:off x="640080" y="2606040"/>
+            <a:ext cx="3383280" cy="1691640"/>
           </a:xfrm>
           <a:prstGeom prst="roundRect">
             <a:avLst>
-              <a:gd name="adj" fmla="val 4211"/>
+              <a:gd name="adj" fmla="val 4324"/>
             </a:avLst>
           </a:prstGeom>
           <a:solidFill>
@@ -1932,18 +1957,18 @@
       </p:sp>
       <p:sp>
         <p:nvSpPr>
-          <p:cNvPr id="5" name="объём"/>
+          <p:cNvPr id="6" name="объём"/>
           <p:cNvSpPr/>
           <p:nvPr/>
         </p:nvSpPr>
         <p:spPr>
           <a:xfrm>
-            <a:off x="4389120" y="2468880"/>
-            <a:ext cx="3383280" cy="1737360"/>
+            <a:off x="4389120" y="2606040"/>
+            <a:ext cx="3383280" cy="1691640"/>
           </a:xfrm>
           <a:prstGeom prst="roundRect">
             <a:avLst>
-              <a:gd name="adj" fmla="val 4211"/>
+              <a:gd name="adj" fmla="val 4324"/>
             </a:avLst>
           </a:prstGeom>
           <a:solidFill>
@@ -2004,18 +2029,18 @@
       </p:sp>
       <p:sp>
         <p:nvSpPr>
-          <p:cNvPr id="6" name="срок"/>
+          <p:cNvPr id="7" name="срок"/>
           <p:cNvSpPr/>
           <p:nvPr/>
         </p:nvSpPr>
         <p:spPr>
           <a:xfrm>
-            <a:off x="8138160" y="2468880"/>
-            <a:ext cx="3383280" cy="1737360"/>
+            <a:off x="8138160" y="2606040"/>
+            <a:ext cx="3383280" cy="1691640"/>
           </a:xfrm>
           <a:prstGeom prst="roundRect">
             <a:avLst>
-              <a:gd name="adj" fmla="val 4211"/>
+              <a:gd name="adj" fmla="val 4324"/>
             </a:avLst>
           </a:prstGeom>
           <a:solidFill>
@@ -2076,18 +2101,18 @@
       </p:sp>
       <p:sp>
         <p:nvSpPr>
-          <p:cNvPr id="7" name="суть"/>
+          <p:cNvPr id="8" name="суть"/>
           <p:cNvSpPr/>
           <p:nvPr/>
         </p:nvSpPr>
         <p:spPr>
           <a:xfrm>
-            <a:off x="640080" y="4434840"/>
-            <a:ext cx="10881360" cy="1280160"/>
+            <a:off x="640080" y="4480560"/>
+            <a:ext cx="10881360" cy="1188720"/>
           </a:xfrm>
           <a:prstGeom prst="roundRect">
             <a:avLst>
-              <a:gd name="adj" fmla="val 5714"/>
+              <a:gd name="adj" fmla="val 6154"/>
             </a:avLst>
           </a:prstGeom>
           <a:solidFill>
@@ -2136,7 +2161,7 @@
                   <a:schemeClr val="tx1"/>
                 </a:solidFill>
               </a:rPr>
-              <a:t>Продавец и покупатель живут рядом, но не знают друг о друге. Нет простого места, где сосед увидит, что у соседа есть на продажу прямо сейчас.</a:t>
+              <a:t>Нет простого места, где видно, что продаётся рядом с тобой прямо сейчас. Рынок далеко, чат тонет, а большие площадки рассчитаны на доставку через всю страну.</a:t>
             </a:r>
             <a:endParaRPr lang="en-US" sz="1700" dirty="0"/>
           </a:p>
@@ -4400,7 +4425,7 @@
                   <a:srgbClr val="FFFFFF"/>
                 </a:solidFill>
               </a:rPr>
-              <a:t>Запуск в Урусу</a:t>
+              <a:t>Первые продавцы</a:t>
             </a:r>
             <a:endParaRPr lang="en-US" sz="1600" dirty="0"/>
           </a:p>
@@ -4428,7 +4453,7 @@
                   <a:srgbClr val="E8DDCB"/>
                 </a:solidFill>
               </a:rPr>
-              <a:t>десять продавцов, которых знают все</a:t>
+              <a:t>начать с тех, кого в районе уже знают</a:t>
             </a:r>
             <a:endParaRPr lang="en-US" sz="1600" dirty="0"/>
           </a:p>
@@ -4468,7 +4493,7 @@
                   <a:srgbClr val="FFFFFF"/>
                 </a:solidFill>
               </a:rPr>
-              <a:t>Соседние сёла</a:t>
+              <a:t>Новые районы</a:t>
             </a:r>
             <a:endParaRPr lang="en-US" sz="1600" dirty="0"/>
           </a:p>
@@ -4564,7 +4589,7 @@
                   <a:srgbClr val="E8DDCB"/>
                 </a:solidFill>
               </a:rPr>
-              <a:t>«у соседа появилась клубника»</a:t>
+              <a:t>«рядом появилась клубника»</a:t>
             </a:r>
             <a:endParaRPr lang="en-US" sz="1600" dirty="0"/>
           </a:p>
@@ -4600,7 +4625,7 @@
                   <a:srgbClr val="E8DDCB"/>
                 </a:solidFill>
               </a:rPr>
-              <a:t>В Татарстане 401 тысяча личных хозяйств — у каждого села та же задача, что у Урусу</a:t>
+              <a:t>401 тысяча хозяйств в одном Татарстане — и столько же домашних кухонь в городах. Площадка работает одинаково везде</a:t>
             </a:r>
             <a:endParaRPr lang="en-US" sz="1500" dirty="0"/>
           </a:p>

--- a/deck/СвояЕда.pptx
+++ b/deck/СвояЕда.pptx
@@ -111,27 +111,27 @@
   <p:extLst>
     <p:ext uri="{521415D9-36F7-43E2-AB2F-B90AF26B5E84}">
       <p14:sectionLst xmlns:p14="http://schemas.microsoft.com/office/powerpoint/2010/main">
-        <p14:section name="Открытие" id="{b3709cfc-e0e4-ca36-9002-1a257c5a0898}">
+        <p14:section name="Открытие" id="{54299397-c75c-ab46-82ea-c70e0f3b17f6}">
           <p14:sldIdLst>
             <p14:sldId id="256"/>
           </p14:sldIdLst>
         </p14:section>
-        <p14:section name="Проблема" id="{0430261f-54ec-ec97-a98f-140ebfae3a87}">
+        <p14:section name="Проблема" id="{967f53a6-b8f8-f423-0f0a-7aeb511f8796}">
           <p14:sldIdLst>
             <p14:sldId id="257"/>
           </p14:sldIdLst>
         </p14:section>
-        <p14:section name="Решение" id="{000d24fe-b3ef-7932-d52c-a2a16e5d1f65}">
+        <p14:section name="Идея" id="{e585b122-3946-18d8-bb86-c65ecdfae1c1}">
           <p14:sldIdLst>
             <p14:sldId id="258"/>
           </p14:sldIdLst>
         </p14:section>
-        <p14:section name="Рынок" id="{df04bf14-b21a-482d-5790-f7c9a7304b63}">
+        <p14:section name="Отличие" id="{b9657dd0-cd1f-66db-7b52-02b49b3d4576}">
           <p14:sldIdLst>
             <p14:sldId id="259"/>
           </p14:sldIdLst>
         </p14:section>
-        <p14:section name="Итог" id="{9e04cc75-4a9d-fef1-536d-1e86949156b6}">
+        <p14:section name="Итог" id="{390a563c-d109-1156-5a63-7acd14abcf9b}">
           <p14:sldIdLst>
             <p14:sldId id="260"/>
           </p14:sldIdLst>
@@ -540,7 +540,7 @@
           <a:p>
             <a:r>
               <a:rPr lang="en-US" dirty="0"/>
-              <a:t>Представиться. Назвать проект одной фразой: площадка, где жители посёлка продают друг другу домашнюю еду и видят, кто торгует на соседней улице.</a:t>
+              <a:t>Представиться. Назвать проект одной фразой: площадка, где люди продают друг другу домашнюю еду и видят, кто торгует рядом.</a:t>
             </a:r>
             <a:endParaRPr lang="en-US" dirty="0"/>
           </a:p>
@@ -628,7 +628,7 @@
           <a:p>
             <a:r>
               <a:rPr lang="en-US" dirty="0"/>
-              <a:t>Историю про клубнику рассказать своими словами, не читать. Сразу подчеркнуть, что это пример: та же задача у домашних поваров и мини-пекарен в городе. Цифры — Минсельхоз Татарстана.</a:t>
+              <a:t>Историю рассказать своими словами, не читать с листа. Главное — слушатель должен увидеть картинку: ведро клубники и сосед через улицу.</a:t>
             </a:r>
             <a:endParaRPr lang="en-US" dirty="0"/>
           </a:p>
@@ -716,7 +716,7 @@
           <a:p>
             <a:r>
               <a:rPr lang="en-US" dirty="0"/>
-              <a:t>Главное показать карту с расстоянием — этого нет ни в чате, ни на Авито. Остальное перечислять бегло.</a:t>
+              <a:t>Главное показать карту с расстоянием — этого нет ни в чате, ни на больших площадках. Остальное перечислить бегло.</a:t>
             </a:r>
             <a:endParaRPr lang="en-US" dirty="0"/>
           </a:p>
@@ -804,7 +804,7 @@
           <a:p>
             <a:r>
               <a:rPr lang="en-US" dirty="0"/>
-              <a:t>Если спросят про холодный старт — отвечать честно: начинаем с десятка знакомых продавцов, которых в посёлке и так все знают, первые отзывы появятся за неделю.</a:t>
+              <a:t>Если спросят про холодный старт — ответить честно: начинаем с тех продавцов, которых в районе и так все знают, первые отзывы появятся за неделю.</a:t>
             </a:r>
             <a:endParaRPr lang="en-US" dirty="0"/>
           </a:p>
@@ -892,7 +892,7 @@
           <a:p>
             <a:r>
               <a:rPr lang="en-US" dirty="0"/>
-              <a:t>Закончить на том, что решение подходит любому селу, и поблагодарить.</a:t>
+              <a:t>Закончить на том, что решение подходит любому селу и городу, и поблагодарить.</a:t>
             </a:r>
             <a:endParaRPr lang="en-US" dirty="0"/>
           </a:p>
@@ -966,11 +966,11 @@
 
 <file path=ppt/slideLayouts/slideLayout2.xml><?xml version="1.0" encoding="utf-8"?>
 <p:sldLayout xmlns:a="http://schemas.openxmlformats.org/drawingml/2006/main" xmlns:r="http://schemas.openxmlformats.org/officeDocument/2006/relationships" xmlns:p="http://schemas.openxmlformats.org/presentationml/2006/main" preserve="1">
-  <p:cSld name="DARK">
+  <p:cSld name="PAGE">
     <p:bg>
       <p:bgPr>
         <a:solidFill>
-          <a:srgbClr val="3E2B14"/>
+          <a:srgbClr val="F7F7F2"/>
         </a:solidFill>
       </p:bgPr>
     </p:bg>
@@ -988,38 +988,6 @@
           <a:chExt cx="0" cy="0"/>
         </a:xfrm>
       </p:grpSpPr>
-    </p:spTree>
-  </p:cSld>
-  <p:clrMapOvr>
-    <a:masterClrMapping/>
-  </p:clrMapOvr>
-</p:sldLayout>
-</file>
-
-<file path=ppt/slideLayouts/slideLayout3.xml><?xml version="1.0" encoding="utf-8"?>
-<p:sldLayout xmlns:a="http://schemas.openxmlformats.org/drawingml/2006/main" xmlns:r="http://schemas.openxmlformats.org/officeDocument/2006/relationships" xmlns:p="http://schemas.openxmlformats.org/presentationml/2006/main" preserve="1">
-  <p:cSld name="LIGHT">
-    <p:bg>
-      <p:bgPr>
-        <a:solidFill>
-          <a:schemeClr val="bg1"/>
-        </a:solidFill>
-      </p:bgPr>
-    </p:bg>
-    <p:spTree>
-      <p:nvGrpSpPr>
-        <p:cNvPr id="1" name=""/>
-        <p:cNvGrpSpPr/>
-        <p:nvPr/>
-      </p:nvGrpSpPr>
-      <p:grpSpPr>
-        <a:xfrm>
-          <a:off x="0" y="0"/>
-          <a:ext cx="0" cy="0"/>
-          <a:chOff x="0" y="0"/>
-          <a:chExt cx="0" cy="0"/>
-        </a:xfrm>
-      </p:grpSpPr>
       <p:sp>
         <p:nvSpPr>
           <p:cNvPr id="2" name="Text 0"/>
@@ -1028,8 +996,8 @@
         </p:nvSpPr>
         <p:spPr>
           <a:xfrm>
-            <a:off x="640080" y="6400800"/>
-            <a:ext cx="6400800" cy="274320"/>
+            <a:off x="7680960" y="365760"/>
+            <a:ext cx="3657600" cy="320040"/>
           </a:xfrm>
           <a:prstGeom prst="rect">
             <a:avLst/>
@@ -1041,176 +1009,18 @@
           <a:bodyPr wrap="square" lIns="0" tIns="0" rIns="0" bIns="0" rtlCol="0" anchor="ctr"/>
           <a:lstStyle/>
           <a:p>
-            <a:pPr indent="0" marL="0">
-              <a:buNone/>
-            </a:pPr>
-            <a:r>
-              <a:rPr lang="en-US" sz="1000" dirty="0">
-                <a:solidFill>
-                  <a:srgbClr val="7A746B"/>
-                </a:solidFill>
-              </a:rPr>
-              <a:t>СвояЕда · площадка для домашних продавцов</a:t>
-            </a:r>
-            <a:endParaRPr lang="en-US" sz="1000" dirty="0"/>
-          </a:p>
-        </p:txBody>
-      </p:sp>
-      <p:sp>
-        <p:nvSpPr>
-          <p:cNvPr id="25" name="Slide Number Placeholder 0"/>
-          <p:cNvSpPr>
-            <a:spLocks noGrp="1"/>
-          </p:cNvSpPr>
-          <p:nvPr>
-            <p:ph type="sldNum" sz="quarter" idx="4294967295"/>
-          </p:nvPr>
-        </p:nvSpPr>
-        <p:spPr>
-          <a:xfrm>
-            <a:off x="11247120" y="6400800"/>
-            <a:ext cx="365760" cy="274320"/>
-          </a:xfrm>
-          <a:prstGeom prst="rect">
-            <a:avLst/>
-          </a:prstGeom>
-          <a:extLst>
-            <a:ext uri="{C572A759-6A51-4108-AA02-DFA0A04FC94B}">
-              <ma14:wrappingTextBoxFlag xmlns:ma14="http://schemas.microsoft.com/office/mac/drawingml/2011/main" val="0"/>
-            </a:ext>
-          </a:extLst>
-        </p:spPr>
-        <p:txBody>
-          <a:bodyPr/>
-          <a:lstStyle>
-            <a:lvl1pPr>
-              <a:defRPr sz="1000">
-                <a:solidFill>
-                  <a:srgbClr val="7A746B"/>
-                </a:solidFill>
-              </a:defRPr>
-            </a:lvl1pPr>
-          </a:lstStyle>
-          <a:p>
-            <a:pPr algn="r"/>
-            <a:fld id="{F7021451-1387-4CA6-816F-3879F97B5CBC}" type="slidenum">
-              <a:rPr b="0" lang="en-US"/>
-              <a:t>1003</a:t>
-            </a:fld>
-            <a:endParaRPr lang="en-US"/>
-          </a:p>
-        </p:txBody>
-      </p:sp>
-    </p:spTree>
-  </p:cSld>
-  <p:clrMapOvr>
-    <a:masterClrMapping/>
-  </p:clrMapOvr>
-</p:sldLayout>
-</file>
-
-<file path=ppt/slideLayouts/slideLayout4.xml><?xml version="1.0" encoding="utf-8"?>
-<p:sldLayout xmlns:a="http://schemas.openxmlformats.org/drawingml/2006/main" xmlns:r="http://schemas.openxmlformats.org/officeDocument/2006/relationships" xmlns:p="http://schemas.openxmlformats.org/presentationml/2006/main" preserve="1">
-  <p:cSld name="TINT">
-    <p:bg>
-      <p:bgPr>
-        <a:solidFill>
-          <a:schemeClr val="bg2"/>
-        </a:solidFill>
-      </p:bgPr>
-    </p:bg>
-    <p:spTree>
-      <p:nvGrpSpPr>
-        <p:cNvPr id="1" name=""/>
-        <p:cNvGrpSpPr/>
-        <p:nvPr/>
-      </p:nvGrpSpPr>
-      <p:grpSpPr>
-        <a:xfrm>
-          <a:off x="0" y="0"/>
-          <a:ext cx="0" cy="0"/>
-          <a:chOff x="0" y="0"/>
-          <a:chExt cx="0" cy="0"/>
-        </a:xfrm>
-      </p:grpSpPr>
-      <p:sp>
-        <p:nvSpPr>
-          <p:cNvPr id="2" name="Text 0"/>
-          <p:cNvSpPr txBox="1"/>
-          <p:nvPr/>
-        </p:nvSpPr>
-        <p:spPr>
-          <a:xfrm>
-            <a:off x="640080" y="6400800"/>
-            <a:ext cx="6400800" cy="274320"/>
-          </a:xfrm>
-          <a:prstGeom prst="rect">
-            <a:avLst/>
-          </a:prstGeom>
-          <a:noFill/>
-          <a:ln/>
-        </p:spPr>
-        <p:txBody>
-          <a:bodyPr wrap="square" lIns="0" tIns="0" rIns="0" bIns="0" rtlCol="0" anchor="ctr"/>
-          <a:lstStyle/>
-          <a:p>
-            <a:pPr indent="0" marL="0">
-              <a:buNone/>
-            </a:pPr>
-            <a:r>
-              <a:rPr lang="en-US" sz="1000" dirty="0">
-                <a:solidFill>
-                  <a:srgbClr val="7A746B"/>
-                </a:solidFill>
-              </a:rPr>
-              <a:t>СвояЕда · площадка для домашних продавцов</a:t>
-            </a:r>
-            <a:endParaRPr lang="en-US" sz="1000" dirty="0"/>
-          </a:p>
-        </p:txBody>
-      </p:sp>
-      <p:sp>
-        <p:nvSpPr>
-          <p:cNvPr id="25" name="Slide Number Placeholder 0"/>
-          <p:cNvSpPr>
-            <a:spLocks noGrp="1"/>
-          </p:cNvSpPr>
-          <p:nvPr>
-            <p:ph type="sldNum" sz="quarter" idx="4294967295"/>
-          </p:nvPr>
-        </p:nvSpPr>
-        <p:spPr>
-          <a:xfrm>
-            <a:off x="11247120" y="6400800"/>
-            <a:ext cx="365760" cy="274320"/>
-          </a:xfrm>
-          <a:prstGeom prst="rect">
-            <a:avLst/>
-          </a:prstGeom>
-          <a:extLst>
-            <a:ext uri="{C572A759-6A51-4108-AA02-DFA0A04FC94B}">
-              <ma14:wrappingTextBoxFlag xmlns:ma14="http://schemas.microsoft.com/office/mac/drawingml/2011/main" val="0"/>
-            </a:ext>
-          </a:extLst>
-        </p:spPr>
-        <p:txBody>
-          <a:bodyPr/>
-          <a:lstStyle>
-            <a:lvl1pPr>
-              <a:defRPr sz="1000">
-                <a:solidFill>
-                  <a:srgbClr val="7A746B"/>
-                </a:solidFill>
-              </a:defRPr>
-            </a:lvl1pPr>
-          </a:lstStyle>
-          <a:p>
-            <a:pPr algn="r"/>
-            <a:fld id="{F7021451-1387-4CA6-816F-3879F97B5CBC}" type="slidenum">
-              <a:rPr b="0" lang="en-US"/>
-              <a:t>1004</a:t>
-            </a:fld>
-            <a:endParaRPr lang="en-US"/>
+            <a:pPr algn="r" indent="0" marL="0">
+              <a:buNone/>
+            </a:pPr>
+            <a:r>
+              <a:rPr lang="en-US" sz="1200" dirty="0">
+                <a:solidFill>
+                  <a:srgbClr val="6B6B66"/>
+                </a:solidFill>
+              </a:rPr>
+              <a:t>svoya-eda.tatnet.app</a:t>
+            </a:r>
+            <a:endParaRPr lang="en-US" sz="1200" dirty="0"/>
           </a:p>
         </p:txBody>
       </p:sp>
@@ -1239,59 +1049,12 @@
           <a:chExt cx="0" cy="0"/>
         </a:xfrm>
       </p:grpSpPr>
-      <p:sp>
-        <p:nvSpPr>
-          <p:cNvPr id="25" name="Slide Number Placeholder 0"/>
-          <p:cNvSpPr>
-            <a:spLocks noGrp="1"/>
-          </p:cNvSpPr>
-          <p:nvPr>
-            <p:ph type="sldNum" sz="quarter" idx="4294967295"/>
-          </p:nvPr>
-        </p:nvSpPr>
-        <p:spPr>
-          <a:xfrm>
-            <a:off x="11247120" y="6400800"/>
-            <a:ext cx="365760" cy="274320"/>
-          </a:xfrm>
-          <a:prstGeom prst="rect">
-            <a:avLst/>
-          </a:prstGeom>
-          <a:extLst>
-            <a:ext uri="{C572A759-6A51-4108-AA02-DFA0A04FC94B}">
-              <ma14:wrappingTextBoxFlag xmlns:ma14="http://schemas.microsoft.com/office/mac/drawingml/2011/main" val="0"/>
-            </a:ext>
-          </a:extLst>
-        </p:spPr>
-        <p:txBody>
-          <a:bodyPr/>
-          <a:lstStyle>
-            <a:lvl1pPr>
-              <a:defRPr sz="1000">
-                <a:solidFill>
-                  <a:srgbClr val="7A746B"/>
-                </a:solidFill>
-              </a:defRPr>
-            </a:lvl1pPr>
-          </a:lstStyle>
-          <a:p>
-            <a:pPr algn="r"/>
-            <a:fld id="{F7021451-1387-4CA6-816F-3879F97B5CBC}" type="slidenum">
-              <a:rPr b="0" lang="en-US"/>
-              <a:t>null</a:t>
-            </a:fld>
-            <a:endParaRPr lang="en-US"/>
-          </a:p>
-        </p:txBody>
-      </p:sp>
     </p:spTree>
   </p:cSld>
   <p:clrMap bg1="lt1" tx1="dk1" bg2="lt2" tx2="dk2" accent1="accent1" accent2="accent2" accent3="accent3" accent4="accent4" accent5="accent5" accent6="accent6" hlink="hlink" folHlink="folHlink"/>
   <p:sldLayoutIdLst>
     <p:sldLayoutId id="2147483649" r:id="rId1"/>
     <p:sldLayoutId id="2147483650" r:id="rId2"/>
-    <p:sldLayoutId id="2147483651" r:id="rId3"/>
-    <p:sldLayoutId id="2147483652" r:id="rId4"/>
   </p:sldLayoutIdLst>
   <p:hf sldNum="0" hdr="0" ftr="0" dt="0"/>
   <p:txStyles>
@@ -1566,14 +1329,14 @@
       </p:grpSpPr>
       <p:sp>
         <p:nvSpPr>
-          <p:cNvPr id="2" name="Text 0"/>
+          <p:cNvPr id="2" name="логотип"/>
           <p:cNvSpPr txBox="1"/>
           <p:nvPr/>
         </p:nvSpPr>
         <p:spPr>
           <a:xfrm>
-            <a:off x="640080" y="1280160"/>
-            <a:ext cx="8686800" cy="1097280"/>
+            <a:off x="822960" y="365760"/>
+            <a:ext cx="2743200" cy="320040"/>
           </a:xfrm>
           <a:prstGeom prst="rect">
             <a:avLst/>
@@ -1585,18 +1348,35 @@
           <a:bodyPr wrap="square" lIns="0" tIns="0" rIns="0" bIns="0" rtlCol="0" anchor="ctr"/>
           <a:lstStyle/>
           <a:p>
-            <a:pPr algn="l" indent="0" marL="0">
-              <a:buNone/>
-            </a:pPr>
-            <a:r>
-              <a:rPr lang="en-US" sz="5200" b="1" dirty="0">
-                <a:solidFill>
-                  <a:srgbClr val="FFFFFF"/>
-                </a:solidFill>
-              </a:rPr>
-              <a:t>СвояЕда</a:t>
-            </a:r>
-            <a:endParaRPr lang="en-US" sz="5200" dirty="0"/>
+            <a:pPr indent="0" marL="0">
+              <a:buNone/>
+            </a:pPr>
+            <a:r>
+              <a:rPr lang="en-US" sz="1600" b="1" dirty="0">
+                <a:solidFill>
+                  <a:srgbClr val="1A1A17"/>
+                </a:solidFill>
+                <a:latin typeface="Cambria" pitchFamily="34" charset="0"/>
+                <a:ea typeface="Cambria" pitchFamily="34" charset="-122"/>
+                <a:cs typeface="Cambria" pitchFamily="34" charset="-120"/>
+              </a:rPr>
+              <a:t>Своя</a:t>
+            </a:r>
+            <a:pPr indent="0" marL="0">
+              <a:buNone/>
+            </a:pPr>
+            <a:r>
+              <a:rPr lang="en-US" sz="1600" b="1" dirty="0">
+                <a:solidFill>
+                  <a:srgbClr val="1E6B33"/>
+                </a:solidFill>
+                <a:latin typeface="Cambria" pitchFamily="34" charset="0"/>
+                <a:ea typeface="Cambria" pitchFamily="34" charset="-122"/>
+                <a:cs typeface="Cambria" pitchFamily="34" charset="-120"/>
+              </a:rPr>
+              <a:t>еда</a:t>
+            </a:r>
+            <a:endParaRPr lang="en-US" sz="1600" dirty="0"/>
           </a:p>
         </p:txBody>
       </p:sp>
@@ -1608,8 +1388,61 @@
         </p:nvSpPr>
         <p:spPr>
           <a:xfrm>
-            <a:off x="640080" y="2423160"/>
-            <a:ext cx="8686800" cy="548640"/>
+            <a:off x="822960" y="2011680"/>
+            <a:ext cx="10515600" cy="1188720"/>
+          </a:xfrm>
+          <a:prstGeom prst="rect">
+            <a:avLst/>
+          </a:prstGeom>
+          <a:noFill/>
+          <a:ln/>
+        </p:spPr>
+        <p:txBody>
+          <a:bodyPr wrap="square" lIns="0" tIns="0" rIns="0" bIns="0" rtlCol="0" anchor="ctr"/>
+          <a:lstStyle/>
+          <a:p>
+            <a:pPr algn="l" indent="0" marL="0">
+              <a:buNone/>
+            </a:pPr>
+            <a:r>
+              <a:rPr lang="en-US" sz="5400" dirty="0">
+                <a:solidFill>
+                  <a:srgbClr val="1A1A17"/>
+                </a:solidFill>
+                <a:latin typeface="Cambria" pitchFamily="34" charset="0"/>
+                <a:ea typeface="Cambria" pitchFamily="34" charset="-122"/>
+                <a:cs typeface="Cambria" pitchFamily="34" charset="-120"/>
+              </a:rPr>
+              <a:t>Свежее от </a:t>
+            </a:r>
+            <a:pPr algn="l" indent="0" marL="0">
+              <a:buNone/>
+            </a:pPr>
+            <a:r>
+              <a:rPr lang="en-US" sz="5400" i="1" dirty="0">
+                <a:solidFill>
+                  <a:srgbClr val="1E6B33"/>
+                </a:solidFill>
+                <a:latin typeface="Cambria" pitchFamily="34" charset="0"/>
+                <a:ea typeface="Cambria" pitchFamily="34" charset="-122"/>
+                <a:cs typeface="Cambria" pitchFamily="34" charset="-120"/>
+              </a:rPr>
+              <a:t>своих</a:t>
+            </a:r>
+            <a:endParaRPr lang="en-US" sz="5400" dirty="0"/>
+          </a:p>
+        </p:txBody>
+      </p:sp>
+      <p:sp>
+        <p:nvSpPr>
+          <p:cNvPr id="4" name="Text 2"/>
+          <p:cNvSpPr txBox="1"/>
+          <p:nvPr/>
+        </p:nvSpPr>
+        <p:spPr>
+          <a:xfrm>
+            <a:off x="822960" y="3246120"/>
+            <a:ext cx="8229600" cy="822960"/>
           </a:xfrm>
           <a:prstGeom prst="rect">
             <a:avLst/>
@@ -1625,27 +1458,161 @@
               <a:buNone/>
             </a:pPr>
             <a:r>
-              <a:rPr lang="en-US" sz="2200" dirty="0">
-                <a:solidFill>
-                  <a:srgbClr val="7D9E4F"/>
-                </a:solidFill>
-              </a:rPr>
-              <a:t>Свежее от своих</a:t>
-            </a:r>
-            <a:endParaRPr lang="en-US" sz="2200" dirty="0"/>
+              <a:rPr lang="en-US" sz="1900" dirty="0">
+                <a:solidFill>
+                  <a:srgbClr val="6B6B66"/>
+                </a:solidFill>
+              </a:rPr>
+              <a:t>Домашние повара, бабушки с картошкой, мини-пекарни и огородники —</a:t>
+            </a:r>
+            <a:endParaRPr lang="en-US" sz="1900" dirty="0"/>
+          </a:p>
+          <a:p>
+            <a:pPr algn="l" indent="0" marL="0">
+              <a:buNone/>
+            </a:pPr>
+            <a:r>
+              <a:rPr lang="en-US" sz="1900" dirty="0">
+                <a:solidFill>
+                  <a:srgbClr val="6B6B66"/>
+                </a:solidFill>
+              </a:rPr>
+              <a:t>всё на одной карте рядом с вами</a:t>
+            </a:r>
+            <a:endParaRPr lang="en-US" sz="1900" dirty="0"/>
           </a:p>
         </p:txBody>
       </p:sp>
       <p:sp>
         <p:nvSpPr>
-          <p:cNvPr id="4" name="Text 2"/>
+          <p:cNvPr id="5" name="метка 1"/>
+          <p:cNvSpPr/>
+          <p:nvPr/>
+        </p:nvSpPr>
+        <p:spPr>
+          <a:xfrm>
+            <a:off x="822960" y="4251960"/>
+            <a:ext cx="1737360" cy="384048"/>
+          </a:xfrm>
+          <a:prstGeom prst="roundRect">
+            <a:avLst>
+              <a:gd name="adj" fmla="val 119048"/>
+            </a:avLst>
+          </a:prstGeom>
+          <a:solidFill>
+            <a:srgbClr val="E3F0E6"/>
+          </a:solidFill>
+          <a:ln/>
+        </p:spPr>
+        <p:txBody>
+          <a:bodyPr wrap="square" lIns="0" tIns="0" rIns="0" bIns="0" rtlCol="0" anchor="ctr"/>
+          <a:lstStyle/>
+          <a:p>
+            <a:pPr algn="ctr" indent="0" marL="0">
+              <a:buNone/>
+            </a:pPr>
+            <a:r>
+              <a:rPr lang="en-US" sz="1300" b="1" dirty="0">
+                <a:solidFill>
+                  <a:srgbClr val="1E6B33"/>
+                </a:solidFill>
+              </a:rPr>
+              <a:t>Самовывоз</a:t>
+            </a:r>
+            <a:endParaRPr lang="en-US" sz="1300" dirty="0"/>
+          </a:p>
+        </p:txBody>
+      </p:sp>
+      <p:sp>
+        <p:nvSpPr>
+          <p:cNvPr id="6" name="метка 2"/>
+          <p:cNvSpPr/>
+          <p:nvPr/>
+        </p:nvSpPr>
+        <p:spPr>
+          <a:xfrm>
+            <a:off x="2743200" y="4251960"/>
+            <a:ext cx="2103120" cy="384048"/>
+          </a:xfrm>
+          <a:prstGeom prst="roundRect">
+            <a:avLst>
+              <a:gd name="adj" fmla="val 119048"/>
+            </a:avLst>
+          </a:prstGeom>
+          <a:solidFill>
+            <a:srgbClr val="E3F0E6"/>
+          </a:solidFill>
+          <a:ln/>
+        </p:spPr>
+        <p:txBody>
+          <a:bodyPr wrap="square" lIns="0" tIns="0" rIns="0" bIns="0" rtlCol="0" anchor="ctr"/>
+          <a:lstStyle/>
+          <a:p>
+            <a:pPr algn="ctr" indent="0" marL="0">
+              <a:buNone/>
+            </a:pPr>
+            <a:r>
+              <a:rPr lang="en-US" sz="1300" b="1" dirty="0">
+                <a:solidFill>
+                  <a:srgbClr val="1E6B33"/>
+                </a:solidFill>
+              </a:rPr>
+              <a:t>Рядом с вами</a:t>
+            </a:r>
+            <a:endParaRPr lang="en-US" sz="1300" dirty="0"/>
+          </a:p>
+        </p:txBody>
+      </p:sp>
+      <p:sp>
+        <p:nvSpPr>
+          <p:cNvPr id="7" name="метка 3"/>
+          <p:cNvSpPr/>
+          <p:nvPr/>
+        </p:nvSpPr>
+        <p:spPr>
+          <a:xfrm>
+            <a:off x="5029200" y="4251960"/>
+            <a:ext cx="1920240" cy="384048"/>
+          </a:xfrm>
+          <a:prstGeom prst="roundRect">
+            <a:avLst>
+              <a:gd name="adj" fmla="val 119048"/>
+            </a:avLst>
+          </a:prstGeom>
+          <a:solidFill>
+            <a:srgbClr val="E3F0E6"/>
+          </a:solidFill>
+          <a:ln/>
+        </p:spPr>
+        <p:txBody>
+          <a:bodyPr wrap="square" lIns="0" tIns="0" rIns="0" bIns="0" rtlCol="0" anchor="ctr"/>
+          <a:lstStyle/>
+          <a:p>
+            <a:pPr algn="ctr" indent="0" marL="0">
+              <a:buNone/>
+            </a:pPr>
+            <a:r>
+              <a:rPr lang="en-US" sz="1300" b="1" dirty="0">
+                <a:solidFill>
+                  <a:srgbClr val="1E6B33"/>
+                </a:solidFill>
+              </a:rPr>
+              <a:t>Свои люди</a:t>
+            </a:r>
+            <a:endParaRPr lang="en-US" sz="1300" dirty="0"/>
+          </a:p>
+        </p:txBody>
+      </p:sp>
+      <p:sp>
+        <p:nvSpPr>
+          <p:cNvPr id="8" name="подпись"/>
           <p:cNvSpPr txBox="1"/>
           <p:nvPr/>
         </p:nvSpPr>
         <p:spPr>
           <a:xfrm>
-            <a:off x="640080" y="3017520"/>
-            <a:ext cx="8686800" cy="548640"/>
+            <a:off x="822960" y="5120640"/>
+            <a:ext cx="8229600" cy="822960"/>
           </a:xfrm>
           <a:prstGeom prst="rect">
             <a:avLst/>
@@ -1657,96 +1624,32 @@
           <a:bodyPr wrap="square" lIns="0" tIns="0" rIns="0" bIns="0" rtlCol="0" anchor="t"/>
           <a:lstStyle/>
           <a:p>
-            <a:pPr algn="l" indent="0" marL="0">
-              <a:buNone/>
-            </a:pPr>
-            <a:r>
-              <a:rPr lang="en-US" sz="1700" dirty="0">
-                <a:solidFill>
-                  <a:srgbClr val="E8DDCB"/>
-                </a:solidFill>
-              </a:rPr>
-              <a:t>Домашние повара, мини-пекарни, огородники и бабушки с картошкой — всё на одной карте рядом с вами</a:t>
+            <a:pPr indent="0" marL="0">
+              <a:buNone/>
+            </a:pPr>
+            <a:r>
+              <a:rPr lang="en-US" sz="1700" b="1" dirty="0">
+                <a:solidFill>
+                  <a:srgbClr val="1A1A17"/>
+                </a:solidFill>
+              </a:rPr>
+              <a:t>Хамитов Амир</a:t>
             </a:r>
             <a:endParaRPr lang="en-US" sz="1700" dirty="0"/>
           </a:p>
-        </p:txBody>
-      </p:sp>
-      <p:sp>
-        <p:nvSpPr>
-          <p:cNvPr id="5" name="подпись"/>
-          <p:cNvSpPr txBox="1"/>
-          <p:nvPr/>
-        </p:nvSpPr>
-        <p:spPr>
-          <a:xfrm>
-            <a:off x="640080" y="4023360"/>
-            <a:ext cx="9144000" cy="1463040"/>
-          </a:xfrm>
-          <a:prstGeom prst="rect">
-            <a:avLst/>
-          </a:prstGeom>
-          <a:noFill/>
-          <a:ln/>
-        </p:spPr>
-        <p:txBody>
-          <a:bodyPr wrap="square" lIns="0" tIns="0" rIns="0" bIns="0" rtlCol="0" anchor="t"/>
-          <a:lstStyle/>
           <a:p>
             <a:pPr indent="0" marL="0">
               <a:buNone/>
             </a:pPr>
             <a:r>
-              <a:rPr lang="en-US" sz="1900" b="1" dirty="0">
-                <a:solidFill>
-                  <a:srgbClr val="FFFFFF"/>
-                </a:solidFill>
-              </a:rPr>
-              <a:t>Фазуллин Амир</a:t>
-            </a:r>
-            <a:endParaRPr lang="en-US" sz="1900" dirty="0"/>
-          </a:p>
-          <a:p>
-            <a:pPr indent="0" marL="0">
-              <a:buNone/>
-            </a:pPr>
-            <a:r>
-              <a:rPr lang="en-US" sz="1500" dirty="0">
-                <a:solidFill>
-                  <a:srgbClr val="E8DDCB"/>
+              <a:rPr lang="en-US" sz="1400" dirty="0">
+                <a:solidFill>
+                  <a:srgbClr val="6B6B66"/>
                 </a:solidFill>
               </a:rPr>
               <a:t>Лицей-интернат имени Мустафы Онджеля</a:t>
             </a:r>
-            <a:endParaRPr lang="en-US" sz="1900" dirty="0"/>
-          </a:p>
-          <a:p>
-            <a:pPr indent="0" marL="0">
-              <a:buNone/>
-            </a:pPr>
-            <a:r>
-              <a:rPr lang="en-US" sz="600" dirty="0">
-                <a:solidFill>
-                  <a:srgbClr val="000000"/>
-                </a:solidFill>
-              </a:rPr>
-              <a:t> </a:t>
-            </a:r>
-            <a:endParaRPr lang="en-US" sz="1900" dirty="0"/>
-          </a:p>
-          <a:p>
-            <a:pPr indent="0" marL="0">
-              <a:buNone/>
-            </a:pPr>
-            <a:r>
-              <a:rPr lang="en-US" sz="1300" dirty="0">
-                <a:solidFill>
-                  <a:srgbClr val="BCAC92"/>
-                </a:solidFill>
-              </a:rPr>
-              <a:t>Конкурс «Дай 5!» · ИТ-парк Татарстана</a:t>
-            </a:r>
-            <a:endParaRPr lang="en-US" sz="1900" dirty="0"/>
+            <a:endParaRPr lang="en-US" sz="1700" dirty="0"/>
           </a:p>
         </p:txBody>
       </p:sp>
@@ -1777,14 +1680,14 @@
       </p:grpSpPr>
       <p:sp>
         <p:nvSpPr>
-          <p:cNvPr id="2" name="Text 0"/>
+          <p:cNvPr id="2" name="логотип"/>
           <p:cNvSpPr txBox="1"/>
           <p:nvPr/>
         </p:nvSpPr>
         <p:spPr>
           <a:xfrm>
-            <a:off x="640080" y="411480"/>
-            <a:ext cx="10881360" cy="822960"/>
+            <a:off x="822960" y="365760"/>
+            <a:ext cx="2743200" cy="320040"/>
           </a:xfrm>
           <a:prstGeom prst="rect">
             <a:avLst/>
@@ -1796,18 +1699,35 @@
           <a:bodyPr wrap="square" lIns="0" tIns="0" rIns="0" bIns="0" rtlCol="0" anchor="ctr"/>
           <a:lstStyle/>
           <a:p>
-            <a:pPr algn="l" indent="0" marL="0">
-              <a:buNone/>
-            </a:pPr>
-            <a:r>
-              <a:rPr lang="en-US" sz="3800" b="1" dirty="0">
-                <a:solidFill>
-                  <a:srgbClr val="3E2B14"/>
-                </a:solidFill>
-              </a:rPr>
-              <a:t>Рядом, но не находят друг друга</a:t>
-            </a:r>
-            <a:endParaRPr lang="en-US" sz="3800" dirty="0"/>
+            <a:pPr indent="0" marL="0">
+              <a:buNone/>
+            </a:pPr>
+            <a:r>
+              <a:rPr lang="en-US" sz="1600" b="1" dirty="0">
+                <a:solidFill>
+                  <a:srgbClr val="1A1A17"/>
+                </a:solidFill>
+                <a:latin typeface="Cambria" pitchFamily="34" charset="0"/>
+                <a:ea typeface="Cambria" pitchFamily="34" charset="-122"/>
+                <a:cs typeface="Cambria" pitchFamily="34" charset="-120"/>
+              </a:rPr>
+              <a:t>Своя</a:t>
+            </a:r>
+            <a:pPr indent="0" marL="0">
+              <a:buNone/>
+            </a:pPr>
+            <a:r>
+              <a:rPr lang="en-US" sz="1600" b="1" dirty="0">
+                <a:solidFill>
+                  <a:srgbClr val="1E6B33"/>
+                </a:solidFill>
+                <a:latin typeface="Cambria" pitchFamily="34" charset="0"/>
+                <a:ea typeface="Cambria" pitchFamily="34" charset="-122"/>
+                <a:cs typeface="Cambria" pitchFamily="34" charset="-120"/>
+              </a:rPr>
+              <a:t>еда</a:t>
+            </a:r>
+            <a:endParaRPr lang="en-US" sz="1600" dirty="0"/>
           </a:p>
         </p:txBody>
       </p:sp>
@@ -1819,8 +1739,75 @@
         </p:nvSpPr>
         <p:spPr>
           <a:xfrm>
-            <a:off x="640080" y="1280160"/>
-            <a:ext cx="10881360" cy="822960"/>
+            <a:off x="822960" y="1051560"/>
+            <a:ext cx="10515600" cy="914400"/>
+          </a:xfrm>
+          <a:prstGeom prst="rect">
+            <a:avLst/>
+          </a:prstGeom>
+          <a:noFill/>
+          <a:ln/>
+        </p:spPr>
+        <p:txBody>
+          <a:bodyPr wrap="square" lIns="0" tIns="0" rIns="0" bIns="0" rtlCol="0" anchor="ctr"/>
+          <a:lstStyle/>
+          <a:p>
+            <a:pPr algn="l" indent="0" marL="0">
+              <a:buNone/>
+            </a:pPr>
+            <a:r>
+              <a:rPr lang="en-US" sz="3800" dirty="0">
+                <a:solidFill>
+                  <a:srgbClr val="1A1A17"/>
+                </a:solidFill>
+                <a:latin typeface="Cambria" pitchFamily="34" charset="0"/>
+                <a:ea typeface="Cambria" pitchFamily="34" charset="-122"/>
+                <a:cs typeface="Cambria" pitchFamily="34" charset="-120"/>
+              </a:rPr>
+              <a:t>Рядом, но </a:t>
+            </a:r>
+            <a:pPr algn="l" indent="0" marL="0">
+              <a:buNone/>
+            </a:pPr>
+            <a:r>
+              <a:rPr lang="en-US" sz="3800" i="1" dirty="0">
+                <a:solidFill>
+                  <a:srgbClr val="1E6B33"/>
+                </a:solidFill>
+                <a:latin typeface="Cambria" pitchFamily="34" charset="0"/>
+                <a:ea typeface="Cambria" pitchFamily="34" charset="-122"/>
+                <a:cs typeface="Cambria" pitchFamily="34" charset="-120"/>
+              </a:rPr>
+              <a:t>не находят</a:t>
+            </a:r>
+            <a:pPr algn="l" indent="0" marL="0">
+              <a:buNone/>
+            </a:pPr>
+            <a:r>
+              <a:rPr lang="en-US" sz="3800" dirty="0">
+                <a:solidFill>
+                  <a:srgbClr val="1A1A17"/>
+                </a:solidFill>
+                <a:latin typeface="Cambria" pitchFamily="34" charset="0"/>
+                <a:ea typeface="Cambria" pitchFamily="34" charset="-122"/>
+                <a:cs typeface="Cambria" pitchFamily="34" charset="-120"/>
+              </a:rPr>
+              <a:t> друг друга</a:t>
+            </a:r>
+            <a:endParaRPr lang="en-US" sz="3800" dirty="0"/>
+          </a:p>
+        </p:txBody>
+      </p:sp>
+      <p:sp>
+        <p:nvSpPr>
+          <p:cNvPr id="4" name="Text 2"/>
+          <p:cNvSpPr txBox="1"/>
+          <p:nvPr/>
+        </p:nvSpPr>
+        <p:spPr>
+          <a:xfrm>
+            <a:off x="822960" y="2057400"/>
+            <a:ext cx="9601200" cy="822960"/>
           </a:xfrm>
           <a:prstGeom prst="rect">
             <a:avLst/>
@@ -1832,31 +1819,256 @@
           <a:bodyPr wrap="square" lIns="0" tIns="0" rIns="0" bIns="0" rtlCol="0" anchor="t"/>
           <a:lstStyle/>
           <a:p>
-            <a:pPr indent="0" marL="0">
-              <a:buNone/>
-            </a:pPr>
-            <a:r>
-              <a:rPr lang="en-US" sz="1600" dirty="0">
-                <a:solidFill>
-                  <a:schemeClr val="tx1"/>
-                </a:solidFill>
-              </a:rPr>
-              <a:t>Бабушка в Урусу собрала ведро клубники. Через два дня она испортится. Ехать на рынок — стоять там полдня. Выложить на Авито — пока найдут и договорятся, ягоды пропадут. А на соседней улице есть человек, который купил бы её сегодня вечером.</a:t>
+            <a:pPr algn="l" indent="0" marL="0">
+              <a:buNone/>
+            </a:pPr>
+            <a:r>
+              <a:rPr lang="en-US" sz="2000" dirty="0">
+                <a:solidFill>
+                  <a:srgbClr val="1A1A17"/>
+                </a:solidFill>
+              </a:rPr>
+              <a:t>Бабушка собрала ведро клубники. Через два дня она испортится. А на соседней улице есть человек, который купил бы её сегодня вечером.</a:t>
+            </a:r>
+            <a:endParaRPr lang="en-US" sz="2000" dirty="0"/>
+          </a:p>
+        </p:txBody>
+      </p:sp>
+      <p:sp>
+        <p:nvSpPr>
+          <p:cNvPr id="5" name="рынок"/>
+          <p:cNvSpPr/>
+          <p:nvPr/>
+        </p:nvSpPr>
+        <p:spPr>
+          <a:xfrm>
+            <a:off x="822960" y="3154680"/>
+            <a:ext cx="3291840" cy="1600200"/>
+          </a:xfrm>
+          <a:prstGeom prst="roundRect">
+            <a:avLst>
+              <a:gd name="adj" fmla="val 5714"/>
+            </a:avLst>
+          </a:prstGeom>
+          <a:solidFill>
+            <a:srgbClr val="FFFFFF"/>
+          </a:solidFill>
+          <a:ln w="12700">
+            <a:solidFill>
+              <a:srgbClr val="E6E6DF"/>
+            </a:solidFill>
+          </a:ln>
+        </p:spPr>
+        <p:txBody>
+          <a:bodyPr wrap="square" lIns="177800" tIns="203200" rIns="203200" bIns="177800" rtlCol="0" anchor="t"/>
+          <a:lstStyle/>
+          <a:p>
+            <a:pPr algn="l" indent="0" marL="0">
+              <a:buNone/>
+            </a:pPr>
+            <a:r>
+              <a:rPr lang="en-US" sz="1600" b="1" dirty="0">
+                <a:solidFill>
+                  <a:srgbClr val="1A1A17"/>
+                </a:solidFill>
+                <a:latin typeface="Cambria" pitchFamily="34" charset="0"/>
+                <a:ea typeface="Cambria" pitchFamily="34" charset="-122"/>
+                <a:cs typeface="Cambria" pitchFamily="34" charset="-120"/>
+              </a:rPr>
+              <a:t>Рынок</a:t>
             </a:r>
             <a:endParaRPr lang="en-US" sz="1600" dirty="0"/>
           </a:p>
+          <a:p>
+            <a:pPr algn="l" indent="0" marL="0">
+              <a:buNone/>
+            </a:pPr>
+            <a:r>
+              <a:rPr lang="en-US" sz="600" dirty="0">
+                <a:solidFill>
+                  <a:srgbClr val="000000"/>
+                </a:solidFill>
+              </a:rPr>
+              <a:t> </a:t>
+            </a:r>
+            <a:endParaRPr lang="en-US" sz="1600" dirty="0"/>
+          </a:p>
+          <a:p>
+            <a:pPr algn="l" indent="0" marL="0">
+              <a:buNone/>
+            </a:pPr>
+            <a:r>
+              <a:rPr lang="en-US" sz="1350" dirty="0">
+                <a:solidFill>
+                  <a:srgbClr val="6B6B66"/>
+                </a:solidFill>
+              </a:rPr>
+              <a:t>Ехать в райцентр и стоять там полдня ради одного ведра</a:t>
+            </a:r>
+            <a:endParaRPr lang="en-US" sz="1600" dirty="0"/>
+          </a:p>
         </p:txBody>
       </p:sp>
       <p:sp>
         <p:nvSpPr>
-          <p:cNvPr id="4" name="Text 2"/>
+          <p:cNvPr id="6" name="авито"/>
+          <p:cNvSpPr/>
+          <p:nvPr/>
+        </p:nvSpPr>
+        <p:spPr>
+          <a:xfrm>
+            <a:off x="4434840" y="3154680"/>
+            <a:ext cx="3291840" cy="1600200"/>
+          </a:xfrm>
+          <a:prstGeom prst="roundRect">
+            <a:avLst>
+              <a:gd name="adj" fmla="val 5714"/>
+            </a:avLst>
+          </a:prstGeom>
+          <a:solidFill>
+            <a:srgbClr val="FFFFFF"/>
+          </a:solidFill>
+          <a:ln w="12700">
+            <a:solidFill>
+              <a:srgbClr val="E6E6DF"/>
+            </a:solidFill>
+          </a:ln>
+        </p:spPr>
+        <p:txBody>
+          <a:bodyPr wrap="square" lIns="177800" tIns="203200" rIns="203200" bIns="177800" rtlCol="0" anchor="t"/>
+          <a:lstStyle/>
+          <a:p>
+            <a:pPr algn="l" indent="0" marL="0">
+              <a:buNone/>
+            </a:pPr>
+            <a:r>
+              <a:rPr lang="en-US" sz="1600" b="1" dirty="0">
+                <a:solidFill>
+                  <a:srgbClr val="1A1A17"/>
+                </a:solidFill>
+                <a:latin typeface="Cambria" pitchFamily="34" charset="0"/>
+                <a:ea typeface="Cambria" pitchFamily="34" charset="-122"/>
+                <a:cs typeface="Cambria" pitchFamily="34" charset="-120"/>
+              </a:rPr>
+              <a:t>Объявления в интернете</a:t>
+            </a:r>
+            <a:endParaRPr lang="en-US" sz="1600" dirty="0"/>
+          </a:p>
+          <a:p>
+            <a:pPr algn="l" indent="0" marL="0">
+              <a:buNone/>
+            </a:pPr>
+            <a:r>
+              <a:rPr lang="en-US" sz="600" dirty="0">
+                <a:solidFill>
+                  <a:srgbClr val="000000"/>
+                </a:solidFill>
+              </a:rPr>
+              <a:t> </a:t>
+            </a:r>
+            <a:endParaRPr lang="en-US" sz="1600" dirty="0"/>
+          </a:p>
+          <a:p>
+            <a:pPr algn="l" indent="0" marL="0">
+              <a:buNone/>
+            </a:pPr>
+            <a:r>
+              <a:rPr lang="en-US" sz="1350" dirty="0">
+                <a:solidFill>
+                  <a:srgbClr val="6B6B66"/>
+                </a:solidFill>
+              </a:rPr>
+              <a:t>Пока покупатель найдётся и договорится, ягоды пропадут</a:t>
+            </a:r>
+            <a:endParaRPr lang="en-US" sz="1600" dirty="0"/>
+          </a:p>
+        </p:txBody>
+      </p:sp>
+      <p:sp>
+        <p:nvSpPr>
+          <p:cNvPr id="7" name="чат"/>
+          <p:cNvSpPr/>
+          <p:nvPr/>
+        </p:nvSpPr>
+        <p:spPr>
+          <a:xfrm>
+            <a:off x="8046720" y="3154680"/>
+            <a:ext cx="3291840" cy="1600200"/>
+          </a:xfrm>
+          <a:prstGeom prst="roundRect">
+            <a:avLst>
+              <a:gd name="adj" fmla="val 5714"/>
+            </a:avLst>
+          </a:prstGeom>
+          <a:solidFill>
+            <a:srgbClr val="FFFFFF"/>
+          </a:solidFill>
+          <a:ln w="12700">
+            <a:solidFill>
+              <a:srgbClr val="E6E6DF"/>
+            </a:solidFill>
+          </a:ln>
+        </p:spPr>
+        <p:txBody>
+          <a:bodyPr wrap="square" lIns="177800" tIns="203200" rIns="203200" bIns="177800" rtlCol="0" anchor="t"/>
+          <a:lstStyle/>
+          <a:p>
+            <a:pPr algn="l" indent="0" marL="0">
+              <a:buNone/>
+            </a:pPr>
+            <a:r>
+              <a:rPr lang="en-US" sz="1600" b="1" dirty="0">
+                <a:solidFill>
+                  <a:srgbClr val="1A1A17"/>
+                </a:solidFill>
+                <a:latin typeface="Cambria" pitchFamily="34" charset="0"/>
+                <a:ea typeface="Cambria" pitchFamily="34" charset="-122"/>
+                <a:cs typeface="Cambria" pitchFamily="34" charset="-120"/>
+              </a:rPr>
+              <a:t>Чат посёлка</a:t>
+            </a:r>
+            <a:endParaRPr lang="en-US" sz="1600" dirty="0"/>
+          </a:p>
+          <a:p>
+            <a:pPr algn="l" indent="0" marL="0">
+              <a:buNone/>
+            </a:pPr>
+            <a:r>
+              <a:rPr lang="en-US" sz="600" dirty="0">
+                <a:solidFill>
+                  <a:srgbClr val="000000"/>
+                </a:solidFill>
+              </a:rPr>
+              <a:t> </a:t>
+            </a:r>
+            <a:endParaRPr lang="en-US" sz="1600" dirty="0"/>
+          </a:p>
+          <a:p>
+            <a:pPr algn="l" indent="0" marL="0">
+              <a:buNone/>
+            </a:pPr>
+            <a:r>
+              <a:rPr lang="en-US" sz="1350" dirty="0">
+                <a:solidFill>
+                  <a:srgbClr val="6B6B66"/>
+                </a:solidFill>
+              </a:rPr>
+              <a:t>Объявление тонет за час, и непонятно, у кого вкусно</a:t>
+            </a:r>
+            <a:endParaRPr lang="en-US" sz="1600" dirty="0"/>
+          </a:p>
+        </p:txBody>
+      </p:sp>
+      <p:sp>
+        <p:nvSpPr>
+          <p:cNvPr id="8" name="Text 6"/>
           <p:cNvSpPr txBox="1"/>
           <p:nvPr/>
         </p:nvSpPr>
         <p:spPr>
           <a:xfrm>
-            <a:off x="640080" y="2103120"/>
-            <a:ext cx="10881360" cy="365760"/>
+            <a:off x="822960" y="4983480"/>
+            <a:ext cx="10515600" cy="457200"/>
           </a:xfrm>
           <a:prstGeom prst="rect">
             <a:avLst/>
@@ -1874,341 +2086,12 @@
             <a:r>
               <a:rPr lang="en-US" sz="1500" i="1" dirty="0">
                 <a:solidFill>
-                  <a:srgbClr val="7A746B"/>
-                </a:solidFill>
-              </a:rPr>
-              <a:t>То же самое у домашнего повара в городе, у мини-пекарни и у любого, кто готовит или выращивает на продажу</a:t>
+                  <a:srgbClr val="6B6B66"/>
+                </a:solidFill>
+              </a:rPr>
+              <a:t>То же самое у домашнего повара, у мини-пекарни и у любого, кто готовит или выращивает на продажу</a:t>
             </a:r>
             <a:endParaRPr lang="en-US" sz="1500" dirty="0"/>
-          </a:p>
-        </p:txBody>
-      </p:sp>
-      <p:sp>
-        <p:nvSpPr>
-          <p:cNvPr id="5" name="лпх"/>
-          <p:cNvSpPr/>
-          <p:nvPr/>
-        </p:nvSpPr>
-        <p:spPr>
-          <a:xfrm>
-            <a:off x="640080" y="2606040"/>
-            <a:ext cx="3383280" cy="1691640"/>
-          </a:xfrm>
-          <a:prstGeom prst="roundRect">
-            <a:avLst>
-              <a:gd name="adj" fmla="val 4324"/>
-            </a:avLst>
-          </a:prstGeom>
-          <a:solidFill>
-            <a:srgbClr val="FFFFFF"/>
-          </a:solidFill>
-          <a:ln w="12700">
-            <a:solidFill>
-              <a:srgbClr val="E3DED5"/>
-            </a:solidFill>
-          </a:ln>
-        </p:spPr>
-        <p:txBody>
-          <a:bodyPr wrap="square" lIns="177800" tIns="203200" rIns="203200" bIns="177800" rtlCol="0" anchor="t"/>
-          <a:lstStyle/>
-          <a:p>
-            <a:pPr algn="l" indent="0" marL="0">
-              <a:buNone/>
-            </a:pPr>
-            <a:r>
-              <a:rPr lang="en-US" sz="3400" b="1" dirty="0">
-                <a:solidFill>
-                  <a:srgbClr val="B8761F"/>
-                </a:solidFill>
-              </a:rPr>
-              <a:t>401 000</a:t>
-            </a:r>
-            <a:endParaRPr lang="en-US" sz="3400" dirty="0"/>
-          </a:p>
-          <a:p>
-            <a:pPr algn="l" indent="0" marL="0">
-              <a:buNone/>
-            </a:pPr>
-            <a:r>
-              <a:rPr lang="en-US" sz="700" dirty="0">
-                <a:solidFill>
-                  <a:srgbClr val="000000"/>
-                </a:solidFill>
-              </a:rPr>
-              <a:t> </a:t>
-            </a:r>
-            <a:endParaRPr lang="en-US" sz="3400" dirty="0"/>
-          </a:p>
-          <a:p>
-            <a:pPr algn="l" indent="0" marL="0">
-              <a:buNone/>
-            </a:pPr>
-            <a:r>
-              <a:rPr lang="en-US" sz="1300" dirty="0">
-                <a:solidFill>
-                  <a:srgbClr val="7A746B"/>
-                </a:solidFill>
-              </a:rPr>
-              <a:t>личных подсобных хозяйств в Татарстане — данные Минсельхоза РТ</a:t>
-            </a:r>
-            <a:endParaRPr lang="en-US" sz="3400" dirty="0"/>
-          </a:p>
-        </p:txBody>
-      </p:sp>
-      <p:sp>
-        <p:nvSpPr>
-          <p:cNvPr id="6" name="объём"/>
-          <p:cNvSpPr/>
-          <p:nvPr/>
-        </p:nvSpPr>
-        <p:spPr>
-          <a:xfrm>
-            <a:off x="4389120" y="2606040"/>
-            <a:ext cx="3383280" cy="1691640"/>
-          </a:xfrm>
-          <a:prstGeom prst="roundRect">
-            <a:avLst>
-              <a:gd name="adj" fmla="val 4324"/>
-            </a:avLst>
-          </a:prstGeom>
-          <a:solidFill>
-            <a:srgbClr val="FFFFFF"/>
-          </a:solidFill>
-          <a:ln w="12700">
-            <a:solidFill>
-              <a:srgbClr val="E3DED5"/>
-            </a:solidFill>
-          </a:ln>
-        </p:spPr>
-        <p:txBody>
-          <a:bodyPr wrap="square" lIns="177800" tIns="203200" rIns="203200" bIns="177800" rtlCol="0" anchor="t"/>
-          <a:lstStyle/>
-          <a:p>
-            <a:pPr algn="l" indent="0" marL="0">
-              <a:buNone/>
-            </a:pPr>
-            <a:r>
-              <a:rPr lang="en-US" sz="2800" b="1" dirty="0">
-                <a:solidFill>
-                  <a:srgbClr val="B8761F"/>
-                </a:solidFill>
-              </a:rPr>
-              <a:t>142 млрд ₽</a:t>
-            </a:r>
-            <a:endParaRPr lang="en-US" sz="2800" dirty="0"/>
-          </a:p>
-          <a:p>
-            <a:pPr algn="l" indent="0" marL="0">
-              <a:buNone/>
-            </a:pPr>
-            <a:r>
-              <a:rPr lang="en-US" sz="700" dirty="0">
-                <a:solidFill>
-                  <a:srgbClr val="000000"/>
-                </a:solidFill>
-              </a:rPr>
-              <a:t> </a:t>
-            </a:r>
-            <a:endParaRPr lang="en-US" sz="2800" dirty="0"/>
-          </a:p>
-          <a:p>
-            <a:pPr algn="l" indent="0" marL="0">
-              <a:buNone/>
-            </a:pPr>
-            <a:r>
-              <a:rPr lang="en-US" sz="1300" dirty="0">
-                <a:solidFill>
-                  <a:srgbClr val="7A746B"/>
-                </a:solidFill>
-              </a:rPr>
-              <a:t>продукции в год от малых хозяйств — 42% всего сельхозпроизводства республики</a:t>
-            </a:r>
-            <a:endParaRPr lang="en-US" sz="2800" dirty="0"/>
-          </a:p>
-        </p:txBody>
-      </p:sp>
-      <p:sp>
-        <p:nvSpPr>
-          <p:cNvPr id="7" name="срок"/>
-          <p:cNvSpPr/>
-          <p:nvPr/>
-        </p:nvSpPr>
-        <p:spPr>
-          <a:xfrm>
-            <a:off x="8138160" y="2606040"/>
-            <a:ext cx="3383280" cy="1691640"/>
-          </a:xfrm>
-          <a:prstGeom prst="roundRect">
-            <a:avLst>
-              <a:gd name="adj" fmla="val 4324"/>
-            </a:avLst>
-          </a:prstGeom>
-          <a:solidFill>
-            <a:srgbClr val="FFFFFF"/>
-          </a:solidFill>
-          <a:ln w="12700">
-            <a:solidFill>
-              <a:srgbClr val="E3DED5"/>
-            </a:solidFill>
-          </a:ln>
-        </p:spPr>
-        <p:txBody>
-          <a:bodyPr wrap="square" lIns="177800" tIns="203200" rIns="203200" bIns="177800" rtlCol="0" anchor="t"/>
-          <a:lstStyle/>
-          <a:p>
-            <a:pPr algn="l" indent="0" marL="0">
-              <a:buNone/>
-            </a:pPr>
-            <a:r>
-              <a:rPr lang="en-US" sz="3400" b="1" dirty="0">
-                <a:solidFill>
-                  <a:srgbClr val="B8761F"/>
-                </a:solidFill>
-              </a:rPr>
-              <a:t>2 дня</a:t>
-            </a:r>
-            <a:endParaRPr lang="en-US" sz="3400" dirty="0"/>
-          </a:p>
-          <a:p>
-            <a:pPr algn="l" indent="0" marL="0">
-              <a:buNone/>
-            </a:pPr>
-            <a:r>
-              <a:rPr lang="en-US" sz="700" dirty="0">
-                <a:solidFill>
-                  <a:srgbClr val="000000"/>
-                </a:solidFill>
-              </a:rPr>
-              <a:t> </a:t>
-            </a:r>
-            <a:endParaRPr lang="en-US" sz="3400" dirty="0"/>
-          </a:p>
-          <a:p>
-            <a:pPr algn="l" indent="0" marL="0">
-              <a:buNone/>
-            </a:pPr>
-            <a:r>
-              <a:rPr lang="en-US" sz="1300" dirty="0">
-                <a:solidFill>
-                  <a:srgbClr val="7A746B"/>
-                </a:solidFill>
-              </a:rPr>
-              <a:t>столько живёт свежая ягода — продать нужно сегодня, а не через неделю</a:t>
-            </a:r>
-            <a:endParaRPr lang="en-US" sz="3400" dirty="0"/>
-          </a:p>
-        </p:txBody>
-      </p:sp>
-      <p:sp>
-        <p:nvSpPr>
-          <p:cNvPr id="8" name="суть"/>
-          <p:cNvSpPr/>
-          <p:nvPr/>
-        </p:nvSpPr>
-        <p:spPr>
-          <a:xfrm>
-            <a:off x="640080" y="4480560"/>
-            <a:ext cx="10881360" cy="1188720"/>
-          </a:xfrm>
-          <a:prstGeom prst="roundRect">
-            <a:avLst>
-              <a:gd name="adj" fmla="val 6154"/>
-            </a:avLst>
-          </a:prstGeom>
-          <a:solidFill>
-            <a:srgbClr val="EDF1E9"/>
-          </a:solidFill>
-          <a:ln/>
-        </p:spPr>
-        <p:txBody>
-          <a:bodyPr wrap="square" lIns="203200" tIns="254000" rIns="254000" bIns="203200" rtlCol="0" anchor="t"/>
-          <a:lstStyle/>
-          <a:p>
-            <a:pPr algn="l" indent="0" marL="0">
-              <a:buNone/>
-            </a:pPr>
-            <a:r>
-              <a:rPr lang="en-US" sz="1700" b="1" dirty="0">
-                <a:solidFill>
-                  <a:srgbClr val="3E2B14"/>
-                </a:solidFill>
-              </a:rPr>
-              <a:t>Суть проблемы</a:t>
-            </a:r>
-            <a:endParaRPr lang="en-US" sz="1700" dirty="0"/>
-          </a:p>
-          <a:p>
-            <a:pPr algn="l" indent="0" marL="0">
-              <a:buNone/>
-            </a:pPr>
-            <a:r>
-              <a:rPr lang="en-US" sz="700" dirty="0">
-                <a:solidFill>
-                  <a:srgbClr val="000000"/>
-                </a:solidFill>
-              </a:rPr>
-              <a:t> </a:t>
-            </a:r>
-            <a:endParaRPr lang="en-US" sz="1700" dirty="0"/>
-          </a:p>
-          <a:p>
-            <a:pPr algn="l" indent="0" marL="0">
-              <a:buNone/>
-            </a:pPr>
-            <a:r>
-              <a:rPr lang="en-US" sz="1500" dirty="0">
-                <a:solidFill>
-                  <a:schemeClr val="tx1"/>
-                </a:solidFill>
-              </a:rPr>
-              <a:t>Нет простого места, где видно, что продаётся рядом с тобой прямо сейчас. Рынок далеко, чат тонет, а большие площадки рассчитаны на доставку через всю страну.</a:t>
-            </a:r>
-            <a:endParaRPr lang="en-US" sz="1700" dirty="0"/>
-          </a:p>
-        </p:txBody>
-      </p:sp>
-      <p:sp>
-        <p:nvSpPr>
-          <p:cNvPr id="25" name="Slide Number Placeholder 0"/>
-          <p:cNvSpPr>
-            <a:spLocks noGrp="1"/>
-          </p:cNvSpPr>
-          <p:nvPr>
-            <p:ph type="sldNum" sz="quarter" idx="4294967295"/>
-          </p:nvPr>
-        </p:nvSpPr>
-        <p:spPr>
-          <a:xfrm>
-            <a:off x="11247120" y="6400800"/>
-            <a:ext cx="365760" cy="274320"/>
-          </a:xfrm>
-          <a:prstGeom prst="rect">
-            <a:avLst/>
-          </a:prstGeom>
-          <a:extLst>
-            <a:ext uri="{C572A759-6A51-4108-AA02-DFA0A04FC94B}">
-              <ma14:wrappingTextBoxFlag xmlns:ma14="http://schemas.microsoft.com/office/mac/drawingml/2011/main" val="0"/>
-            </a:ext>
-          </a:extLst>
-        </p:spPr>
-        <p:txBody>
-          <a:bodyPr/>
-          <a:lstStyle>
-            <a:lvl1pPr>
-              <a:defRPr sz="1000">
-                <a:solidFill>
-                  <a:srgbClr val="7A746B"/>
-                </a:solidFill>
-              </a:defRPr>
-            </a:lvl1pPr>
-          </a:lstStyle>
-          <a:p>
-            <a:pPr algn="r"/>
-            <a:fld id="{F7021451-1387-4CA6-816F-3879F97B5CBC}" type="slidenum">
-              <a:rPr b="0" lang="en-US"/>
-              <a:t>2</a:t>
-            </a:fld>
-            <a:endParaRPr lang="en-US"/>
           </a:p>
         </p:txBody>
       </p:sp>
@@ -2239,14 +2122,14 @@
       </p:grpSpPr>
       <p:sp>
         <p:nvSpPr>
-          <p:cNvPr id="2" name="Text 0"/>
+          <p:cNvPr id="2" name="логотип"/>
           <p:cNvSpPr txBox="1"/>
           <p:nvPr/>
         </p:nvSpPr>
         <p:spPr>
           <a:xfrm>
-            <a:off x="640080" y="411480"/>
-            <a:ext cx="10881360" cy="822960"/>
+            <a:off x="822960" y="365760"/>
+            <a:ext cx="2743200" cy="320040"/>
           </a:xfrm>
           <a:prstGeom prst="rect">
             <a:avLst/>
@@ -2258,463 +2141,115 @@
           <a:bodyPr wrap="square" lIns="0" tIns="0" rIns="0" bIns="0" rtlCol="0" anchor="ctr"/>
           <a:lstStyle/>
           <a:p>
-            <a:pPr algn="l" indent="0" marL="0">
-              <a:buNone/>
-            </a:pPr>
-            <a:r>
-              <a:rPr lang="en-US" sz="3800" b="1" dirty="0">
-                <a:solidFill>
-                  <a:srgbClr val="3E2B14"/>
-                </a:solidFill>
-              </a:rPr>
-              <a:t>Сосед видит соседа</a:t>
-            </a:r>
-            <a:endParaRPr lang="en-US" sz="3800" dirty="0"/>
+            <a:pPr indent="0" marL="0">
+              <a:buNone/>
+            </a:pPr>
+            <a:r>
+              <a:rPr lang="en-US" sz="1600" b="1" dirty="0">
+                <a:solidFill>
+                  <a:srgbClr val="1A1A17"/>
+                </a:solidFill>
+                <a:latin typeface="Cambria" pitchFamily="34" charset="0"/>
+                <a:ea typeface="Cambria" pitchFamily="34" charset="-122"/>
+                <a:cs typeface="Cambria" pitchFamily="34" charset="-120"/>
+              </a:rPr>
+              <a:t>Своя</a:t>
+            </a:r>
+            <a:pPr indent="0" marL="0">
+              <a:buNone/>
+            </a:pPr>
+            <a:r>
+              <a:rPr lang="en-US" sz="1600" b="1" dirty="0">
+                <a:solidFill>
+                  <a:srgbClr val="1E6B33"/>
+                </a:solidFill>
+                <a:latin typeface="Cambria" pitchFamily="34" charset="0"/>
+                <a:ea typeface="Cambria" pitchFamily="34" charset="-122"/>
+                <a:cs typeface="Cambria" pitchFamily="34" charset="-120"/>
+              </a:rPr>
+              <a:t>еда</a:t>
+            </a:r>
+            <a:endParaRPr lang="en-US" sz="1600" dirty="0"/>
           </a:p>
         </p:txBody>
       </p:sp>
       <p:sp>
         <p:nvSpPr>
-          <p:cNvPr id="3" name="карта"/>
-          <p:cNvSpPr/>
+          <p:cNvPr id="3" name="Text 1"/>
+          <p:cNvSpPr txBox="1"/>
           <p:nvPr/>
         </p:nvSpPr>
         <p:spPr>
           <a:xfrm>
-            <a:off x="640080" y="1600200"/>
-            <a:ext cx="3383280" cy="1645920"/>
+            <a:off x="822960" y="1051560"/>
+            <a:ext cx="10515600" cy="914400"/>
           </a:xfrm>
-          <a:prstGeom prst="roundRect">
-            <a:avLst>
-              <a:gd name="adj" fmla="val 4444"/>
-            </a:avLst>
+          <a:prstGeom prst="rect">
+            <a:avLst/>
           </a:prstGeom>
-          <a:solidFill>
-            <a:srgbClr val="FFFFFF"/>
-          </a:solidFill>
-          <a:ln w="12700">
-            <a:solidFill>
-              <a:srgbClr val="E3DED5"/>
-            </a:solidFill>
-          </a:ln>
+          <a:noFill/>
+          <a:ln/>
         </p:spPr>
         <p:txBody>
-          <a:bodyPr wrap="square" lIns="152400" tIns="177800" rIns="177800" bIns="152400" rtlCol="0" anchor="t"/>
+          <a:bodyPr wrap="square" lIns="0" tIns="0" rIns="0" bIns="0" rtlCol="0" anchor="ctr"/>
           <a:lstStyle/>
           <a:p>
             <a:pPr algn="l" indent="0" marL="0">
               <a:buNone/>
             </a:pPr>
             <a:r>
-              <a:rPr lang="en-US" sz="1600" b="1" dirty="0">
-                <a:solidFill>
-                  <a:srgbClr val="B8761F"/>
-                </a:solidFill>
-              </a:rPr>
-              <a:t>Карта и расстояние</a:t>
-            </a:r>
-            <a:endParaRPr lang="en-US" sz="1600" dirty="0"/>
-          </a:p>
-          <a:p>
-            <a:pPr algn="l" indent="0" marL="0">
-              <a:buNone/>
-            </a:pPr>
-            <a:r>
-              <a:rPr lang="en-US" sz="600" dirty="0">
-                <a:solidFill>
-                  <a:srgbClr val="000000"/>
-                </a:solidFill>
-              </a:rPr>
-              <a:t> </a:t>
-            </a:r>
-            <a:endParaRPr lang="en-US" sz="1600" dirty="0"/>
-          </a:p>
-          <a:p>
-            <a:pPr algn="l" indent="0" marL="0">
-              <a:buNone/>
-            </a:pPr>
-            <a:r>
-              <a:rPr lang="en-US" sz="1300" dirty="0">
-                <a:solidFill>
-                  <a:schemeClr val="tx1"/>
-                </a:solidFill>
-              </a:rPr>
-              <a:t>Видно, кто продаёт рядом и сколько до него идти</a:t>
-            </a:r>
-            <a:endParaRPr lang="en-US" sz="1600" dirty="0"/>
+              <a:rPr lang="en-US" sz="3800" dirty="0">
+                <a:solidFill>
+                  <a:srgbClr val="1A1A17"/>
+                </a:solidFill>
+                <a:latin typeface="Cambria" pitchFamily="34" charset="0"/>
+                <a:ea typeface="Cambria" pitchFamily="34" charset="-122"/>
+                <a:cs typeface="Cambria" pitchFamily="34" charset="-120"/>
+              </a:rPr>
+              <a:t>Сосед </a:t>
+            </a:r>
+            <a:pPr algn="l" indent="0" marL="0">
+              <a:buNone/>
+            </a:pPr>
+            <a:r>
+              <a:rPr lang="en-US" sz="3800" i="1" dirty="0">
+                <a:solidFill>
+                  <a:srgbClr val="1E6B33"/>
+                </a:solidFill>
+                <a:latin typeface="Cambria" pitchFamily="34" charset="0"/>
+                <a:ea typeface="Cambria" pitchFamily="34" charset="-122"/>
+                <a:cs typeface="Cambria" pitchFamily="34" charset="-120"/>
+              </a:rPr>
+              <a:t>видит</a:t>
+            </a:r>
+            <a:pPr algn="l" indent="0" marL="0">
+              <a:buNone/>
+            </a:pPr>
+            <a:r>
+              <a:rPr lang="en-US" sz="3800" dirty="0">
+                <a:solidFill>
+                  <a:srgbClr val="1A1A17"/>
+                </a:solidFill>
+                <a:latin typeface="Cambria" pitchFamily="34" charset="0"/>
+                <a:ea typeface="Cambria" pitchFamily="34" charset="-122"/>
+                <a:cs typeface="Cambria" pitchFamily="34" charset="-120"/>
+              </a:rPr>
+              <a:t> соседа</a:t>
+            </a:r>
+            <a:endParaRPr lang="en-US" sz="3800" dirty="0"/>
           </a:p>
         </p:txBody>
       </p:sp>
       <p:sp>
         <p:nvSpPr>
-          <p:cNvPr id="4" name="каталог"/>
-          <p:cNvSpPr/>
+          <p:cNvPr id="4" name="Text 2"/>
+          <p:cNvSpPr txBox="1"/>
           <p:nvPr/>
         </p:nvSpPr>
         <p:spPr>
           <a:xfrm>
-            <a:off x="4389120" y="1600200"/>
-            <a:ext cx="3383280" cy="1645920"/>
-          </a:xfrm>
-          <a:prstGeom prst="roundRect">
-            <a:avLst>
-              <a:gd name="adj" fmla="val 4444"/>
-            </a:avLst>
-          </a:prstGeom>
-          <a:solidFill>
-            <a:srgbClr val="FFFFFF"/>
-          </a:solidFill>
-          <a:ln w="12700">
-            <a:solidFill>
-              <a:srgbClr val="E3DED5"/>
-            </a:solidFill>
-          </a:ln>
-        </p:spPr>
-        <p:txBody>
-          <a:bodyPr wrap="square" lIns="152400" tIns="177800" rIns="177800" bIns="152400" rtlCol="0" anchor="t"/>
-          <a:lstStyle/>
-          <a:p>
-            <a:pPr algn="l" indent="0" marL="0">
-              <a:buNone/>
-            </a:pPr>
-            <a:r>
-              <a:rPr lang="en-US" sz="1600" b="1" dirty="0">
-                <a:solidFill>
-                  <a:srgbClr val="B8761F"/>
-                </a:solidFill>
-              </a:rPr>
-              <a:t>Каталог с ценой</a:t>
-            </a:r>
-            <a:endParaRPr lang="en-US" sz="1600" dirty="0"/>
-          </a:p>
-          <a:p>
-            <a:pPr algn="l" indent="0" marL="0">
-              <a:buNone/>
-            </a:pPr>
-            <a:r>
-              <a:rPr lang="en-US" sz="600" dirty="0">
-                <a:solidFill>
-                  <a:srgbClr val="000000"/>
-                </a:solidFill>
-              </a:rPr>
-              <a:t> </a:t>
-            </a:r>
-            <a:endParaRPr lang="en-US" sz="1600" dirty="0"/>
-          </a:p>
-          <a:p>
-            <a:pPr algn="l" indent="0" marL="0">
-              <a:buNone/>
-            </a:pPr>
-            <a:r>
-              <a:rPr lang="en-US" sz="1300" dirty="0">
-                <a:solidFill>
-                  <a:schemeClr val="tx1"/>
-                </a:solidFill>
-              </a:rPr>
-              <a:t>Товар, цена, единица — клубника, 250 ₽ за ведро</a:t>
-            </a:r>
-            <a:endParaRPr lang="en-US" sz="1600" dirty="0"/>
-          </a:p>
-        </p:txBody>
-      </p:sp>
-      <p:sp>
-        <p:nvSpPr>
-          <p:cNvPr id="5" name="отзывы"/>
-          <p:cNvSpPr/>
-          <p:nvPr/>
-        </p:nvSpPr>
-        <p:spPr>
-          <a:xfrm>
-            <a:off x="8138160" y="1600200"/>
-            <a:ext cx="3383280" cy="1645920"/>
-          </a:xfrm>
-          <a:prstGeom prst="roundRect">
-            <a:avLst>
-              <a:gd name="adj" fmla="val 4444"/>
-            </a:avLst>
-          </a:prstGeom>
-          <a:solidFill>
-            <a:srgbClr val="FFFFFF"/>
-          </a:solidFill>
-          <a:ln w="12700">
-            <a:solidFill>
-              <a:srgbClr val="E3DED5"/>
-            </a:solidFill>
-          </a:ln>
-        </p:spPr>
-        <p:txBody>
-          <a:bodyPr wrap="square" lIns="152400" tIns="177800" rIns="177800" bIns="152400" rtlCol="0" anchor="t"/>
-          <a:lstStyle/>
-          <a:p>
-            <a:pPr algn="l" indent="0" marL="0">
-              <a:buNone/>
-            </a:pPr>
-            <a:r>
-              <a:rPr lang="en-US" sz="1600" b="1" dirty="0">
-                <a:solidFill>
-                  <a:srgbClr val="B8761F"/>
-                </a:solidFill>
-              </a:rPr>
-              <a:t>Отзывы и рейтинг</a:t>
-            </a:r>
-            <a:endParaRPr lang="en-US" sz="1600" dirty="0"/>
-          </a:p>
-          <a:p>
-            <a:pPr algn="l" indent="0" marL="0">
-              <a:buNone/>
-            </a:pPr>
-            <a:r>
-              <a:rPr lang="en-US" sz="600" dirty="0">
-                <a:solidFill>
-                  <a:srgbClr val="000000"/>
-                </a:solidFill>
-              </a:rPr>
-              <a:t> </a:t>
-            </a:r>
-            <a:endParaRPr lang="en-US" sz="1600" dirty="0"/>
-          </a:p>
-          <a:p>
-            <a:pPr algn="l" indent="0" marL="0">
-              <a:buNone/>
-            </a:pPr>
-            <a:r>
-              <a:rPr lang="en-US" sz="1300" dirty="0">
-                <a:solidFill>
-                  <a:schemeClr val="tx1"/>
-                </a:solidFill>
-              </a:rPr>
-              <a:t>Видно, у кого покупать второй раз</a:t>
-            </a:r>
-            <a:endParaRPr lang="en-US" sz="1600" dirty="0"/>
-          </a:p>
-        </p:txBody>
-      </p:sp>
-      <p:sp>
-        <p:nvSpPr>
-          <p:cNvPr id="6" name="самовывоз"/>
-          <p:cNvSpPr/>
-          <p:nvPr/>
-        </p:nvSpPr>
-        <p:spPr>
-          <a:xfrm>
-            <a:off x="640080" y="3383280"/>
-            <a:ext cx="3383280" cy="1371600"/>
-          </a:xfrm>
-          <a:prstGeom prst="roundRect">
-            <a:avLst>
-              <a:gd name="adj" fmla="val 5333"/>
-            </a:avLst>
-          </a:prstGeom>
-          <a:solidFill>
-            <a:srgbClr val="FFFFFF"/>
-          </a:solidFill>
-          <a:ln w="12700">
-            <a:solidFill>
-              <a:srgbClr val="E3DED5"/>
-            </a:solidFill>
-          </a:ln>
-        </p:spPr>
-        <p:txBody>
-          <a:bodyPr wrap="square" lIns="152400" tIns="177800" rIns="177800" bIns="152400" rtlCol="0" anchor="t"/>
-          <a:lstStyle/>
-          <a:p>
-            <a:pPr algn="l" indent="0" marL="0">
-              <a:buNone/>
-            </a:pPr>
-            <a:r>
-              <a:rPr lang="en-US" sz="1600" b="1" dirty="0">
-                <a:solidFill>
-                  <a:srgbClr val="B8761F"/>
-                </a:solidFill>
-              </a:rPr>
-              <a:t>Самовывоз</a:t>
-            </a:r>
-            <a:endParaRPr lang="en-US" sz="1600" dirty="0"/>
-          </a:p>
-          <a:p>
-            <a:pPr algn="l" indent="0" marL="0">
-              <a:buNone/>
-            </a:pPr>
-            <a:r>
-              <a:rPr lang="en-US" sz="600" dirty="0">
-                <a:solidFill>
-                  <a:srgbClr val="000000"/>
-                </a:solidFill>
-              </a:rPr>
-              <a:t> </a:t>
-            </a:r>
-            <a:endParaRPr lang="en-US" sz="1600" dirty="0"/>
-          </a:p>
-          <a:p>
-            <a:pPr algn="l" indent="0" marL="0">
-              <a:buNone/>
-            </a:pPr>
-            <a:r>
-              <a:rPr lang="en-US" sz="1300" dirty="0">
-                <a:solidFill>
-                  <a:schemeClr val="tx1"/>
-                </a:solidFill>
-              </a:rPr>
-              <a:t>Забрал по пути, без доставки</a:t>
-            </a:r>
-            <a:endParaRPr lang="en-US" sz="1600" dirty="0"/>
-          </a:p>
-        </p:txBody>
-      </p:sp>
-      <p:sp>
-        <p:nvSpPr>
-          <p:cNvPr id="7" name="роли"/>
-          <p:cNvSpPr/>
-          <p:nvPr/>
-        </p:nvSpPr>
-        <p:spPr>
-          <a:xfrm>
-            <a:off x="4389120" y="3383280"/>
-            <a:ext cx="3383280" cy="1371600"/>
-          </a:xfrm>
-          <a:prstGeom prst="roundRect">
-            <a:avLst>
-              <a:gd name="adj" fmla="val 5333"/>
-            </a:avLst>
-          </a:prstGeom>
-          <a:solidFill>
-            <a:srgbClr val="FFFFFF"/>
-          </a:solidFill>
-          <a:ln w="12700">
-            <a:solidFill>
-              <a:srgbClr val="E3DED5"/>
-            </a:solidFill>
-          </a:ln>
-        </p:spPr>
-        <p:txBody>
-          <a:bodyPr wrap="square" lIns="152400" tIns="177800" rIns="177800" bIns="152400" rtlCol="0" anchor="t"/>
-          <a:lstStyle/>
-          <a:p>
-            <a:pPr algn="l" indent="0" marL="0">
-              <a:buNone/>
-            </a:pPr>
-            <a:r>
-              <a:rPr lang="en-US" sz="1600" b="1" dirty="0">
-                <a:solidFill>
-                  <a:srgbClr val="B8761F"/>
-                </a:solidFill>
-              </a:rPr>
-              <a:t>Две роли</a:t>
-            </a:r>
-            <a:endParaRPr lang="en-US" sz="1600" dirty="0"/>
-          </a:p>
-          <a:p>
-            <a:pPr algn="l" indent="0" marL="0">
-              <a:buNone/>
-            </a:pPr>
-            <a:r>
-              <a:rPr lang="en-US" sz="600" dirty="0">
-                <a:solidFill>
-                  <a:srgbClr val="000000"/>
-                </a:solidFill>
-              </a:rPr>
-              <a:t> </a:t>
-            </a:r>
-            <a:endParaRPr lang="en-US" sz="1600" dirty="0"/>
-          </a:p>
-          <a:p>
-            <a:pPr algn="l" indent="0" marL="0">
-              <a:buNone/>
-            </a:pPr>
-            <a:r>
-              <a:rPr lang="en-US" sz="1300" dirty="0">
-                <a:solidFill>
-                  <a:schemeClr val="tx1"/>
-                </a:solidFill>
-              </a:rPr>
-              <a:t>Покупать или стать продавцом</a:t>
-            </a:r>
-            <a:endParaRPr lang="en-US" sz="1600" dirty="0"/>
-          </a:p>
-        </p:txBody>
-      </p:sp>
-      <p:sp>
-        <p:nvSpPr>
-          <p:cNvPr id="8" name="телефон"/>
-          <p:cNvSpPr/>
-          <p:nvPr/>
-        </p:nvSpPr>
-        <p:spPr>
-          <a:xfrm>
-            <a:off x="8138160" y="3383280"/>
-            <a:ext cx="3383280" cy="1371600"/>
-          </a:xfrm>
-          <a:prstGeom prst="roundRect">
-            <a:avLst>
-              <a:gd name="adj" fmla="val 5333"/>
-            </a:avLst>
-          </a:prstGeom>
-          <a:solidFill>
-            <a:srgbClr val="FFFFFF"/>
-          </a:solidFill>
-          <a:ln w="12700">
-            <a:solidFill>
-              <a:srgbClr val="E3DED5"/>
-            </a:solidFill>
-          </a:ln>
-        </p:spPr>
-        <p:txBody>
-          <a:bodyPr wrap="square" lIns="152400" tIns="177800" rIns="177800" bIns="152400" rtlCol="0" anchor="t"/>
-          <a:lstStyle/>
-          <a:p>
-            <a:pPr algn="l" indent="0" marL="0">
-              <a:buNone/>
-            </a:pPr>
-            <a:r>
-              <a:rPr lang="en-US" sz="1600" b="1" dirty="0">
-                <a:solidFill>
-                  <a:srgbClr val="B8761F"/>
-                </a:solidFill>
-              </a:rPr>
-              <a:t>Телефон</a:t>
-            </a:r>
-            <a:endParaRPr lang="en-US" sz="1600" dirty="0"/>
-          </a:p>
-          <a:p>
-            <a:pPr algn="l" indent="0" marL="0">
-              <a:buNone/>
-            </a:pPr>
-            <a:r>
-              <a:rPr lang="en-US" sz="600" dirty="0">
-                <a:solidFill>
-                  <a:srgbClr val="000000"/>
-                </a:solidFill>
-              </a:rPr>
-              <a:t> </a:t>
-            </a:r>
-            <a:endParaRPr lang="en-US" sz="1600" dirty="0"/>
-          </a:p>
-          <a:p>
-            <a:pPr algn="l" indent="0" marL="0">
-              <a:buNone/>
-            </a:pPr>
-            <a:r>
-              <a:rPr lang="en-US" sz="1300" dirty="0">
-                <a:solidFill>
-                  <a:schemeClr val="tx1"/>
-                </a:solidFill>
-              </a:rPr>
-              <a:t>Открывается в браузере, ставить нечего</a:t>
-            </a:r>
-            <a:endParaRPr lang="en-US" sz="1600" dirty="0"/>
-          </a:p>
-        </p:txBody>
-      </p:sp>
-      <p:sp>
-        <p:nvSpPr>
-          <p:cNvPr id="9" name="Text 7"/>
-          <p:cNvSpPr txBox="1"/>
-          <p:nvPr/>
-        </p:nvSpPr>
-        <p:spPr>
-          <a:xfrm>
-            <a:off x="640080" y="4937760"/>
-            <a:ext cx="10881360" cy="457200"/>
+            <a:off x="822960" y="2011680"/>
+            <a:ext cx="9601200" cy="457200"/>
           </a:xfrm>
           <a:prstGeom prst="rect">
             <a:avLst/>
@@ -2726,63 +2261,468 @@
           <a:bodyPr wrap="square" lIns="0" tIns="0" rIns="0" bIns="0" rtlCol="0" anchor="t"/>
           <a:lstStyle/>
           <a:p>
-            <a:pPr indent="0" marL="0">
-              <a:buNone/>
-            </a:pPr>
-            <a:r>
-              <a:rPr lang="en-US" sz="1500" b="1" dirty="0">
-                <a:solidFill>
-                  <a:srgbClr val="3E2B14"/>
-                </a:solidFill>
-              </a:rPr>
-              <a:t>Бабушке не нужен компьютер: выложила с телефона — и соседи увидели в тот же вечер</a:t>
-            </a:r>
-            <a:endParaRPr lang="en-US" sz="1500" dirty="0"/>
+            <a:pPr algn="l" indent="0" marL="0">
+              <a:buNone/>
+            </a:pPr>
+            <a:r>
+              <a:rPr lang="en-US" sz="1900" dirty="0">
+                <a:solidFill>
+                  <a:srgbClr val="6B6B66"/>
+                </a:solidFill>
+              </a:rPr>
+              <a:t>Место, где видно, что продаётся рядом с тобой прямо сейчас</a:t>
+            </a:r>
+            <a:endParaRPr lang="en-US" sz="1900" dirty="0"/>
           </a:p>
         </p:txBody>
       </p:sp>
       <p:sp>
         <p:nvSpPr>
-          <p:cNvPr id="25" name="Slide Number Placeholder 0"/>
-          <p:cNvSpPr>
-            <a:spLocks noGrp="1"/>
-          </p:cNvSpPr>
-          <p:nvPr>
-            <p:ph type="sldNum" sz="quarter" idx="4294967295"/>
-          </p:nvPr>
+          <p:cNvPr id="5" name="карта"/>
+          <p:cNvSpPr/>
+          <p:nvPr/>
         </p:nvSpPr>
         <p:spPr>
           <a:xfrm>
-            <a:off x="11247120" y="6400800"/>
-            <a:ext cx="365760" cy="274320"/>
+            <a:off x="822960" y="2697480"/>
+            <a:ext cx="3291840" cy="1463040"/>
           </a:xfrm>
-          <a:prstGeom prst="rect">
-            <a:avLst/>
+          <a:prstGeom prst="roundRect">
+            <a:avLst>
+              <a:gd name="adj" fmla="val 6250"/>
+            </a:avLst>
           </a:prstGeom>
-          <a:extLst>
-            <a:ext uri="{C572A759-6A51-4108-AA02-DFA0A04FC94B}">
-              <ma14:wrappingTextBoxFlag xmlns:ma14="http://schemas.microsoft.com/office/mac/drawingml/2011/main" val="0"/>
-            </a:ext>
-          </a:extLst>
+          <a:solidFill>
+            <a:srgbClr val="FFFFFF"/>
+          </a:solidFill>
+          <a:ln w="12700">
+            <a:solidFill>
+              <a:srgbClr val="E6E6DF"/>
+            </a:solidFill>
+          </a:ln>
         </p:spPr>
         <p:txBody>
-          <a:bodyPr/>
-          <a:lstStyle>
-            <a:lvl1pPr>
-              <a:defRPr sz="1000">
-                <a:solidFill>
-                  <a:srgbClr val="7A746B"/>
-                </a:solidFill>
-              </a:defRPr>
-            </a:lvl1pPr>
-          </a:lstStyle>
-          <a:p>
-            <a:pPr algn="r"/>
-            <a:fld id="{F7021451-1387-4CA6-816F-3879F97B5CBC}" type="slidenum">
-              <a:rPr b="0" lang="en-US"/>
-              <a:t>3</a:t>
-            </a:fld>
-            <a:endParaRPr lang="en-US"/>
+          <a:bodyPr wrap="square" lIns="177800" tIns="203200" rIns="203200" bIns="177800" rtlCol="0" anchor="t"/>
+          <a:lstStyle/>
+          <a:p>
+            <a:pPr algn="l" indent="0" marL="0">
+              <a:buNone/>
+            </a:pPr>
+            <a:r>
+              <a:rPr lang="en-US" sz="1600" b="1" dirty="0">
+                <a:solidFill>
+                  <a:srgbClr val="1A1A17"/>
+                </a:solidFill>
+                <a:latin typeface="Cambria" pitchFamily="34" charset="0"/>
+                <a:ea typeface="Cambria" pitchFamily="34" charset="-122"/>
+                <a:cs typeface="Cambria" pitchFamily="34" charset="-120"/>
+              </a:rPr>
+              <a:t>Всё на карте</a:t>
+            </a:r>
+            <a:endParaRPr lang="en-US" sz="1600" dirty="0"/>
+          </a:p>
+          <a:p>
+            <a:pPr algn="l" indent="0" marL="0">
+              <a:buNone/>
+            </a:pPr>
+            <a:r>
+              <a:rPr lang="en-US" sz="600" dirty="0">
+                <a:solidFill>
+                  <a:srgbClr val="000000"/>
+                </a:solidFill>
+              </a:rPr>
+              <a:t> </a:t>
+            </a:r>
+            <a:endParaRPr lang="en-US" sz="1600" dirty="0"/>
+          </a:p>
+          <a:p>
+            <a:pPr algn="l" indent="0" marL="0">
+              <a:buNone/>
+            </a:pPr>
+            <a:r>
+              <a:rPr lang="en-US" sz="1350" dirty="0">
+                <a:solidFill>
+                  <a:srgbClr val="6B6B66"/>
+                </a:solidFill>
+              </a:rPr>
+              <a:t>Видно, кто продаёт рядом и сколько до него идти</a:t>
+            </a:r>
+            <a:endParaRPr lang="en-US" sz="1600" dirty="0"/>
+          </a:p>
+        </p:txBody>
+      </p:sp>
+      <p:sp>
+        <p:nvSpPr>
+          <p:cNvPr id="6" name="каталог"/>
+          <p:cNvSpPr/>
+          <p:nvPr/>
+        </p:nvSpPr>
+        <p:spPr>
+          <a:xfrm>
+            <a:off x="4434840" y="2697480"/>
+            <a:ext cx="3291840" cy="1463040"/>
+          </a:xfrm>
+          <a:prstGeom prst="roundRect">
+            <a:avLst>
+              <a:gd name="adj" fmla="val 6250"/>
+            </a:avLst>
+          </a:prstGeom>
+          <a:solidFill>
+            <a:srgbClr val="FFFFFF"/>
+          </a:solidFill>
+          <a:ln w="12700">
+            <a:solidFill>
+              <a:srgbClr val="E6E6DF"/>
+            </a:solidFill>
+          </a:ln>
+        </p:spPr>
+        <p:txBody>
+          <a:bodyPr wrap="square" lIns="177800" tIns="203200" rIns="203200" bIns="177800" rtlCol="0" anchor="t"/>
+          <a:lstStyle/>
+          <a:p>
+            <a:pPr algn="l" indent="0" marL="0">
+              <a:buNone/>
+            </a:pPr>
+            <a:r>
+              <a:rPr lang="en-US" sz="1600" b="1" dirty="0">
+                <a:solidFill>
+                  <a:srgbClr val="1A1A17"/>
+                </a:solidFill>
+                <a:latin typeface="Cambria" pitchFamily="34" charset="0"/>
+                <a:ea typeface="Cambria" pitchFamily="34" charset="-122"/>
+                <a:cs typeface="Cambria" pitchFamily="34" charset="-120"/>
+              </a:rPr>
+              <a:t>Товар и цена</a:t>
+            </a:r>
+            <a:endParaRPr lang="en-US" sz="1600" dirty="0"/>
+          </a:p>
+          <a:p>
+            <a:pPr algn="l" indent="0" marL="0">
+              <a:buNone/>
+            </a:pPr>
+            <a:r>
+              <a:rPr lang="en-US" sz="600" dirty="0">
+                <a:solidFill>
+                  <a:srgbClr val="000000"/>
+                </a:solidFill>
+              </a:rPr>
+              <a:t> </a:t>
+            </a:r>
+            <a:endParaRPr lang="en-US" sz="1600" dirty="0"/>
+          </a:p>
+          <a:p>
+            <a:pPr algn="l" indent="0" marL="0">
+              <a:buNone/>
+            </a:pPr>
+            <a:r>
+              <a:rPr lang="en-US" sz="1350" dirty="0">
+                <a:solidFill>
+                  <a:srgbClr val="6B6B66"/>
+                </a:solidFill>
+              </a:rPr>
+              <a:t>Фотография, цена и единица — клубника, ведро</a:t>
+            </a:r>
+            <a:endParaRPr lang="en-US" sz="1600" dirty="0"/>
+          </a:p>
+        </p:txBody>
+      </p:sp>
+      <p:sp>
+        <p:nvSpPr>
+          <p:cNvPr id="7" name="отзывы"/>
+          <p:cNvSpPr/>
+          <p:nvPr/>
+        </p:nvSpPr>
+        <p:spPr>
+          <a:xfrm>
+            <a:off x="8046720" y="2697480"/>
+            <a:ext cx="3291840" cy="1463040"/>
+          </a:xfrm>
+          <a:prstGeom prst="roundRect">
+            <a:avLst>
+              <a:gd name="adj" fmla="val 6250"/>
+            </a:avLst>
+          </a:prstGeom>
+          <a:solidFill>
+            <a:srgbClr val="FFFFFF"/>
+          </a:solidFill>
+          <a:ln w="12700">
+            <a:solidFill>
+              <a:srgbClr val="E6E6DF"/>
+            </a:solidFill>
+          </a:ln>
+        </p:spPr>
+        <p:txBody>
+          <a:bodyPr wrap="square" lIns="177800" tIns="203200" rIns="203200" bIns="177800" rtlCol="0" anchor="t"/>
+          <a:lstStyle/>
+          <a:p>
+            <a:pPr algn="l" indent="0" marL="0">
+              <a:buNone/>
+            </a:pPr>
+            <a:r>
+              <a:rPr lang="en-US" sz="1600" b="1" dirty="0">
+                <a:solidFill>
+                  <a:srgbClr val="1A1A17"/>
+                </a:solidFill>
+                <a:latin typeface="Cambria" pitchFamily="34" charset="0"/>
+                <a:ea typeface="Cambria" pitchFamily="34" charset="-122"/>
+                <a:cs typeface="Cambria" pitchFamily="34" charset="-120"/>
+              </a:rPr>
+              <a:t>Отзывы</a:t>
+            </a:r>
+            <a:endParaRPr lang="en-US" sz="1600" dirty="0"/>
+          </a:p>
+          <a:p>
+            <a:pPr algn="l" indent="0" marL="0">
+              <a:buNone/>
+            </a:pPr>
+            <a:r>
+              <a:rPr lang="en-US" sz="600" dirty="0">
+                <a:solidFill>
+                  <a:srgbClr val="000000"/>
+                </a:solidFill>
+              </a:rPr>
+              <a:t> </a:t>
+            </a:r>
+            <a:endParaRPr lang="en-US" sz="1600" dirty="0"/>
+          </a:p>
+          <a:p>
+            <a:pPr algn="l" indent="0" marL="0">
+              <a:buNone/>
+            </a:pPr>
+            <a:r>
+              <a:rPr lang="en-US" sz="1350" dirty="0">
+                <a:solidFill>
+                  <a:srgbClr val="6B6B66"/>
+                </a:solidFill>
+              </a:rPr>
+              <a:t>Видно, у кого покупать второй раз</a:t>
+            </a:r>
+            <a:endParaRPr lang="en-US" sz="1600" dirty="0"/>
+          </a:p>
+        </p:txBody>
+      </p:sp>
+      <p:sp>
+        <p:nvSpPr>
+          <p:cNvPr id="8" name="самовывоз"/>
+          <p:cNvSpPr/>
+          <p:nvPr/>
+        </p:nvSpPr>
+        <p:spPr>
+          <a:xfrm>
+            <a:off x="822960" y="4343400"/>
+            <a:ext cx="3291840" cy="1371600"/>
+          </a:xfrm>
+          <a:prstGeom prst="roundRect">
+            <a:avLst>
+              <a:gd name="adj" fmla="val 6667"/>
+            </a:avLst>
+          </a:prstGeom>
+          <a:solidFill>
+            <a:srgbClr val="FFFFFF"/>
+          </a:solidFill>
+          <a:ln w="12700">
+            <a:solidFill>
+              <a:srgbClr val="E6E6DF"/>
+            </a:solidFill>
+          </a:ln>
+        </p:spPr>
+        <p:txBody>
+          <a:bodyPr wrap="square" lIns="177800" tIns="203200" rIns="203200" bIns="177800" rtlCol="0" anchor="t"/>
+          <a:lstStyle/>
+          <a:p>
+            <a:pPr algn="l" indent="0" marL="0">
+              <a:buNone/>
+            </a:pPr>
+            <a:r>
+              <a:rPr lang="en-US" sz="1600" b="1" dirty="0">
+                <a:solidFill>
+                  <a:srgbClr val="1A1A17"/>
+                </a:solidFill>
+                <a:latin typeface="Cambria" pitchFamily="34" charset="0"/>
+                <a:ea typeface="Cambria" pitchFamily="34" charset="-122"/>
+                <a:cs typeface="Cambria" pitchFamily="34" charset="-120"/>
+              </a:rPr>
+              <a:t>Самовывоз</a:t>
+            </a:r>
+            <a:endParaRPr lang="en-US" sz="1600" dirty="0"/>
+          </a:p>
+          <a:p>
+            <a:pPr algn="l" indent="0" marL="0">
+              <a:buNone/>
+            </a:pPr>
+            <a:r>
+              <a:rPr lang="en-US" sz="600" dirty="0">
+                <a:solidFill>
+                  <a:srgbClr val="000000"/>
+                </a:solidFill>
+              </a:rPr>
+              <a:t> </a:t>
+            </a:r>
+            <a:endParaRPr lang="en-US" sz="1600" dirty="0"/>
+          </a:p>
+          <a:p>
+            <a:pPr algn="l" indent="0" marL="0">
+              <a:buNone/>
+            </a:pPr>
+            <a:r>
+              <a:rPr lang="en-US" sz="1350" dirty="0">
+                <a:solidFill>
+                  <a:srgbClr val="6B6B66"/>
+                </a:solidFill>
+              </a:rPr>
+              <a:t>Забрал по пути, без доставки и курьеров</a:t>
+            </a:r>
+            <a:endParaRPr lang="en-US" sz="1600" dirty="0"/>
+          </a:p>
+        </p:txBody>
+      </p:sp>
+      <p:sp>
+        <p:nvSpPr>
+          <p:cNvPr id="9" name="роли"/>
+          <p:cNvSpPr/>
+          <p:nvPr/>
+        </p:nvSpPr>
+        <p:spPr>
+          <a:xfrm>
+            <a:off x="4434840" y="4343400"/>
+            <a:ext cx="3291840" cy="1371600"/>
+          </a:xfrm>
+          <a:prstGeom prst="roundRect">
+            <a:avLst>
+              <a:gd name="adj" fmla="val 6667"/>
+            </a:avLst>
+          </a:prstGeom>
+          <a:solidFill>
+            <a:srgbClr val="FFFFFF"/>
+          </a:solidFill>
+          <a:ln w="12700">
+            <a:solidFill>
+              <a:srgbClr val="E6E6DF"/>
+            </a:solidFill>
+          </a:ln>
+        </p:spPr>
+        <p:txBody>
+          <a:bodyPr wrap="square" lIns="177800" tIns="203200" rIns="203200" bIns="177800" rtlCol="0" anchor="t"/>
+          <a:lstStyle/>
+          <a:p>
+            <a:pPr algn="l" indent="0" marL="0">
+              <a:buNone/>
+            </a:pPr>
+            <a:r>
+              <a:rPr lang="en-US" sz="1600" b="1" dirty="0">
+                <a:solidFill>
+                  <a:srgbClr val="1A1A17"/>
+                </a:solidFill>
+                <a:latin typeface="Cambria" pitchFamily="34" charset="0"/>
+                <a:ea typeface="Cambria" pitchFamily="34" charset="-122"/>
+                <a:cs typeface="Cambria" pitchFamily="34" charset="-120"/>
+              </a:rPr>
+              <a:t>Две роли</a:t>
+            </a:r>
+            <a:endParaRPr lang="en-US" sz="1600" dirty="0"/>
+          </a:p>
+          <a:p>
+            <a:pPr algn="l" indent="0" marL="0">
+              <a:buNone/>
+            </a:pPr>
+            <a:r>
+              <a:rPr lang="en-US" sz="600" dirty="0">
+                <a:solidFill>
+                  <a:srgbClr val="000000"/>
+                </a:solidFill>
+              </a:rPr>
+              <a:t> </a:t>
+            </a:r>
+            <a:endParaRPr lang="en-US" sz="1600" dirty="0"/>
+          </a:p>
+          <a:p>
+            <a:pPr algn="l" indent="0" marL="0">
+              <a:buNone/>
+            </a:pPr>
+            <a:r>
+              <a:rPr lang="en-US" sz="1350" dirty="0">
+                <a:solidFill>
+                  <a:srgbClr val="6B6B66"/>
+                </a:solidFill>
+              </a:rPr>
+              <a:t>Покупать или стать продавцом — в один клик</a:t>
+            </a:r>
+            <a:endParaRPr lang="en-US" sz="1600" dirty="0"/>
+          </a:p>
+        </p:txBody>
+      </p:sp>
+      <p:sp>
+        <p:nvSpPr>
+          <p:cNvPr id="10" name="телефон"/>
+          <p:cNvSpPr/>
+          <p:nvPr/>
+        </p:nvSpPr>
+        <p:spPr>
+          <a:xfrm>
+            <a:off x="8046720" y="4343400"/>
+            <a:ext cx="3291840" cy="1371600"/>
+          </a:xfrm>
+          <a:prstGeom prst="roundRect">
+            <a:avLst>
+              <a:gd name="adj" fmla="val 6667"/>
+            </a:avLst>
+          </a:prstGeom>
+          <a:solidFill>
+            <a:srgbClr val="FFFFFF"/>
+          </a:solidFill>
+          <a:ln w="12700">
+            <a:solidFill>
+              <a:srgbClr val="E6E6DF"/>
+            </a:solidFill>
+          </a:ln>
+        </p:spPr>
+        <p:txBody>
+          <a:bodyPr wrap="square" lIns="177800" tIns="203200" rIns="203200" bIns="177800" rtlCol="0" anchor="t"/>
+          <a:lstStyle/>
+          <a:p>
+            <a:pPr algn="l" indent="0" marL="0">
+              <a:buNone/>
+            </a:pPr>
+            <a:r>
+              <a:rPr lang="en-US" sz="1600" b="1" dirty="0">
+                <a:solidFill>
+                  <a:srgbClr val="1A1A17"/>
+                </a:solidFill>
+                <a:latin typeface="Cambria" pitchFamily="34" charset="0"/>
+                <a:ea typeface="Cambria" pitchFamily="34" charset="-122"/>
+                <a:cs typeface="Cambria" pitchFamily="34" charset="-120"/>
+              </a:rPr>
+              <a:t>С телефона</a:t>
+            </a:r>
+            <a:endParaRPr lang="en-US" sz="1600" dirty="0"/>
+          </a:p>
+          <a:p>
+            <a:pPr algn="l" indent="0" marL="0">
+              <a:buNone/>
+            </a:pPr>
+            <a:r>
+              <a:rPr lang="en-US" sz="600" dirty="0">
+                <a:solidFill>
+                  <a:srgbClr val="000000"/>
+                </a:solidFill>
+              </a:rPr>
+              <a:t> </a:t>
+            </a:r>
+            <a:endParaRPr lang="en-US" sz="1600" dirty="0"/>
+          </a:p>
+          <a:p>
+            <a:pPr algn="l" indent="0" marL="0">
+              <a:buNone/>
+            </a:pPr>
+            <a:r>
+              <a:rPr lang="en-US" sz="1350" dirty="0">
+                <a:solidFill>
+                  <a:srgbClr val="6B6B66"/>
+                </a:solidFill>
+              </a:rPr>
+              <a:t>Открывается в браузере, ставить ничего не нужно</a:t>
+            </a:r>
+            <a:endParaRPr lang="en-US" sz="1600" dirty="0"/>
           </a:p>
         </p:txBody>
       </p:sp>
@@ -2813,14 +2753,14 @@
       </p:grpSpPr>
       <p:sp>
         <p:nvSpPr>
-          <p:cNvPr id="2" name="Text 0"/>
+          <p:cNvPr id="2" name="логотип"/>
           <p:cNvSpPr txBox="1"/>
           <p:nvPr/>
         </p:nvSpPr>
         <p:spPr>
           <a:xfrm>
-            <a:off x="640080" y="411480"/>
-            <a:ext cx="10881360" cy="822960"/>
+            <a:off x="822960" y="365760"/>
+            <a:ext cx="2743200" cy="320040"/>
           </a:xfrm>
           <a:prstGeom prst="rect">
             <a:avLst/>
@@ -2832,18 +2772,35 @@
           <a:bodyPr wrap="square" lIns="0" tIns="0" rIns="0" bIns="0" rtlCol="0" anchor="ctr"/>
           <a:lstStyle/>
           <a:p>
-            <a:pPr algn="l" indent="0" marL="0">
-              <a:buNone/>
-            </a:pPr>
-            <a:r>
-              <a:rPr lang="en-US" sz="3800" b="1" dirty="0">
-                <a:solidFill>
-                  <a:srgbClr val="3E2B14"/>
-                </a:solidFill>
-              </a:rPr>
-              <a:t>Почему не чат и не Авито</a:t>
-            </a:r>
-            <a:endParaRPr lang="en-US" sz="3800" dirty="0"/>
+            <a:pPr indent="0" marL="0">
+              <a:buNone/>
+            </a:pPr>
+            <a:r>
+              <a:rPr lang="en-US" sz="1600" b="1" dirty="0">
+                <a:solidFill>
+                  <a:srgbClr val="1A1A17"/>
+                </a:solidFill>
+                <a:latin typeface="Cambria" pitchFamily="34" charset="0"/>
+                <a:ea typeface="Cambria" pitchFamily="34" charset="-122"/>
+                <a:cs typeface="Cambria" pitchFamily="34" charset="-120"/>
+              </a:rPr>
+              <a:t>Своя</a:t>
+            </a:r>
+            <a:pPr indent="0" marL="0">
+              <a:buNone/>
+            </a:pPr>
+            <a:r>
+              <a:rPr lang="en-US" sz="1600" b="1" dirty="0">
+                <a:solidFill>
+                  <a:srgbClr val="1E6B33"/>
+                </a:solidFill>
+                <a:latin typeface="Cambria" pitchFamily="34" charset="0"/>
+                <a:ea typeface="Cambria" pitchFamily="34" charset="-122"/>
+                <a:cs typeface="Cambria" pitchFamily="34" charset="-120"/>
+              </a:rPr>
+              <a:t>еда</a:t>
+            </a:r>
+            <a:endParaRPr lang="en-US" sz="1600" dirty="0"/>
           </a:p>
         </p:txBody>
       </p:sp>
@@ -2855,8 +2812,61 @@
         </p:nvSpPr>
         <p:spPr>
           <a:xfrm>
-            <a:off x="640080" y="1371600"/>
-            <a:ext cx="10881360" cy="640080"/>
+            <a:off x="822960" y="1051560"/>
+            <a:ext cx="10515600" cy="914400"/>
+          </a:xfrm>
+          <a:prstGeom prst="rect">
+            <a:avLst/>
+          </a:prstGeom>
+          <a:noFill/>
+          <a:ln/>
+        </p:spPr>
+        <p:txBody>
+          <a:bodyPr wrap="square" lIns="0" tIns="0" rIns="0" bIns="0" rtlCol="0" anchor="ctr"/>
+          <a:lstStyle/>
+          <a:p>
+            <a:pPr algn="l" indent="0" marL="0">
+              <a:buNone/>
+            </a:pPr>
+            <a:r>
+              <a:rPr lang="en-US" sz="3800" dirty="0">
+                <a:solidFill>
+                  <a:srgbClr val="1A1A17"/>
+                </a:solidFill>
+                <a:latin typeface="Cambria" pitchFamily="34" charset="0"/>
+                <a:ea typeface="Cambria" pitchFamily="34" charset="-122"/>
+                <a:cs typeface="Cambria" pitchFamily="34" charset="-120"/>
+              </a:rPr>
+              <a:t>Почему не чат и </a:t>
+            </a:r>
+            <a:pPr algn="l" indent="0" marL="0">
+              <a:buNone/>
+            </a:pPr>
+            <a:r>
+              <a:rPr lang="en-US" sz="3800" i="1" dirty="0">
+                <a:solidFill>
+                  <a:srgbClr val="1E6B33"/>
+                </a:solidFill>
+                <a:latin typeface="Cambria" pitchFamily="34" charset="0"/>
+                <a:ea typeface="Cambria" pitchFamily="34" charset="-122"/>
+                <a:cs typeface="Cambria" pitchFamily="34" charset="-120"/>
+              </a:rPr>
+              <a:t>не Авито</a:t>
+            </a:r>
+            <a:endParaRPr lang="en-US" sz="3800" dirty="0"/>
+          </a:p>
+        </p:txBody>
+      </p:sp>
+      <p:sp>
+        <p:nvSpPr>
+          <p:cNvPr id="4" name="Text 2"/>
+          <p:cNvSpPr txBox="1"/>
+          <p:nvPr/>
+        </p:nvSpPr>
+        <p:spPr>
+          <a:xfrm>
+            <a:off x="822960" y="2011680"/>
+            <a:ext cx="9601200" cy="731520"/>
           </a:xfrm>
           <a:prstGeom prst="rect">
             <a:avLst/>
@@ -2868,18 +2878,18 @@
           <a:bodyPr wrap="square" lIns="0" tIns="0" rIns="0" bIns="0" rtlCol="0" anchor="t"/>
           <a:lstStyle/>
           <a:p>
-            <a:pPr indent="0" marL="0">
-              <a:buNone/>
-            </a:pPr>
-            <a:r>
-              <a:rPr lang="en-US" sz="1500" b="1" dirty="0">
-                <a:solidFill>
-                  <a:srgbClr val="3E2B14"/>
-                </a:solidFill>
-              </a:rPr>
-              <a:t>В сельском чате объявление тонет за час, и всё равно не знаешь, у кого клубника вкусная. На сайте у продавца остаются отзывы — сразу видно, к кому идти второй раз.</a:t>
-            </a:r>
-            <a:endParaRPr lang="en-US" sz="1500" dirty="0"/>
+            <a:pPr algn="l" indent="0" marL="0">
+              <a:buNone/>
+            </a:pPr>
+            <a:r>
+              <a:rPr lang="en-US" sz="1800" dirty="0">
+                <a:solidFill>
+                  <a:srgbClr val="1A1A17"/>
+                </a:solidFill>
+              </a:rPr>
+              <a:t>В чате объявление тонет за час, и всё равно не знаешь, у кого клубника вкусная. Здесь у продавца остаются отзывы — сразу видно, к кому идти второй раз.</a:t>
+            </a:r>
+            <a:endParaRPr lang="en-US" sz="1800" dirty="0"/>
           </a:p>
         </p:txBody>
       </p:sp>
@@ -2898,18 +2908,18 @@
           </p:nvPr>
         </p:nvGraphicFramePr>
         <p:xfrm>
-          <a:off x="640080" y="2148840"/>
-          <a:ext cx="10881360" cy="914400"/>
+          <a:off x="822960" y="2971800"/>
+          <a:ext cx="10515600" cy="914400"/>
         </p:xfrm>
         <a:graphic>
           <a:graphicData uri="http://schemas.openxmlformats.org/drawingml/2006/table">
             <a:tbl>
               <a:tblPr/>
               <a:tblGrid>
-                <a:gridCol w="4023360"/>
-                <a:gridCol w="2468880"/>
-                <a:gridCol w="2377440"/>
-                <a:gridCol w="2011680"/>
+                <a:gridCol w="3931920"/>
+                <a:gridCol w="2194560"/>
+                <a:gridCol w="2194560"/>
+                <a:gridCol w="2194560"/>
               </a:tblGrid>
               <a:tr h="411480">
                 <a:tc>
@@ -2923,7 +2933,7 @@
                       <a:r>
                         <a:rPr lang="en-US" sz="1300" b="1" dirty="0">
                           <a:solidFill>
-                            <a:srgbClr val="23190E"/>
+                            <a:srgbClr val="1A1A17"/>
                           </a:solidFill>
                           <a:latin typeface="Calibri" pitchFamily="34" charset="0"/>
                           <a:ea typeface="Calibri" pitchFamily="34" charset="-122"/>
@@ -2941,7 +2951,7 @@
                   <a:tcPr marL="91440" marR="91440" marT="45720" marB="45720" anchor="ctr">
                     <a:lnL w="12700" cap="flat" cmpd="sng" algn="ctr">
                       <a:solidFill>
-                        <a:srgbClr val="E3DED5"/>
+                        <a:srgbClr val="E6E6DF"/>
                       </a:solidFill>
                       <a:prstDash val="solid"/>
                       <a:round/>
@@ -2950,7 +2960,7 @@
                     </a:lnL>
                     <a:lnR w="12700" cap="flat" cmpd="sng" algn="ctr">
                       <a:solidFill>
-                        <a:srgbClr val="E3DED5"/>
+                        <a:srgbClr val="E6E6DF"/>
                       </a:solidFill>
                       <a:prstDash val="solid"/>
                       <a:round/>
@@ -2959,7 +2969,7 @@
                     </a:lnR>
                     <a:lnT w="12700" cap="flat" cmpd="sng" algn="ctr">
                       <a:solidFill>
-                        <a:srgbClr val="E3DED5"/>
+                        <a:srgbClr val="E6E6DF"/>
                       </a:solidFill>
                       <a:prstDash val="solid"/>
                       <a:round/>
@@ -2968,7 +2978,7 @@
                     </a:lnT>
                     <a:lnB w="12700" cap="flat" cmpd="sng" algn="ctr">
                       <a:solidFill>
-                        <a:srgbClr val="E3DED5"/>
+                        <a:srgbClr val="E6E6DF"/>
                       </a:solidFill>
                       <a:prstDash val="solid"/>
                       <a:round/>
@@ -2991,7 +3001,7 @@
                       <a:r>
                         <a:rPr lang="en-US" sz="1300" b="1" dirty="0">
                           <a:solidFill>
-                            <a:srgbClr val="23190E"/>
+                            <a:srgbClr val="1A1A17"/>
                           </a:solidFill>
                           <a:latin typeface="Calibri" pitchFamily="34" charset="0"/>
                           <a:ea typeface="Calibri" pitchFamily="34" charset="-122"/>
@@ -3009,7 +3019,7 @@
                   <a:tcPr marL="91440" marR="91440" marT="45720" marB="45720" anchor="ctr">
                     <a:lnL w="12700" cap="flat" cmpd="sng" algn="ctr">
                       <a:solidFill>
-                        <a:srgbClr val="E3DED5"/>
+                        <a:srgbClr val="E6E6DF"/>
                       </a:solidFill>
                       <a:prstDash val="solid"/>
                       <a:round/>
@@ -3018,7 +3028,7 @@
                     </a:lnL>
                     <a:lnR w="12700" cap="flat" cmpd="sng" algn="ctr">
                       <a:solidFill>
-                        <a:srgbClr val="E3DED5"/>
+                        <a:srgbClr val="E6E6DF"/>
                       </a:solidFill>
                       <a:prstDash val="solid"/>
                       <a:round/>
@@ -3027,7 +3037,7 @@
                     </a:lnR>
                     <a:lnT w="12700" cap="flat" cmpd="sng" algn="ctr">
                       <a:solidFill>
-                        <a:srgbClr val="E3DED5"/>
+                        <a:srgbClr val="E6E6DF"/>
                       </a:solidFill>
                       <a:prstDash val="solid"/>
                       <a:round/>
@@ -3036,7 +3046,7 @@
                     </a:lnT>
                     <a:lnB w="12700" cap="flat" cmpd="sng" algn="ctr">
                       <a:solidFill>
-                        <a:srgbClr val="E3DED5"/>
+                        <a:srgbClr val="E6E6DF"/>
                       </a:solidFill>
                       <a:prstDash val="solid"/>
                       <a:round/>
@@ -3059,7 +3069,7 @@
                       <a:r>
                         <a:rPr lang="en-US" sz="1300" b="1" dirty="0">
                           <a:solidFill>
-                            <a:srgbClr val="23190E"/>
+                            <a:srgbClr val="1A1A17"/>
                           </a:solidFill>
                           <a:latin typeface="Calibri" pitchFamily="34" charset="0"/>
                           <a:ea typeface="Calibri" pitchFamily="34" charset="-122"/>
@@ -3077,7 +3087,7 @@
                   <a:tcPr marL="91440" marR="91440" marT="45720" marB="45720" anchor="ctr">
                     <a:lnL w="12700" cap="flat" cmpd="sng" algn="ctr">
                       <a:solidFill>
-                        <a:srgbClr val="E3DED5"/>
+                        <a:srgbClr val="E6E6DF"/>
                       </a:solidFill>
                       <a:prstDash val="solid"/>
                       <a:round/>
@@ -3086,7 +3096,7 @@
                     </a:lnL>
                     <a:lnR w="12700" cap="flat" cmpd="sng" algn="ctr">
                       <a:solidFill>
-                        <a:srgbClr val="E3DED5"/>
+                        <a:srgbClr val="E6E6DF"/>
                       </a:solidFill>
                       <a:prstDash val="solid"/>
                       <a:round/>
@@ -3095,7 +3105,7 @@
                     </a:lnR>
                     <a:lnT w="12700" cap="flat" cmpd="sng" algn="ctr">
                       <a:solidFill>
-                        <a:srgbClr val="E3DED5"/>
+                        <a:srgbClr val="E6E6DF"/>
                       </a:solidFill>
                       <a:prstDash val="solid"/>
                       <a:round/>
@@ -3104,7 +3114,7 @@
                     </a:lnT>
                     <a:lnB w="12700" cap="flat" cmpd="sng" algn="ctr">
                       <a:solidFill>
-                        <a:srgbClr val="E3DED5"/>
+                        <a:srgbClr val="E6E6DF"/>
                       </a:solidFill>
                       <a:prstDash val="solid"/>
                       <a:round/>
@@ -3127,7 +3137,7 @@
                       <a:r>
                         <a:rPr lang="en-US" sz="1300" b="1" dirty="0">
                           <a:solidFill>
-                            <a:srgbClr val="23190E"/>
+                            <a:srgbClr val="1A1A17"/>
                           </a:solidFill>
                           <a:latin typeface="Calibri" pitchFamily="34" charset="0"/>
                           <a:ea typeface="Calibri" pitchFamily="34" charset="-122"/>
@@ -3145,7 +3155,7 @@
                   <a:tcPr marL="91440" marR="91440" marT="45720" marB="45720" anchor="ctr">
                     <a:lnL w="12700" cap="flat" cmpd="sng" algn="ctr">
                       <a:solidFill>
-                        <a:srgbClr val="E3DED5"/>
+                        <a:srgbClr val="E6E6DF"/>
                       </a:solidFill>
                       <a:prstDash val="solid"/>
                       <a:round/>
@@ -3154,7 +3164,7 @@
                     </a:lnL>
                     <a:lnR w="12700" cap="flat" cmpd="sng" algn="ctr">
                       <a:solidFill>
-                        <a:srgbClr val="E3DED5"/>
+                        <a:srgbClr val="E6E6DF"/>
                       </a:solidFill>
                       <a:prstDash val="solid"/>
                       <a:round/>
@@ -3163,7 +3173,7 @@
                     </a:lnR>
                     <a:lnT w="12700" cap="flat" cmpd="sng" algn="ctr">
                       <a:solidFill>
-                        <a:srgbClr val="E3DED5"/>
+                        <a:srgbClr val="E6E6DF"/>
                       </a:solidFill>
                       <a:prstDash val="solid"/>
                       <a:round/>
@@ -3172,7 +3182,7 @@
                     </a:lnT>
                     <a:lnB w="12700" cap="flat" cmpd="sng" algn="ctr">
                       <a:solidFill>
-                        <a:srgbClr val="E3DED5"/>
+                        <a:srgbClr val="E6E6DF"/>
                       </a:solidFill>
                       <a:prstDash val="solid"/>
                       <a:round/>
@@ -3197,7 +3207,7 @@
                       <a:r>
                         <a:rPr lang="en-US" sz="1300" dirty="0">
                           <a:solidFill>
-                            <a:srgbClr val="23190E"/>
+                            <a:srgbClr val="1A1A17"/>
                           </a:solidFill>
                           <a:latin typeface="Calibri" pitchFamily="34" charset="0"/>
                           <a:ea typeface="Calibri" pitchFamily="34" charset="-122"/>
@@ -3215,7 +3225,7 @@
                   <a:tcPr marL="91440" marR="91440" marT="45720" marB="45720" anchor="ctr">
                     <a:lnL w="12700" cap="flat" cmpd="sng" algn="ctr">
                       <a:solidFill>
-                        <a:srgbClr val="E3DED5"/>
+                        <a:srgbClr val="E6E6DF"/>
                       </a:solidFill>
                       <a:prstDash val="solid"/>
                       <a:round/>
@@ -3224,7 +3234,7 @@
                     </a:lnL>
                     <a:lnR w="12700" cap="flat" cmpd="sng" algn="ctr">
                       <a:solidFill>
-                        <a:srgbClr val="E3DED5"/>
+                        <a:srgbClr val="E6E6DF"/>
                       </a:solidFill>
                       <a:prstDash val="solid"/>
                       <a:round/>
@@ -3233,7 +3243,7 @@
                     </a:lnR>
                     <a:lnT w="12700" cap="flat" cmpd="sng" algn="ctr">
                       <a:solidFill>
-                        <a:srgbClr val="E3DED5"/>
+                        <a:srgbClr val="E6E6DF"/>
                       </a:solidFill>
                       <a:prstDash val="solid"/>
                       <a:round/>
@@ -3242,7 +3252,7 @@
                     </a:lnT>
                     <a:lnB w="12700" cap="flat" cmpd="sng" algn="ctr">
                       <a:solidFill>
-                        <a:srgbClr val="E3DED5"/>
+                        <a:srgbClr val="E6E6DF"/>
                       </a:solidFill>
                       <a:prstDash val="solid"/>
                       <a:round/>
@@ -3265,7 +3275,7 @@
                       <a:r>
                         <a:rPr lang="en-US" sz="1300" dirty="0">
                           <a:solidFill>
-                            <a:srgbClr val="23190E"/>
+                            <a:srgbClr val="1A1A17"/>
                           </a:solidFill>
                           <a:latin typeface="Calibri" pitchFamily="34" charset="0"/>
                           <a:ea typeface="Calibri" pitchFamily="34" charset="-122"/>
@@ -3283,7 +3293,7 @@
                   <a:tcPr marL="91440" marR="91440" marT="45720" marB="45720" anchor="ctr">
                     <a:lnL w="12700" cap="flat" cmpd="sng" algn="ctr">
                       <a:solidFill>
-                        <a:srgbClr val="E3DED5"/>
+                        <a:srgbClr val="E6E6DF"/>
                       </a:solidFill>
                       <a:prstDash val="solid"/>
                       <a:round/>
@@ -3292,7 +3302,7 @@
                     </a:lnL>
                     <a:lnR w="12700" cap="flat" cmpd="sng" algn="ctr">
                       <a:solidFill>
-                        <a:srgbClr val="E3DED5"/>
+                        <a:srgbClr val="E6E6DF"/>
                       </a:solidFill>
                       <a:prstDash val="solid"/>
                       <a:round/>
@@ -3301,7 +3311,7 @@
                     </a:lnR>
                     <a:lnT w="12700" cap="flat" cmpd="sng" algn="ctr">
                       <a:solidFill>
-                        <a:srgbClr val="E3DED5"/>
+                        <a:srgbClr val="E6E6DF"/>
                       </a:solidFill>
                       <a:prstDash val="solid"/>
                       <a:round/>
@@ -3310,7 +3320,7 @@
                     </a:lnT>
                     <a:lnB w="12700" cap="flat" cmpd="sng" algn="ctr">
                       <a:solidFill>
-                        <a:srgbClr val="E3DED5"/>
+                        <a:srgbClr val="E6E6DF"/>
                       </a:solidFill>
                       <a:prstDash val="solid"/>
                       <a:round/>
@@ -3333,7 +3343,7 @@
                       <a:r>
                         <a:rPr lang="en-US" sz="1300" dirty="0">
                           <a:solidFill>
-                            <a:srgbClr val="23190E"/>
+                            <a:srgbClr val="1A1A17"/>
                           </a:solidFill>
                           <a:latin typeface="Calibri" pitchFamily="34" charset="0"/>
                           <a:ea typeface="Calibri" pitchFamily="34" charset="-122"/>
@@ -3351,7 +3361,7 @@
                   <a:tcPr marL="91440" marR="91440" marT="45720" marB="45720" anchor="ctr">
                     <a:lnL w="12700" cap="flat" cmpd="sng" algn="ctr">
                       <a:solidFill>
-                        <a:srgbClr val="E3DED5"/>
+                        <a:srgbClr val="E6E6DF"/>
                       </a:solidFill>
                       <a:prstDash val="solid"/>
                       <a:round/>
@@ -3360,7 +3370,7 @@
                     </a:lnL>
                     <a:lnR w="12700" cap="flat" cmpd="sng" algn="ctr">
                       <a:solidFill>
-                        <a:srgbClr val="E3DED5"/>
+                        <a:srgbClr val="E6E6DF"/>
                       </a:solidFill>
                       <a:prstDash val="solid"/>
                       <a:round/>
@@ -3369,7 +3379,7 @@
                     </a:lnR>
                     <a:lnT w="12700" cap="flat" cmpd="sng" algn="ctr">
                       <a:solidFill>
-                        <a:srgbClr val="E3DED5"/>
+                        <a:srgbClr val="E6E6DF"/>
                       </a:solidFill>
                       <a:prstDash val="solid"/>
                       <a:round/>
@@ -3378,7 +3388,7 @@
                     </a:lnT>
                     <a:lnB w="12700" cap="flat" cmpd="sng" algn="ctr">
                       <a:solidFill>
-                        <a:srgbClr val="E3DED5"/>
+                        <a:srgbClr val="E6E6DF"/>
                       </a:solidFill>
                       <a:prstDash val="solid"/>
                       <a:round/>
@@ -3401,7 +3411,7 @@
                       <a:r>
                         <a:rPr lang="en-US" sz="1300" dirty="0">
                           <a:solidFill>
-                            <a:srgbClr val="23190E"/>
+                            <a:srgbClr val="1A1A17"/>
                           </a:solidFill>
                           <a:latin typeface="Calibri" pitchFamily="34" charset="0"/>
                           <a:ea typeface="Calibri" pitchFamily="34" charset="-122"/>
@@ -3419,7 +3429,7 @@
                   <a:tcPr marL="91440" marR="91440" marT="45720" marB="45720" anchor="ctr">
                     <a:lnL w="12700" cap="flat" cmpd="sng" algn="ctr">
                       <a:solidFill>
-                        <a:srgbClr val="E3DED5"/>
+                        <a:srgbClr val="E6E6DF"/>
                       </a:solidFill>
                       <a:prstDash val="solid"/>
                       <a:round/>
@@ -3428,7 +3438,7 @@
                     </a:lnL>
                     <a:lnR w="12700" cap="flat" cmpd="sng" algn="ctr">
                       <a:solidFill>
-                        <a:srgbClr val="E3DED5"/>
+                        <a:srgbClr val="E6E6DF"/>
                       </a:solidFill>
                       <a:prstDash val="solid"/>
                       <a:round/>
@@ -3437,7 +3447,7 @@
                     </a:lnR>
                     <a:lnT w="12700" cap="flat" cmpd="sng" algn="ctr">
                       <a:solidFill>
-                        <a:srgbClr val="E3DED5"/>
+                        <a:srgbClr val="E6E6DF"/>
                       </a:solidFill>
                       <a:prstDash val="solid"/>
                       <a:round/>
@@ -3446,7 +3456,7 @@
                     </a:lnT>
                     <a:lnB w="12700" cap="flat" cmpd="sng" algn="ctr">
                       <a:solidFill>
-                        <a:srgbClr val="E3DED5"/>
+                        <a:srgbClr val="E6E6DF"/>
                       </a:solidFill>
                       <a:prstDash val="solid"/>
                       <a:round/>
@@ -3471,7 +3481,7 @@
                       <a:r>
                         <a:rPr lang="en-US" sz="1300" dirty="0">
                           <a:solidFill>
-                            <a:srgbClr val="23190E"/>
+                            <a:srgbClr val="1A1A17"/>
                           </a:solidFill>
                           <a:latin typeface="Calibri" pitchFamily="34" charset="0"/>
                           <a:ea typeface="Calibri" pitchFamily="34" charset="-122"/>
@@ -3489,7 +3499,7 @@
                   <a:tcPr marL="91440" marR="91440" marT="45720" marB="45720" anchor="ctr">
                     <a:lnL w="12700" cap="flat" cmpd="sng" algn="ctr">
                       <a:solidFill>
-                        <a:srgbClr val="E3DED5"/>
+                        <a:srgbClr val="E6E6DF"/>
                       </a:solidFill>
                       <a:prstDash val="solid"/>
                       <a:round/>
@@ -3498,7 +3508,7 @@
                     </a:lnL>
                     <a:lnR w="12700" cap="flat" cmpd="sng" algn="ctr">
                       <a:solidFill>
-                        <a:srgbClr val="E3DED5"/>
+                        <a:srgbClr val="E6E6DF"/>
                       </a:solidFill>
                       <a:prstDash val="solid"/>
                       <a:round/>
@@ -3507,7 +3517,7 @@
                     </a:lnR>
                     <a:lnT w="12700" cap="flat" cmpd="sng" algn="ctr">
                       <a:solidFill>
-                        <a:srgbClr val="E3DED5"/>
+                        <a:srgbClr val="E6E6DF"/>
                       </a:solidFill>
                       <a:prstDash val="solid"/>
                       <a:round/>
@@ -3516,7 +3526,7 @@
                     </a:lnT>
                     <a:lnB w="12700" cap="flat" cmpd="sng" algn="ctr">
                       <a:solidFill>
-                        <a:srgbClr val="E3DED5"/>
+                        <a:srgbClr val="E6E6DF"/>
                       </a:solidFill>
                       <a:prstDash val="solid"/>
                       <a:round/>
@@ -3539,7 +3549,7 @@
                       <a:r>
                         <a:rPr lang="en-US" sz="1300" dirty="0">
                           <a:solidFill>
-                            <a:srgbClr val="23190E"/>
+                            <a:srgbClr val="1A1A17"/>
                           </a:solidFill>
                           <a:latin typeface="Calibri" pitchFamily="34" charset="0"/>
                           <a:ea typeface="Calibri" pitchFamily="34" charset="-122"/>
@@ -3557,7 +3567,7 @@
                   <a:tcPr marL="91440" marR="91440" marT="45720" marB="45720" anchor="ctr">
                     <a:lnL w="12700" cap="flat" cmpd="sng" algn="ctr">
                       <a:solidFill>
-                        <a:srgbClr val="E3DED5"/>
+                        <a:srgbClr val="E6E6DF"/>
                       </a:solidFill>
                       <a:prstDash val="solid"/>
                       <a:round/>
@@ -3566,7 +3576,7 @@
                     </a:lnL>
                     <a:lnR w="12700" cap="flat" cmpd="sng" algn="ctr">
                       <a:solidFill>
-                        <a:srgbClr val="E3DED5"/>
+                        <a:srgbClr val="E6E6DF"/>
                       </a:solidFill>
                       <a:prstDash val="solid"/>
                       <a:round/>
@@ -3575,7 +3585,7 @@
                     </a:lnR>
                     <a:lnT w="12700" cap="flat" cmpd="sng" algn="ctr">
                       <a:solidFill>
-                        <a:srgbClr val="E3DED5"/>
+                        <a:srgbClr val="E6E6DF"/>
                       </a:solidFill>
                       <a:prstDash val="solid"/>
                       <a:round/>
@@ -3584,7 +3594,7 @@
                     </a:lnT>
                     <a:lnB w="12700" cap="flat" cmpd="sng" algn="ctr">
                       <a:solidFill>
-                        <a:srgbClr val="E3DED5"/>
+                        <a:srgbClr val="E6E6DF"/>
                       </a:solidFill>
                       <a:prstDash val="solid"/>
                       <a:round/>
@@ -3607,7 +3617,7 @@
                       <a:r>
                         <a:rPr lang="en-US" sz="1300" dirty="0">
                           <a:solidFill>
-                            <a:srgbClr val="23190E"/>
+                            <a:srgbClr val="1A1A17"/>
                           </a:solidFill>
                           <a:latin typeface="Calibri" pitchFamily="34" charset="0"/>
                           <a:ea typeface="Calibri" pitchFamily="34" charset="-122"/>
@@ -3625,7 +3635,7 @@
                   <a:tcPr marL="91440" marR="91440" marT="45720" marB="45720" anchor="ctr">
                     <a:lnL w="12700" cap="flat" cmpd="sng" algn="ctr">
                       <a:solidFill>
-                        <a:srgbClr val="E3DED5"/>
+                        <a:srgbClr val="E6E6DF"/>
                       </a:solidFill>
                       <a:prstDash val="solid"/>
                       <a:round/>
@@ -3634,7 +3644,7 @@
                     </a:lnL>
                     <a:lnR w="12700" cap="flat" cmpd="sng" algn="ctr">
                       <a:solidFill>
-                        <a:srgbClr val="E3DED5"/>
+                        <a:srgbClr val="E6E6DF"/>
                       </a:solidFill>
                       <a:prstDash val="solid"/>
                       <a:round/>
@@ -3643,7 +3653,7 @@
                     </a:lnR>
                     <a:lnT w="12700" cap="flat" cmpd="sng" algn="ctr">
                       <a:solidFill>
-                        <a:srgbClr val="E3DED5"/>
+                        <a:srgbClr val="E6E6DF"/>
                       </a:solidFill>
                       <a:prstDash val="solid"/>
                       <a:round/>
@@ -3652,7 +3662,7 @@
                     </a:lnT>
                     <a:lnB w="12700" cap="flat" cmpd="sng" algn="ctr">
                       <a:solidFill>
-                        <a:srgbClr val="E3DED5"/>
+                        <a:srgbClr val="E6E6DF"/>
                       </a:solidFill>
                       <a:prstDash val="solid"/>
                       <a:round/>
@@ -3675,7 +3685,7 @@
                       <a:r>
                         <a:rPr lang="en-US" sz="1300" dirty="0">
                           <a:solidFill>
-                            <a:srgbClr val="23190E"/>
+                            <a:srgbClr val="1A1A17"/>
                           </a:solidFill>
                           <a:latin typeface="Calibri" pitchFamily="34" charset="0"/>
                           <a:ea typeface="Calibri" pitchFamily="34" charset="-122"/>
@@ -3693,7 +3703,7 @@
                   <a:tcPr marL="91440" marR="91440" marT="45720" marB="45720" anchor="ctr">
                     <a:lnL w="12700" cap="flat" cmpd="sng" algn="ctr">
                       <a:solidFill>
-                        <a:srgbClr val="E3DED5"/>
+                        <a:srgbClr val="E6E6DF"/>
                       </a:solidFill>
                       <a:prstDash val="solid"/>
                       <a:round/>
@@ -3702,7 +3712,7 @@
                     </a:lnL>
                     <a:lnR w="12700" cap="flat" cmpd="sng" algn="ctr">
                       <a:solidFill>
-                        <a:srgbClr val="E3DED5"/>
+                        <a:srgbClr val="E6E6DF"/>
                       </a:solidFill>
                       <a:prstDash val="solid"/>
                       <a:round/>
@@ -3711,7 +3721,7 @@
                     </a:lnR>
                     <a:lnT w="12700" cap="flat" cmpd="sng" algn="ctr">
                       <a:solidFill>
-                        <a:srgbClr val="E3DED5"/>
+                        <a:srgbClr val="E6E6DF"/>
                       </a:solidFill>
                       <a:prstDash val="solid"/>
                       <a:round/>
@@ -3720,7 +3730,7 @@
                     </a:lnT>
                     <a:lnB w="12700" cap="flat" cmpd="sng" algn="ctr">
                       <a:solidFill>
-                        <a:srgbClr val="E3DED5"/>
+                        <a:srgbClr val="E6E6DF"/>
                       </a:solidFill>
                       <a:prstDash val="solid"/>
                       <a:round/>
@@ -3745,13 +3755,13 @@
                       <a:r>
                         <a:rPr lang="en-US" sz="1300" dirty="0">
                           <a:solidFill>
-                            <a:srgbClr val="23190E"/>
+                            <a:srgbClr val="1A1A17"/>
                           </a:solidFill>
                           <a:latin typeface="Calibri" pitchFamily="34" charset="0"/>
                           <a:ea typeface="Calibri" pitchFamily="34" charset="-122"/>
                           <a:cs typeface="Calibri" pitchFamily="34" charset="-120"/>
                         </a:rPr>
-                        <a:t>Авито</a:t>
+                        <a:t>Большие площадки</a:t>
                       </a:r>
                       <a:endParaRPr lang="en-US" sz="1300" dirty="0">
                         <a:latin typeface="Calibri" charset="0"/>
@@ -3763,7 +3773,7 @@
                   <a:tcPr marL="91440" marR="91440" marT="45720" marB="45720" anchor="ctr">
                     <a:lnL w="12700" cap="flat" cmpd="sng" algn="ctr">
                       <a:solidFill>
-                        <a:srgbClr val="E3DED5"/>
+                        <a:srgbClr val="E6E6DF"/>
                       </a:solidFill>
                       <a:prstDash val="solid"/>
                       <a:round/>
@@ -3772,7 +3782,7 @@
                     </a:lnL>
                     <a:lnR w="12700" cap="flat" cmpd="sng" algn="ctr">
                       <a:solidFill>
-                        <a:srgbClr val="E3DED5"/>
+                        <a:srgbClr val="E6E6DF"/>
                       </a:solidFill>
                       <a:prstDash val="solid"/>
                       <a:round/>
@@ -3781,7 +3791,7 @@
                     </a:lnR>
                     <a:lnT w="12700" cap="flat" cmpd="sng" algn="ctr">
                       <a:solidFill>
-                        <a:srgbClr val="E3DED5"/>
+                        <a:srgbClr val="E6E6DF"/>
                       </a:solidFill>
                       <a:prstDash val="solid"/>
                       <a:round/>
@@ -3790,7 +3800,7 @@
                     </a:lnT>
                     <a:lnB w="12700" cap="flat" cmpd="sng" algn="ctr">
                       <a:solidFill>
-                        <a:srgbClr val="E3DED5"/>
+                        <a:srgbClr val="E6E6DF"/>
                       </a:solidFill>
                       <a:prstDash val="solid"/>
                       <a:round/>
@@ -3813,7 +3823,7 @@
                       <a:r>
                         <a:rPr lang="en-US" sz="1300" dirty="0">
                           <a:solidFill>
-                            <a:srgbClr val="23190E"/>
+                            <a:srgbClr val="1A1A17"/>
                           </a:solidFill>
                           <a:latin typeface="Calibri" pitchFamily="34" charset="0"/>
                           <a:ea typeface="Calibri" pitchFamily="34" charset="-122"/>
@@ -3831,7 +3841,7 @@
                   <a:tcPr marL="91440" marR="91440" marT="45720" marB="45720" anchor="ctr">
                     <a:lnL w="12700" cap="flat" cmpd="sng" algn="ctr">
                       <a:solidFill>
-                        <a:srgbClr val="E3DED5"/>
+                        <a:srgbClr val="E6E6DF"/>
                       </a:solidFill>
                       <a:prstDash val="solid"/>
                       <a:round/>
@@ -3840,7 +3850,7 @@
                     </a:lnL>
                     <a:lnR w="12700" cap="flat" cmpd="sng" algn="ctr">
                       <a:solidFill>
-                        <a:srgbClr val="E3DED5"/>
+                        <a:srgbClr val="E6E6DF"/>
                       </a:solidFill>
                       <a:prstDash val="solid"/>
                       <a:round/>
@@ -3849,7 +3859,7 @@
                     </a:lnR>
                     <a:lnT w="12700" cap="flat" cmpd="sng" algn="ctr">
                       <a:solidFill>
-                        <a:srgbClr val="E3DED5"/>
+                        <a:srgbClr val="E6E6DF"/>
                       </a:solidFill>
                       <a:prstDash val="solid"/>
                       <a:round/>
@@ -3858,7 +3868,7 @@
                     </a:lnT>
                     <a:lnB w="12700" cap="flat" cmpd="sng" algn="ctr">
                       <a:solidFill>
-                        <a:srgbClr val="E3DED5"/>
+                        <a:srgbClr val="E6E6DF"/>
                       </a:solidFill>
                       <a:prstDash val="solid"/>
                       <a:round/>
@@ -3881,7 +3891,7 @@
                       <a:r>
                         <a:rPr lang="en-US" sz="1300" dirty="0">
                           <a:solidFill>
-                            <a:srgbClr val="23190E"/>
+                            <a:srgbClr val="1A1A17"/>
                           </a:solidFill>
                           <a:latin typeface="Calibri" pitchFamily="34" charset="0"/>
                           <a:ea typeface="Calibri" pitchFamily="34" charset="-122"/>
@@ -3899,7 +3909,7 @@
                   <a:tcPr marL="91440" marR="91440" marT="45720" marB="45720" anchor="ctr">
                     <a:lnL w="12700" cap="flat" cmpd="sng" algn="ctr">
                       <a:solidFill>
-                        <a:srgbClr val="E3DED5"/>
+                        <a:srgbClr val="E6E6DF"/>
                       </a:solidFill>
                       <a:prstDash val="solid"/>
                       <a:round/>
@@ -3908,7 +3918,7 @@
                     </a:lnL>
                     <a:lnR w="12700" cap="flat" cmpd="sng" algn="ctr">
                       <a:solidFill>
-                        <a:srgbClr val="E3DED5"/>
+                        <a:srgbClr val="E6E6DF"/>
                       </a:solidFill>
                       <a:prstDash val="solid"/>
                       <a:round/>
@@ -3917,7 +3927,7 @@
                     </a:lnR>
                     <a:lnT w="12700" cap="flat" cmpd="sng" algn="ctr">
                       <a:solidFill>
-                        <a:srgbClr val="E3DED5"/>
+                        <a:srgbClr val="E6E6DF"/>
                       </a:solidFill>
                       <a:prstDash val="solid"/>
                       <a:round/>
@@ -3926,7 +3936,7 @@
                     </a:lnT>
                     <a:lnB w="12700" cap="flat" cmpd="sng" algn="ctr">
                       <a:solidFill>
-                        <a:srgbClr val="E3DED5"/>
+                        <a:srgbClr val="E6E6DF"/>
                       </a:solidFill>
                       <a:prstDash val="solid"/>
                       <a:round/>
@@ -3949,7 +3959,7 @@
                       <a:r>
                         <a:rPr lang="en-US" sz="1300" dirty="0">
                           <a:solidFill>
-                            <a:srgbClr val="23190E"/>
+                            <a:srgbClr val="1A1A17"/>
                           </a:solidFill>
                           <a:latin typeface="Calibri" pitchFamily="34" charset="0"/>
                           <a:ea typeface="Calibri" pitchFamily="34" charset="-122"/>
@@ -3967,7 +3977,7 @@
                   <a:tcPr marL="91440" marR="91440" marT="45720" marB="45720" anchor="ctr">
                     <a:lnL w="12700" cap="flat" cmpd="sng" algn="ctr">
                       <a:solidFill>
-                        <a:srgbClr val="E3DED5"/>
+                        <a:srgbClr val="E6E6DF"/>
                       </a:solidFill>
                       <a:prstDash val="solid"/>
                       <a:round/>
@@ -3976,7 +3986,7 @@
                     </a:lnL>
                     <a:lnR w="12700" cap="flat" cmpd="sng" algn="ctr">
                       <a:solidFill>
-                        <a:srgbClr val="E3DED5"/>
+                        <a:srgbClr val="E6E6DF"/>
                       </a:solidFill>
                       <a:prstDash val="solid"/>
                       <a:round/>
@@ -3985,7 +3995,7 @@
                     </a:lnR>
                     <a:lnT w="12700" cap="flat" cmpd="sng" algn="ctr">
                       <a:solidFill>
-                        <a:srgbClr val="E3DED5"/>
+                        <a:srgbClr val="E6E6DF"/>
                       </a:solidFill>
                       <a:prstDash val="solid"/>
                       <a:round/>
@@ -3994,7 +4004,7 @@
                     </a:lnT>
                     <a:lnB w="12700" cap="flat" cmpd="sng" algn="ctr">
                       <a:solidFill>
-                        <a:srgbClr val="E3DED5"/>
+                        <a:srgbClr val="E6E6DF"/>
                       </a:solidFill>
                       <a:prstDash val="solid"/>
                       <a:round/>
@@ -4019,7 +4029,7 @@
                       <a:r>
                         <a:rPr lang="en-US" sz="1300" b="1" dirty="0">
                           <a:solidFill>
-                            <a:srgbClr val="B8761F"/>
+                            <a:srgbClr val="1E6B33"/>
                           </a:solidFill>
                           <a:latin typeface="Calibri" pitchFamily="34" charset="0"/>
                           <a:ea typeface="Calibri" pitchFamily="34" charset="-122"/>
@@ -4037,7 +4047,7 @@
                   <a:tcPr marL="91440" marR="91440" marT="45720" marB="45720" anchor="ctr">
                     <a:lnL w="12700" cap="flat" cmpd="sng" algn="ctr">
                       <a:solidFill>
-                        <a:srgbClr val="E3DED5"/>
+                        <a:srgbClr val="E6E6DF"/>
                       </a:solidFill>
                       <a:prstDash val="solid"/>
                       <a:round/>
@@ -4046,7 +4056,7 @@
                     </a:lnL>
                     <a:lnR w="12700" cap="flat" cmpd="sng" algn="ctr">
                       <a:solidFill>
-                        <a:srgbClr val="E3DED5"/>
+                        <a:srgbClr val="E6E6DF"/>
                       </a:solidFill>
                       <a:prstDash val="solid"/>
                       <a:round/>
@@ -4055,7 +4065,7 @@
                     </a:lnR>
                     <a:lnT w="12700" cap="flat" cmpd="sng" algn="ctr">
                       <a:solidFill>
-                        <a:srgbClr val="E3DED5"/>
+                        <a:srgbClr val="E6E6DF"/>
                       </a:solidFill>
                       <a:prstDash val="solid"/>
                       <a:round/>
@@ -4064,7 +4074,7 @@
                     </a:lnT>
                     <a:lnB w="12700" cap="flat" cmpd="sng" algn="ctr">
                       <a:solidFill>
-                        <a:srgbClr val="E3DED5"/>
+                        <a:srgbClr val="E6E6DF"/>
                       </a:solidFill>
                       <a:prstDash val="solid"/>
                       <a:round/>
@@ -4087,7 +4097,7 @@
                       <a:r>
                         <a:rPr lang="en-US" sz="1300" b="1" dirty="0">
                           <a:solidFill>
-                            <a:srgbClr val="23190E"/>
+                            <a:srgbClr val="1A1A17"/>
                           </a:solidFill>
                           <a:latin typeface="Calibri" pitchFamily="34" charset="0"/>
                           <a:ea typeface="Calibri" pitchFamily="34" charset="-122"/>
@@ -4105,7 +4115,7 @@
                   <a:tcPr marL="91440" marR="91440" marT="45720" marB="45720" anchor="ctr">
                     <a:lnL w="12700" cap="flat" cmpd="sng" algn="ctr">
                       <a:solidFill>
-                        <a:srgbClr val="E3DED5"/>
+                        <a:srgbClr val="E6E6DF"/>
                       </a:solidFill>
                       <a:prstDash val="solid"/>
                       <a:round/>
@@ -4114,7 +4124,7 @@
                     </a:lnL>
                     <a:lnR w="12700" cap="flat" cmpd="sng" algn="ctr">
                       <a:solidFill>
-                        <a:srgbClr val="E3DED5"/>
+                        <a:srgbClr val="E6E6DF"/>
                       </a:solidFill>
                       <a:prstDash val="solid"/>
                       <a:round/>
@@ -4123,7 +4133,7 @@
                     </a:lnR>
                     <a:lnT w="12700" cap="flat" cmpd="sng" algn="ctr">
                       <a:solidFill>
-                        <a:srgbClr val="E3DED5"/>
+                        <a:srgbClr val="E6E6DF"/>
                       </a:solidFill>
                       <a:prstDash val="solid"/>
                       <a:round/>
@@ -4132,7 +4142,7 @@
                     </a:lnT>
                     <a:lnB w="12700" cap="flat" cmpd="sng" algn="ctr">
                       <a:solidFill>
-                        <a:srgbClr val="E3DED5"/>
+                        <a:srgbClr val="E6E6DF"/>
                       </a:solidFill>
                       <a:prstDash val="solid"/>
                       <a:round/>
@@ -4155,7 +4165,7 @@
                       <a:r>
                         <a:rPr lang="en-US" sz="1300" b="1" dirty="0">
                           <a:solidFill>
-                            <a:srgbClr val="23190E"/>
+                            <a:srgbClr val="1A1A17"/>
                           </a:solidFill>
                           <a:latin typeface="Calibri" pitchFamily="34" charset="0"/>
                           <a:ea typeface="Calibri" pitchFamily="34" charset="-122"/>
@@ -4173,7 +4183,7 @@
                   <a:tcPr marL="91440" marR="91440" marT="45720" marB="45720" anchor="ctr">
                     <a:lnL w="12700" cap="flat" cmpd="sng" algn="ctr">
                       <a:solidFill>
-                        <a:srgbClr val="E3DED5"/>
+                        <a:srgbClr val="E6E6DF"/>
                       </a:solidFill>
                       <a:prstDash val="solid"/>
                       <a:round/>
@@ -4182,7 +4192,7 @@
                     </a:lnL>
                     <a:lnR w="12700" cap="flat" cmpd="sng" algn="ctr">
                       <a:solidFill>
-                        <a:srgbClr val="E3DED5"/>
+                        <a:srgbClr val="E6E6DF"/>
                       </a:solidFill>
                       <a:prstDash val="solid"/>
                       <a:round/>
@@ -4191,7 +4201,7 @@
                     </a:lnR>
                     <a:lnT w="12700" cap="flat" cmpd="sng" algn="ctr">
                       <a:solidFill>
-                        <a:srgbClr val="E3DED5"/>
+                        <a:srgbClr val="E6E6DF"/>
                       </a:solidFill>
                       <a:prstDash val="solid"/>
                       <a:round/>
@@ -4200,7 +4210,7 @@
                     </a:lnT>
                     <a:lnB w="12700" cap="flat" cmpd="sng" algn="ctr">
                       <a:solidFill>
-                        <a:srgbClr val="E3DED5"/>
+                        <a:srgbClr val="E6E6DF"/>
                       </a:solidFill>
                       <a:prstDash val="solid"/>
                       <a:round/>
@@ -4223,7 +4233,7 @@
                       <a:r>
                         <a:rPr lang="en-US" sz="1300" b="1" dirty="0">
                           <a:solidFill>
-                            <a:srgbClr val="23190E"/>
+                            <a:srgbClr val="1A1A17"/>
                           </a:solidFill>
                           <a:latin typeface="Calibri" pitchFamily="34" charset="0"/>
                           <a:ea typeface="Calibri" pitchFamily="34" charset="-122"/>
@@ -4241,7 +4251,7 @@
                   <a:tcPr marL="91440" marR="91440" marT="45720" marB="45720" anchor="ctr">
                     <a:lnL w="12700" cap="flat" cmpd="sng" algn="ctr">
                       <a:solidFill>
-                        <a:srgbClr val="E3DED5"/>
+                        <a:srgbClr val="E6E6DF"/>
                       </a:solidFill>
                       <a:prstDash val="solid"/>
                       <a:round/>
@@ -4250,7 +4260,7 @@
                     </a:lnL>
                     <a:lnR w="12700" cap="flat" cmpd="sng" algn="ctr">
                       <a:solidFill>
-                        <a:srgbClr val="E3DED5"/>
+                        <a:srgbClr val="E6E6DF"/>
                       </a:solidFill>
                       <a:prstDash val="solid"/>
                       <a:round/>
@@ -4259,7 +4269,7 @@
                     </a:lnR>
                     <a:lnT w="12700" cap="flat" cmpd="sng" algn="ctr">
                       <a:solidFill>
-                        <a:srgbClr val="E3DED5"/>
+                        <a:srgbClr val="E6E6DF"/>
                       </a:solidFill>
                       <a:prstDash val="solid"/>
                       <a:round/>
@@ -4268,7 +4278,7 @@
                     </a:lnT>
                     <a:lnB w="12700" cap="flat" cmpd="sng" algn="ctr">
                       <a:solidFill>
-                        <a:srgbClr val="E3DED5"/>
+                        <a:srgbClr val="E6E6DF"/>
                       </a:solidFill>
                       <a:prstDash val="solid"/>
                       <a:round/>
@@ -4285,51 +4295,6 @@
           </a:graphicData>
         </a:graphic>
       </p:graphicFrame>
-      <p:sp>
-        <p:nvSpPr>
-          <p:cNvPr id="25" name="Slide Number Placeholder 0"/>
-          <p:cNvSpPr>
-            <a:spLocks noGrp="1"/>
-          </p:cNvSpPr>
-          <p:nvPr>
-            <p:ph type="sldNum" sz="quarter" idx="4294967295"/>
-          </p:nvPr>
-        </p:nvSpPr>
-        <p:spPr>
-          <a:xfrm>
-            <a:off x="11247120" y="6400800"/>
-            <a:ext cx="365760" cy="274320"/>
-          </a:xfrm>
-          <a:prstGeom prst="rect">
-            <a:avLst/>
-          </a:prstGeom>
-          <a:extLst>
-            <a:ext uri="{C572A759-6A51-4108-AA02-DFA0A04FC94B}">
-              <ma14:wrappingTextBoxFlag xmlns:ma14="http://schemas.microsoft.com/office/mac/drawingml/2011/main" val="0"/>
-            </a:ext>
-          </a:extLst>
-        </p:spPr>
-        <p:txBody>
-          <a:bodyPr/>
-          <a:lstStyle>
-            <a:lvl1pPr>
-              <a:defRPr sz="1000">
-                <a:solidFill>
-                  <a:srgbClr val="7A746B"/>
-                </a:solidFill>
-              </a:defRPr>
-            </a:lvl1pPr>
-          </a:lstStyle>
-          <a:p>
-            <a:pPr algn="r"/>
-            <a:fld id="{F7021451-1387-4CA6-816F-3879F97B5CBC}" type="slidenum">
-              <a:rPr b="0" lang="en-US"/>
-              <a:t>4</a:t>
-            </a:fld>
-            <a:endParaRPr lang="en-US"/>
-          </a:p>
-        </p:txBody>
-      </p:sp>
     </p:spTree>
   </p:cSld>
   <p:clrMapOvr>
@@ -4357,14 +4322,14 @@
       </p:grpSpPr>
       <p:sp>
         <p:nvSpPr>
-          <p:cNvPr id="2" name="Text 0"/>
+          <p:cNvPr id="2" name="логотип"/>
           <p:cNvSpPr txBox="1"/>
           <p:nvPr/>
         </p:nvSpPr>
         <p:spPr>
           <a:xfrm>
-            <a:off x="640080" y="914400"/>
-            <a:ext cx="10881360" cy="914400"/>
+            <a:off x="822960" y="365760"/>
+            <a:ext cx="2743200" cy="320040"/>
           </a:xfrm>
           <a:prstGeom prst="rect">
             <a:avLst/>
@@ -4376,235 +4341,101 @@
           <a:bodyPr wrap="square" lIns="0" tIns="0" rIns="0" bIns="0" rtlCol="0" anchor="ctr"/>
           <a:lstStyle/>
           <a:p>
-            <a:pPr algn="l" indent="0" marL="0">
-              <a:buNone/>
-            </a:pPr>
-            <a:r>
-              <a:rPr lang="en-US" sz="4000" b="1" dirty="0">
-                <a:solidFill>
-                  <a:srgbClr val="FFFFFF"/>
-                </a:solidFill>
-              </a:rPr>
-              <a:t>Что дальше</a:t>
-            </a:r>
-            <a:endParaRPr lang="en-US" sz="4000" dirty="0"/>
+            <a:pPr indent="0" marL="0">
+              <a:buNone/>
+            </a:pPr>
+            <a:r>
+              <a:rPr lang="en-US" sz="1600" b="1" dirty="0">
+                <a:solidFill>
+                  <a:srgbClr val="1A1A17"/>
+                </a:solidFill>
+                <a:latin typeface="Cambria" pitchFamily="34" charset="0"/>
+                <a:ea typeface="Cambria" pitchFamily="34" charset="-122"/>
+                <a:cs typeface="Cambria" pitchFamily="34" charset="-120"/>
+              </a:rPr>
+              <a:t>Своя</a:t>
+            </a:r>
+            <a:pPr indent="0" marL="0">
+              <a:buNone/>
+            </a:pPr>
+            <a:r>
+              <a:rPr lang="en-US" sz="1600" b="1" dirty="0">
+                <a:solidFill>
+                  <a:srgbClr val="1E6B33"/>
+                </a:solidFill>
+                <a:latin typeface="Cambria" pitchFamily="34" charset="0"/>
+                <a:ea typeface="Cambria" pitchFamily="34" charset="-122"/>
+                <a:cs typeface="Cambria" pitchFamily="34" charset="-120"/>
+              </a:rPr>
+              <a:t>еда</a:t>
+            </a:r>
+            <a:endParaRPr lang="en-US" sz="1600" dirty="0"/>
           </a:p>
         </p:txBody>
       </p:sp>
       <p:sp>
         <p:nvSpPr>
-          <p:cNvPr id="3" name="план 1"/>
-          <p:cNvSpPr/>
+          <p:cNvPr id="3" name="Text 1"/>
+          <p:cNvSpPr txBox="1"/>
           <p:nvPr/>
         </p:nvSpPr>
         <p:spPr>
           <a:xfrm>
-            <a:off x="640080" y="2103120"/>
-            <a:ext cx="3413760" cy="1280160"/>
+            <a:off x="822960" y="1463040"/>
+            <a:ext cx="10515600" cy="914400"/>
           </a:xfrm>
-          <a:prstGeom prst="roundRect">
-            <a:avLst>
-              <a:gd name="adj" fmla="val 7143"/>
-            </a:avLst>
+          <a:prstGeom prst="rect">
+            <a:avLst/>
           </a:prstGeom>
-          <a:solidFill>
-            <a:srgbClr val="5A3F1E"/>
-          </a:solidFill>
+          <a:noFill/>
           <a:ln/>
         </p:spPr>
         <p:txBody>
-          <a:bodyPr wrap="square" lIns="152400" tIns="177800" rIns="177800" bIns="152400" rtlCol="0" anchor="t"/>
+          <a:bodyPr wrap="square" lIns="0" tIns="0" rIns="0" bIns="0" rtlCol="0" anchor="ctr"/>
           <a:lstStyle/>
           <a:p>
             <a:pPr algn="l" indent="0" marL="0">
               <a:buNone/>
             </a:pPr>
             <a:r>
-              <a:rPr lang="en-US" sz="1600" b="1" dirty="0">
-                <a:solidFill>
-                  <a:srgbClr val="FFFFFF"/>
-                </a:solidFill>
-              </a:rPr>
-              <a:t>Первые продавцы</a:t>
-            </a:r>
-            <a:endParaRPr lang="en-US" sz="1600" dirty="0"/>
-          </a:p>
-          <a:p>
-            <a:pPr algn="l" indent="0" marL="0">
-              <a:buNone/>
-            </a:pPr>
-            <a:r>
-              <a:rPr lang="en-US" sz="600" dirty="0">
-                <a:solidFill>
-                  <a:srgbClr val="000000"/>
-                </a:solidFill>
-              </a:rPr>
-              <a:t> </a:t>
-            </a:r>
-            <a:endParaRPr lang="en-US" sz="1600" dirty="0"/>
-          </a:p>
-          <a:p>
-            <a:pPr algn="l" indent="0" marL="0">
-              <a:buNone/>
-            </a:pPr>
-            <a:r>
-              <a:rPr lang="en-US" sz="1300" dirty="0">
-                <a:solidFill>
-                  <a:srgbClr val="E8DDCB"/>
-                </a:solidFill>
-              </a:rPr>
-              <a:t>начать с тех, кого в районе уже знают</a:t>
-            </a:r>
-            <a:endParaRPr lang="en-US" sz="1600" dirty="0"/>
+              <a:rPr lang="en-US" sz="4000" dirty="0">
+                <a:solidFill>
+                  <a:srgbClr val="1A1A17"/>
+                </a:solidFill>
+                <a:latin typeface="Cambria" pitchFamily="34" charset="0"/>
+                <a:ea typeface="Cambria" pitchFamily="34" charset="-122"/>
+                <a:cs typeface="Cambria" pitchFamily="34" charset="-120"/>
+              </a:rPr>
+              <a:t>Своя еда — от </a:t>
+            </a:r>
+            <a:pPr algn="l" indent="0" marL="0">
+              <a:buNone/>
+            </a:pPr>
+            <a:r>
+              <a:rPr lang="en-US" sz="4000" i="1" dirty="0">
+                <a:solidFill>
+                  <a:srgbClr val="1E6B33"/>
+                </a:solidFill>
+                <a:latin typeface="Cambria" pitchFamily="34" charset="0"/>
+                <a:ea typeface="Cambria" pitchFamily="34" charset="-122"/>
+                <a:cs typeface="Cambria" pitchFamily="34" charset="-120"/>
+              </a:rPr>
+              <a:t>своих людей</a:t>
+            </a:r>
+            <a:endParaRPr lang="en-US" sz="4000" dirty="0"/>
           </a:p>
         </p:txBody>
       </p:sp>
       <p:sp>
         <p:nvSpPr>
-          <p:cNvPr id="4" name="план 2"/>
-          <p:cNvSpPr/>
+          <p:cNvPr id="4" name="Text 2"/>
+          <p:cNvSpPr txBox="1"/>
           <p:nvPr/>
         </p:nvSpPr>
         <p:spPr>
           <a:xfrm>
-            <a:off x="4373880" y="2103120"/>
-            <a:ext cx="3413760" cy="1280160"/>
-          </a:xfrm>
-          <a:prstGeom prst="roundRect">
-            <a:avLst>
-              <a:gd name="adj" fmla="val 7143"/>
-            </a:avLst>
-          </a:prstGeom>
-          <a:solidFill>
-            <a:srgbClr val="5A3F1E"/>
-          </a:solidFill>
-          <a:ln/>
-        </p:spPr>
-        <p:txBody>
-          <a:bodyPr wrap="square" lIns="152400" tIns="177800" rIns="177800" bIns="152400" rtlCol="0" anchor="t"/>
-          <a:lstStyle/>
-          <a:p>
-            <a:pPr algn="l" indent="0" marL="0">
-              <a:buNone/>
-            </a:pPr>
-            <a:r>
-              <a:rPr lang="en-US" sz="1600" b="1" dirty="0">
-                <a:solidFill>
-                  <a:srgbClr val="FFFFFF"/>
-                </a:solidFill>
-              </a:rPr>
-              <a:t>Новые районы</a:t>
-            </a:r>
-            <a:endParaRPr lang="en-US" sz="1600" dirty="0"/>
-          </a:p>
-          <a:p>
-            <a:pPr algn="l" indent="0" marL="0">
-              <a:buNone/>
-            </a:pPr>
-            <a:r>
-              <a:rPr lang="en-US" sz="600" dirty="0">
-                <a:solidFill>
-                  <a:srgbClr val="000000"/>
-                </a:solidFill>
-              </a:rPr>
-              <a:t> </a:t>
-            </a:r>
-            <a:endParaRPr lang="en-US" sz="1600" dirty="0"/>
-          </a:p>
-          <a:p>
-            <a:pPr algn="l" indent="0" marL="0">
-              <a:buNone/>
-            </a:pPr>
-            <a:r>
-              <a:rPr lang="en-US" sz="1300" dirty="0">
-                <a:solidFill>
-                  <a:srgbClr val="E8DDCB"/>
-                </a:solidFill>
-              </a:rPr>
-              <a:t>та же схема без переделок</a:t>
-            </a:r>
-            <a:endParaRPr lang="en-US" sz="1600" dirty="0"/>
-          </a:p>
-        </p:txBody>
-      </p:sp>
-      <p:sp>
-        <p:nvSpPr>
-          <p:cNvPr id="5" name="план 3"/>
-          <p:cNvSpPr/>
-          <p:nvPr/>
-        </p:nvSpPr>
-        <p:spPr>
-          <a:xfrm>
-            <a:off x="8107680" y="2103120"/>
-            <a:ext cx="3413760" cy="1280160"/>
-          </a:xfrm>
-          <a:prstGeom prst="roundRect">
-            <a:avLst>
-              <a:gd name="adj" fmla="val 7143"/>
-            </a:avLst>
-          </a:prstGeom>
-          <a:solidFill>
-            <a:srgbClr val="5A3F1E"/>
-          </a:solidFill>
-          <a:ln/>
-        </p:spPr>
-        <p:txBody>
-          <a:bodyPr wrap="square" lIns="152400" tIns="177800" rIns="177800" bIns="152400" rtlCol="0" anchor="t"/>
-          <a:lstStyle/>
-          <a:p>
-            <a:pPr algn="l" indent="0" marL="0">
-              <a:buNone/>
-            </a:pPr>
-            <a:r>
-              <a:rPr lang="en-US" sz="1600" b="1" dirty="0">
-                <a:solidFill>
-                  <a:srgbClr val="FFFFFF"/>
-                </a:solidFill>
-              </a:rPr>
-              <a:t>Уведомления</a:t>
-            </a:r>
-            <a:endParaRPr lang="en-US" sz="1600" dirty="0"/>
-          </a:p>
-          <a:p>
-            <a:pPr algn="l" indent="0" marL="0">
-              <a:buNone/>
-            </a:pPr>
-            <a:r>
-              <a:rPr lang="en-US" sz="600" dirty="0">
-                <a:solidFill>
-                  <a:srgbClr val="000000"/>
-                </a:solidFill>
-              </a:rPr>
-              <a:t> </a:t>
-            </a:r>
-            <a:endParaRPr lang="en-US" sz="1600" dirty="0"/>
-          </a:p>
-          <a:p>
-            <a:pPr algn="l" indent="0" marL="0">
-              <a:buNone/>
-            </a:pPr>
-            <a:r>
-              <a:rPr lang="en-US" sz="1300" dirty="0">
-                <a:solidFill>
-                  <a:srgbClr val="E8DDCB"/>
-                </a:solidFill>
-              </a:rPr>
-              <a:t>«рядом появилась клубника»</a:t>
-            </a:r>
-            <a:endParaRPr lang="en-US" sz="1600" dirty="0"/>
-          </a:p>
-        </p:txBody>
-      </p:sp>
-      <p:sp>
-        <p:nvSpPr>
-          <p:cNvPr id="6" name="Text 4"/>
-          <p:cNvSpPr txBox="1"/>
-          <p:nvPr/>
-        </p:nvSpPr>
-        <p:spPr>
-          <a:xfrm>
-            <a:off x="640080" y="3611880"/>
-            <a:ext cx="10881360" cy="457200"/>
+            <a:off x="822960" y="2468880"/>
+            <a:ext cx="9144000" cy="822960"/>
           </a:xfrm>
           <a:prstGeom prst="rect">
             <a:avLst/>
@@ -4616,31 +4447,256 @@
           <a:bodyPr wrap="square" lIns="0" tIns="0" rIns="0" bIns="0" rtlCol="0" anchor="t"/>
           <a:lstStyle/>
           <a:p>
-            <a:pPr indent="0" marL="0">
-              <a:buNone/>
-            </a:pPr>
-            <a:r>
-              <a:rPr lang="en-US" sz="1500" i="1" dirty="0">
-                <a:solidFill>
-                  <a:srgbClr val="E8DDCB"/>
-                </a:solidFill>
-              </a:rPr>
-              <a:t>401 тысяча хозяйств в одном Татарстане — и столько же домашних кухонь в городах. Площадка работает одинаково везде</a:t>
+            <a:pPr algn="l" indent="0" marL="0">
+              <a:buNone/>
+            </a:pPr>
+            <a:r>
+              <a:rPr lang="en-US" sz="1900" dirty="0">
+                <a:solidFill>
+                  <a:srgbClr val="6B6B66"/>
+                </a:solidFill>
+              </a:rPr>
+              <a:t>Площадка работает одинаково в селе и в городе: везде есть те, кто готовит и выращивает, и те, кто рад купить рядом с домом.</a:t>
+            </a:r>
+            <a:endParaRPr lang="en-US" sz="1900" dirty="0"/>
+          </a:p>
+        </p:txBody>
+      </p:sp>
+      <p:sp>
+        <p:nvSpPr>
+          <p:cNvPr id="5" name="план 1"/>
+          <p:cNvSpPr/>
+          <p:nvPr/>
+        </p:nvSpPr>
+        <p:spPr>
+          <a:xfrm>
+            <a:off x="822960" y="3429000"/>
+            <a:ext cx="3291840" cy="1234440"/>
+          </a:xfrm>
+          <a:prstGeom prst="roundRect">
+            <a:avLst>
+              <a:gd name="adj" fmla="val 7407"/>
+            </a:avLst>
+          </a:prstGeom>
+          <a:solidFill>
+            <a:srgbClr val="FFFFFF"/>
+          </a:solidFill>
+          <a:ln w="12700">
+            <a:solidFill>
+              <a:srgbClr val="E6E6DF"/>
+            </a:solidFill>
+          </a:ln>
+        </p:spPr>
+        <p:txBody>
+          <a:bodyPr wrap="square" lIns="177800" tIns="203200" rIns="203200" bIns="177800" rtlCol="0" anchor="t"/>
+          <a:lstStyle/>
+          <a:p>
+            <a:pPr algn="l" indent="0" marL="0">
+              <a:buNone/>
+            </a:pPr>
+            <a:r>
+              <a:rPr lang="en-US" sz="1500" b="1" dirty="0">
+                <a:solidFill>
+                  <a:srgbClr val="1A1A17"/>
+                </a:solidFill>
+                <a:latin typeface="Cambria" pitchFamily="34" charset="0"/>
+                <a:ea typeface="Cambria" pitchFamily="34" charset="-122"/>
+                <a:cs typeface="Cambria" pitchFamily="34" charset="-120"/>
+              </a:rPr>
+              <a:t>Первые продавцы</a:t>
             </a:r>
             <a:endParaRPr lang="en-US" sz="1500" dirty="0"/>
           </a:p>
+          <a:p>
+            <a:pPr algn="l" indent="0" marL="0">
+              <a:buNone/>
+            </a:pPr>
+            <a:r>
+              <a:rPr lang="en-US" sz="600" dirty="0">
+                <a:solidFill>
+                  <a:srgbClr val="000000"/>
+                </a:solidFill>
+              </a:rPr>
+              <a:t> </a:t>
+            </a:r>
+            <a:endParaRPr lang="en-US" sz="1500" dirty="0"/>
+          </a:p>
+          <a:p>
+            <a:pPr algn="l" indent="0" marL="0">
+              <a:buNone/>
+            </a:pPr>
+            <a:r>
+              <a:rPr lang="en-US" sz="1300" dirty="0">
+                <a:solidFill>
+                  <a:srgbClr val="6B6B66"/>
+                </a:solidFill>
+              </a:rPr>
+              <a:t>те, кого уже знают</a:t>
+            </a:r>
+            <a:endParaRPr lang="en-US" sz="1500" dirty="0"/>
+          </a:p>
         </p:txBody>
       </p:sp>
       <p:sp>
         <p:nvSpPr>
-          <p:cNvPr id="7" name="подпись"/>
+          <p:cNvPr id="6" name="план 2"/>
+          <p:cNvSpPr/>
+          <p:nvPr/>
+        </p:nvSpPr>
+        <p:spPr>
+          <a:xfrm>
+            <a:off x="4434840" y="3429000"/>
+            <a:ext cx="3291840" cy="1234440"/>
+          </a:xfrm>
+          <a:prstGeom prst="roundRect">
+            <a:avLst>
+              <a:gd name="adj" fmla="val 7407"/>
+            </a:avLst>
+          </a:prstGeom>
+          <a:solidFill>
+            <a:srgbClr val="FFFFFF"/>
+          </a:solidFill>
+          <a:ln w="12700">
+            <a:solidFill>
+              <a:srgbClr val="E6E6DF"/>
+            </a:solidFill>
+          </a:ln>
+        </p:spPr>
+        <p:txBody>
+          <a:bodyPr wrap="square" lIns="177800" tIns="203200" rIns="203200" bIns="177800" rtlCol="0" anchor="t"/>
+          <a:lstStyle/>
+          <a:p>
+            <a:pPr algn="l" indent="0" marL="0">
+              <a:buNone/>
+            </a:pPr>
+            <a:r>
+              <a:rPr lang="en-US" sz="1500" b="1" dirty="0">
+                <a:solidFill>
+                  <a:srgbClr val="1A1A17"/>
+                </a:solidFill>
+                <a:latin typeface="Cambria" pitchFamily="34" charset="0"/>
+                <a:ea typeface="Cambria" pitchFamily="34" charset="-122"/>
+                <a:cs typeface="Cambria" pitchFamily="34" charset="-120"/>
+              </a:rPr>
+              <a:t>Новые районы</a:t>
+            </a:r>
+            <a:endParaRPr lang="en-US" sz="1500" dirty="0"/>
+          </a:p>
+          <a:p>
+            <a:pPr algn="l" indent="0" marL="0">
+              <a:buNone/>
+            </a:pPr>
+            <a:r>
+              <a:rPr lang="en-US" sz="600" dirty="0">
+                <a:solidFill>
+                  <a:srgbClr val="000000"/>
+                </a:solidFill>
+              </a:rPr>
+              <a:t> </a:t>
+            </a:r>
+            <a:endParaRPr lang="en-US" sz="1500" dirty="0"/>
+          </a:p>
+          <a:p>
+            <a:pPr algn="l" indent="0" marL="0">
+              <a:buNone/>
+            </a:pPr>
+            <a:r>
+              <a:rPr lang="en-US" sz="1300" dirty="0">
+                <a:solidFill>
+                  <a:srgbClr val="6B6B66"/>
+                </a:solidFill>
+              </a:rPr>
+              <a:t>та же схема</a:t>
+            </a:r>
+            <a:endParaRPr lang="en-US" sz="1500" dirty="0"/>
+          </a:p>
+        </p:txBody>
+      </p:sp>
+      <p:sp>
+        <p:nvSpPr>
+          <p:cNvPr id="7" name="план 3"/>
+          <p:cNvSpPr/>
+          <p:nvPr/>
+        </p:nvSpPr>
+        <p:spPr>
+          <a:xfrm>
+            <a:off x="8046720" y="3429000"/>
+            <a:ext cx="3291840" cy="1234440"/>
+          </a:xfrm>
+          <a:prstGeom prst="roundRect">
+            <a:avLst>
+              <a:gd name="adj" fmla="val 7407"/>
+            </a:avLst>
+          </a:prstGeom>
+          <a:solidFill>
+            <a:srgbClr val="FFFFFF"/>
+          </a:solidFill>
+          <a:ln w="12700">
+            <a:solidFill>
+              <a:srgbClr val="E6E6DF"/>
+            </a:solidFill>
+          </a:ln>
+        </p:spPr>
+        <p:txBody>
+          <a:bodyPr wrap="square" lIns="177800" tIns="203200" rIns="203200" bIns="177800" rtlCol="0" anchor="t"/>
+          <a:lstStyle/>
+          <a:p>
+            <a:pPr algn="l" indent="0" marL="0">
+              <a:buNone/>
+            </a:pPr>
+            <a:r>
+              <a:rPr lang="en-US" sz="1500" b="1" dirty="0">
+                <a:solidFill>
+                  <a:srgbClr val="1A1A17"/>
+                </a:solidFill>
+                <a:latin typeface="Cambria" pitchFamily="34" charset="0"/>
+                <a:ea typeface="Cambria" pitchFamily="34" charset="-122"/>
+                <a:cs typeface="Cambria" pitchFamily="34" charset="-120"/>
+              </a:rPr>
+              <a:t>Уведомления</a:t>
+            </a:r>
+            <a:endParaRPr lang="en-US" sz="1500" dirty="0"/>
+          </a:p>
+          <a:p>
+            <a:pPr algn="l" indent="0" marL="0">
+              <a:buNone/>
+            </a:pPr>
+            <a:r>
+              <a:rPr lang="en-US" sz="600" dirty="0">
+                <a:solidFill>
+                  <a:srgbClr val="000000"/>
+                </a:solidFill>
+              </a:rPr>
+              <a:t> </a:t>
+            </a:r>
+            <a:endParaRPr lang="en-US" sz="1500" dirty="0"/>
+          </a:p>
+          <a:p>
+            <a:pPr algn="l" indent="0" marL="0">
+              <a:buNone/>
+            </a:pPr>
+            <a:r>
+              <a:rPr lang="en-US" sz="1300" dirty="0">
+                <a:solidFill>
+                  <a:srgbClr val="6B6B66"/>
+                </a:solidFill>
+              </a:rPr>
+              <a:t>«рядом появилась клубника»</a:t>
+            </a:r>
+            <a:endParaRPr lang="en-US" sz="1500" dirty="0"/>
+          </a:p>
+        </p:txBody>
+      </p:sp>
+      <p:sp>
+        <p:nvSpPr>
+          <p:cNvPr id="8" name="финал"/>
           <p:cNvSpPr txBox="1"/>
           <p:nvPr/>
         </p:nvSpPr>
         <p:spPr>
           <a:xfrm>
-            <a:off x="640080" y="4206240"/>
-            <a:ext cx="9144000" cy="1737360"/>
+            <a:off x="822960" y="4937760"/>
+            <a:ext cx="9144000" cy="914400"/>
           </a:xfrm>
           <a:prstGeom prst="rect">
             <a:avLst/>
@@ -4658,8 +4714,11 @@
             <a:r>
               <a:rPr lang="en-US" sz="2200" b="1" dirty="0">
                 <a:solidFill>
-                  <a:srgbClr val="7D9E4F"/>
-                </a:solidFill>
+                  <a:srgbClr val="1E6B33"/>
+                </a:solidFill>
+                <a:latin typeface="Cambria" pitchFamily="34" charset="0"/>
+                <a:ea typeface="Cambria" pitchFamily="34" charset="-122"/>
+                <a:cs typeface="Cambria" pitchFamily="34" charset="-120"/>
               </a:rPr>
               <a:t>svoya-eda.tatnet.app</a:t>
             </a:r>
@@ -4672,52 +4731,10 @@
             <a:r>
               <a:rPr lang="en-US" sz="1500" dirty="0">
                 <a:solidFill>
-                  <a:srgbClr val="BCAC92"/>
+                  <a:srgbClr val="6B6B66"/>
                 </a:solidFill>
               </a:rPr>
               <a:t>Спасибо. Готов ответить на вопросы</a:t>
-            </a:r>
-            <a:endParaRPr lang="en-US" sz="2200" dirty="0"/>
-          </a:p>
-          <a:p>
-            <a:pPr indent="0" marL="0">
-              <a:buNone/>
-            </a:pPr>
-            <a:r>
-              <a:rPr lang="en-US" sz="800" dirty="0">
-                <a:solidFill>
-                  <a:srgbClr val="000000"/>
-                </a:solidFill>
-              </a:rPr>
-              <a:t> </a:t>
-            </a:r>
-            <a:endParaRPr lang="en-US" sz="2200" dirty="0"/>
-          </a:p>
-          <a:p>
-            <a:pPr indent="0" marL="0">
-              <a:buNone/>
-            </a:pPr>
-            <a:r>
-              <a:rPr lang="en-US" sz="1300" dirty="0">
-                <a:solidFill>
-                  <a:srgbClr val="9A8B74"/>
-                </a:solidFill>
-              </a:rPr>
-              <a:t>Фазуллин Амир</a:t>
-            </a:r>
-            <a:endParaRPr lang="en-US" sz="2200" dirty="0"/>
-          </a:p>
-          <a:p>
-            <a:pPr indent="0" marL="0">
-              <a:buNone/>
-            </a:pPr>
-            <a:r>
-              <a:rPr lang="en-US" sz="1300" dirty="0">
-                <a:solidFill>
-                  <a:srgbClr val="9A8B74"/>
-                </a:solidFill>
-              </a:rPr>
-              <a:t>Лицей-интернат имени Мустафы Онджеля</a:t>
             </a:r>
             <a:endParaRPr lang="en-US" sz="2200" dirty="0"/>
           </a:p>
@@ -4736,40 +4753,40 @@
   <a:themeElements>
     <a:clrScheme name="SvoyaEda">
       <a:dk1>
-        <a:srgbClr val="23190E"/>
+        <a:srgbClr val="1A1A17"/>
       </a:dk1>
       <a:lt1>
         <a:srgbClr val="FFFFFF"/>
       </a:lt1>
       <a:dk2>
-        <a:srgbClr val="3E2B14"/>
+        <a:srgbClr val="14331E"/>
       </a:dk2>
       <a:lt2>
-        <a:srgbClr val="EDF1E9"/>
+        <a:srgbClr val="F7F7F2"/>
       </a:lt2>
       <a:accent1>
-        <a:srgbClr val="B8761F"/>
+        <a:srgbClr val="1E6B33"/>
       </a:accent1>
       <a:accent2>
-        <a:srgbClr val="8C5A15"/>
+        <a:srgbClr val="19542A"/>
       </a:accent2>
       <a:accent3>
-        <a:srgbClr val="7A746B"/>
+        <a:srgbClr val="6B6B66"/>
       </a:accent3>
       <a:accent4>
-        <a:srgbClr val="7D9E4F"/>
+        <a:srgbClr val="3E9455"/>
       </a:accent4>
       <a:accent5>
-        <a:srgbClr val="6E4610"/>
+        <a:srgbClr val="E3F0E6"/>
       </a:accent5>
       <a:accent6>
-        <a:srgbClr val="E3DED5"/>
+        <a:srgbClr val="E6E6DF"/>
       </a:accent6>
       <a:hlink>
-        <a:srgbClr val="B8761F"/>
+        <a:srgbClr val="1E6B33"/>
       </a:hlink>
       <a:folHlink>
-        <a:srgbClr val="7A746B"/>
+        <a:srgbClr val="6B6B66"/>
       </a:folHlink>
     </a:clrScheme>
     <a:fontScheme name="SvoyaEda">

--- a/deck/СвояЕда.pptx
+++ b/deck/СвояЕда.pptx
@@ -111,27 +111,27 @@
   <p:extLst>
     <p:ext uri="{521415D9-36F7-43E2-AB2F-B90AF26B5E84}">
       <p14:sectionLst xmlns:p14="http://schemas.microsoft.com/office/powerpoint/2010/main">
-        <p14:section name="Открытие" id="{54299397-c75c-ab46-82ea-c70e0f3b17f6}">
+        <p14:section name="Открытие" id="{0eef7893-1f52-0668-1fd0-317e320531e6}">
           <p14:sldIdLst>
             <p14:sldId id="256"/>
           </p14:sldIdLst>
         </p14:section>
-        <p14:section name="Проблема" id="{967f53a6-b8f8-f423-0f0a-7aeb511f8796}">
+        <p14:section name="Проблема" id="{97b58e05-3399-6e7f-0396-173ce5d4725b}">
           <p14:sldIdLst>
             <p14:sldId id="257"/>
           </p14:sldIdLst>
         </p14:section>
-        <p14:section name="Идея" id="{e585b122-3946-18d8-bb86-c65ecdfae1c1}">
+        <p14:section name="Идея" id="{67e7c4b2-0a4b-ff91-c8e2-d54d1d53d226}">
           <p14:sldIdLst>
             <p14:sldId id="258"/>
           </p14:sldIdLst>
         </p14:section>
-        <p14:section name="Отличие" id="{b9657dd0-cd1f-66db-7b52-02b49b3d4576}">
+        <p14:section name="Отличие" id="{5961defd-53df-a23f-7823-6d70c99d878c}">
           <p14:sldIdLst>
             <p14:sldId id="259"/>
           </p14:sldIdLst>
         </p14:section>
-        <p14:section name="Итог" id="{390a563c-d109-1156-5a63-7acd14abcf9b}">
+        <p14:section name="Итог" id="{33dada0c-8b98-623e-1d72-0147f686c46f}">
           <p14:sldIdLst>
             <p14:sldId id="260"/>
           </p14:sldIdLst>
@@ -628,7 +628,7 @@
           <a:p>
             <a:r>
               <a:rPr lang="en-US" dirty="0"/>
-              <a:t>Историю рассказать своими словами, не читать с листа. Главное — слушатель должен увидеть картинку: ведро клубники и сосед через улицу.</a:t>
+              <a:t>Историю рассказать своими словами. Слушатель должен увидеть картинку: ведро клубники и сосед через улицу. Добавить, что так же живут домашний повар и мини-пекарня.</a:t>
             </a:r>
             <a:endParaRPr lang="en-US" dirty="0"/>
           </a:p>
@@ -716,7 +716,7 @@
           <a:p>
             <a:r>
               <a:rPr lang="en-US" dirty="0"/>
-              <a:t>Главное показать карту с расстоянием — этого нет ни в чате, ни на больших площадках. Остальное перечислить бегло.</a:t>
+              <a:t>Показать карту с расстоянием — этого нет ни в чате, ни на Авито. Остальное перечислить бегло и сразу перейти к возражению.</a:t>
             </a:r>
             <a:endParaRPr lang="en-US" dirty="0"/>
           </a:p>
@@ -804,7 +804,7 @@
           <a:p>
             <a:r>
               <a:rPr lang="en-US" dirty="0"/>
-              <a:t>Если спросят про холодный старт — ответить честно: начинаем с тех продавцов, которых в районе и так все знают, первые отзывы появятся за неделю.</a:t>
+              <a:t>Про холодный старт отвечать честно: начинаем с продавцов, которых в районе и так все знают, первые отзывы появятся за неделю.</a:t>
             </a:r>
             <a:endParaRPr lang="en-US" dirty="0"/>
           </a:p>
@@ -892,7 +892,7 @@
           <a:p>
             <a:r>
               <a:rPr lang="en-US" dirty="0"/>
-              <a:t>Закончить на том, что решение подходит любому селу и городу, и поблагодарить.</a:t>
+              <a:t>Замкнуть историю: начали с ведра клубники, закончили тем, что схема повторяется для любого домашнего продавца. Поблагодарить.</a:t>
             </a:r>
             <a:endParaRPr lang="en-US" dirty="0"/>
           </a:p>
@@ -1463,7 +1463,7 @@
                   <a:srgbClr val="6B6B66"/>
                 </a:solidFill>
               </a:rPr>
-              <a:t>Домашние повара, бабушки с картошкой, мини-пекарни и огородники —</a:t>
+              <a:t>Площадка, где видно, кто готовит и выращивает на продажу</a:t>
             </a:r>
             <a:endParaRPr lang="en-US" sz="1900" dirty="0"/>
           </a:p>
@@ -1477,7 +1477,7 @@
                   <a:srgbClr val="6B6B66"/>
                 </a:solidFill>
               </a:rPr>
-              <a:t>всё на одной карте рядом с вами</a:t>
+              <a:t>на соседних улицах. Дальше — одна история, от ведра клубники до заказа.</a:t>
             </a:r>
             <a:endParaRPr lang="en-US" sz="1900" dirty="0"/>
           </a:p>
@@ -1733,13 +1733,49 @@
       </p:sp>
       <p:sp>
         <p:nvSpPr>
-          <p:cNvPr id="3" name="Text 1"/>
+          <p:cNvPr id="3" name="шаг"/>
           <p:cNvSpPr txBox="1"/>
           <p:nvPr/>
         </p:nvSpPr>
         <p:spPr>
           <a:xfrm>
-            <a:off x="822960" y="1051560"/>
+            <a:off x="822960" y="914400"/>
+            <a:ext cx="10515600" cy="274320"/>
+          </a:xfrm>
+          <a:prstGeom prst="rect">
+            <a:avLst/>
+          </a:prstGeom>
+          <a:noFill/>
+          <a:ln/>
+        </p:spPr>
+        <p:txBody>
+          <a:bodyPr wrap="square" lIns="0" tIns="0" rIns="0" bIns="0" rtlCol="0" anchor="ctr"/>
+          <a:lstStyle/>
+          <a:p>
+            <a:pPr indent="0" marL="0">
+              <a:buNone/>
+            </a:pPr>
+            <a:r>
+              <a:rPr lang="en-US" sz="1300" b="1" dirty="0">
+                <a:solidFill>
+                  <a:srgbClr val="1E6B33"/>
+                </a:solidFill>
+              </a:rPr>
+              <a:t>ШАГ 1 · КАК ПРОДАЮТ СЕЙЧАС</a:t>
+            </a:r>
+            <a:endParaRPr lang="en-US" sz="1300" dirty="0"/>
+          </a:p>
+        </p:txBody>
+      </p:sp>
+      <p:sp>
+        <p:nvSpPr>
+          <p:cNvPr id="4" name="Text 2"/>
+          <p:cNvSpPr txBox="1"/>
+          <p:nvPr/>
+        </p:nvSpPr>
+        <p:spPr>
+          <a:xfrm>
+            <a:off x="822960" y="1463040"/>
             <a:ext cx="10515600" cy="914400"/>
           </a:xfrm>
           <a:prstGeom prst="rect">
@@ -1800,13 +1836,13 @@
       </p:sp>
       <p:sp>
         <p:nvSpPr>
-          <p:cNvPr id="4" name="Text 2"/>
+          <p:cNvPr id="5" name="Text 3"/>
           <p:cNvSpPr txBox="1"/>
           <p:nvPr/>
         </p:nvSpPr>
         <p:spPr>
           <a:xfrm>
-            <a:off x="822960" y="2057400"/>
+            <a:off x="822960" y="2286000"/>
             <a:ext cx="9601200" cy="822960"/>
           </a:xfrm>
           <a:prstGeom prst="rect">
@@ -1828,7 +1864,7 @@
                   <a:srgbClr val="1A1A17"/>
                 </a:solidFill>
               </a:rPr>
-              <a:t>Бабушка собрала ведро клубники. Через два дня она испортится. А на соседней улице есть человек, который купил бы её сегодня вечером.</a:t>
+              <a:t>Моя бабушка собрала ведро клубники. На соседней улице есть человек, который купил бы его сегодня вечером. Они друг о друге не знают.</a:t>
             </a:r>
             <a:endParaRPr lang="en-US" sz="2000" dirty="0"/>
           </a:p>
@@ -1836,13 +1872,13 @@
       </p:sp>
       <p:sp>
         <p:nvSpPr>
-          <p:cNvPr id="5" name="рынок"/>
+          <p:cNvPr id="6" name="рынок"/>
           <p:cNvSpPr/>
           <p:nvPr/>
         </p:nvSpPr>
         <p:spPr>
           <a:xfrm>
-            <a:off x="822960" y="3154680"/>
+            <a:off x="822960" y="3291840"/>
             <a:ext cx="3291840" cy="1600200"/>
           </a:xfrm>
           <a:prstGeom prst="roundRect">
@@ -1911,13 +1947,13 @@
       </p:sp>
       <p:sp>
         <p:nvSpPr>
-          <p:cNvPr id="6" name="авито"/>
+          <p:cNvPr id="7" name="чат"/>
           <p:cNvSpPr/>
           <p:nvPr/>
         </p:nvSpPr>
         <p:spPr>
           <a:xfrm>
-            <a:off x="4434840" y="3154680"/>
+            <a:off x="4434840" y="3291840"/>
             <a:ext cx="3291840" cy="1600200"/>
           </a:xfrm>
           <a:prstGeom prst="roundRect">
@@ -1950,7 +1986,7 @@
                 <a:ea typeface="Cambria" pitchFamily="34" charset="-122"/>
                 <a:cs typeface="Cambria" pitchFamily="34" charset="-120"/>
               </a:rPr>
-              <a:t>Объявления в интернете</a:t>
+              <a:t>Чат посёлка</a:t>
             </a:r>
             <a:endParaRPr lang="en-US" sz="1600" dirty="0"/>
           </a:p>
@@ -1978,7 +2014,7 @@
                   <a:srgbClr val="6B6B66"/>
                 </a:solidFill>
               </a:rPr>
-              <a:t>Пока покупатель найдётся и договорится, ягоды пропадут</a:t>
+              <a:t>Объявление тонет за час, и непонятно, у кого вкусно</a:t>
             </a:r>
             <a:endParaRPr lang="en-US" sz="1600" dirty="0"/>
           </a:p>
@@ -1986,13 +2022,13 @@
       </p:sp>
       <p:sp>
         <p:nvSpPr>
-          <p:cNvPr id="7" name="чат"/>
+          <p:cNvPr id="8" name="никак"/>
           <p:cNvSpPr/>
           <p:nvPr/>
         </p:nvSpPr>
         <p:spPr>
           <a:xfrm>
-            <a:off x="8046720" y="3154680"/>
+            <a:off x="8046720" y="3291840"/>
             <a:ext cx="3291840" cy="1600200"/>
           </a:xfrm>
           <a:prstGeom prst="roundRect">
@@ -2025,7 +2061,7 @@
                 <a:ea typeface="Cambria" pitchFamily="34" charset="-122"/>
                 <a:cs typeface="Cambria" pitchFamily="34" charset="-120"/>
               </a:rPr>
-              <a:t>Чат посёлка</a:t>
+              <a:t>Никому</a:t>
             </a:r>
             <a:endParaRPr lang="en-US" sz="1600" dirty="0"/>
           </a:p>
@@ -2053,7 +2089,7 @@
                   <a:srgbClr val="6B6B66"/>
                 </a:solidFill>
               </a:rPr>
-              <a:t>Объявление тонет за час, и непонятно, у кого вкусно</a:t>
+              <a:t>Ведро остаётся дома и через два дня пропадает</a:t>
             </a:r>
             <a:endParaRPr lang="en-US" sz="1600" dirty="0"/>
           </a:p>
@@ -2061,13 +2097,13 @@
       </p:sp>
       <p:sp>
         <p:nvSpPr>
-          <p:cNvPr id="8" name="Text 6"/>
+          <p:cNvPr id="9" name="Text 7"/>
           <p:cNvSpPr txBox="1"/>
           <p:nvPr/>
         </p:nvSpPr>
         <p:spPr>
           <a:xfrm>
-            <a:off x="822960" y="4983480"/>
+            <a:off x="822960" y="5120640"/>
             <a:ext cx="10515600" cy="457200"/>
           </a:xfrm>
           <a:prstGeom prst="rect">
@@ -2084,14 +2120,14 @@
               <a:buNone/>
             </a:pPr>
             <a:r>
-              <a:rPr lang="en-US" sz="1500" i="1" dirty="0">
+              <a:rPr lang="en-US" sz="1600" i="1" dirty="0">
                 <a:solidFill>
                   <a:srgbClr val="6B6B66"/>
                 </a:solidFill>
               </a:rPr>
-              <a:t>То же самое у домашнего повара, у мини-пекарни и у любого, кто готовит или выращивает на продажу</a:t>
-            </a:r>
-            <a:endParaRPr lang="en-US" sz="1500" dirty="0"/>
+              <a:t>Клубника живёт два дня — покупателя надо найти сегодня. И он есть, в трёх домах отсюда.</a:t>
+            </a:r>
+            <a:endParaRPr lang="en-US" sz="1600" dirty="0"/>
           </a:p>
         </p:txBody>
       </p:sp>
@@ -2175,13 +2211,49 @@
       </p:sp>
       <p:sp>
         <p:nvSpPr>
-          <p:cNvPr id="3" name="Text 1"/>
+          <p:cNvPr id="3" name="шаг"/>
           <p:cNvSpPr txBox="1"/>
           <p:nvPr/>
         </p:nvSpPr>
         <p:spPr>
           <a:xfrm>
-            <a:off x="822960" y="1051560"/>
+            <a:off x="822960" y="914400"/>
+            <a:ext cx="10515600" cy="274320"/>
+          </a:xfrm>
+          <a:prstGeom prst="rect">
+            <a:avLst/>
+          </a:prstGeom>
+          <a:noFill/>
+          <a:ln/>
+        </p:spPr>
+        <p:txBody>
+          <a:bodyPr wrap="square" lIns="0" tIns="0" rIns="0" bIns="0" rtlCol="0" anchor="ctr"/>
+          <a:lstStyle/>
+          <a:p>
+            <a:pPr indent="0" marL="0">
+              <a:buNone/>
+            </a:pPr>
+            <a:r>
+              <a:rPr lang="en-US" sz="1300" b="1" dirty="0">
+                <a:solidFill>
+                  <a:srgbClr val="1E6B33"/>
+                </a:solidFill>
+              </a:rPr>
+              <a:t>ШАГ 2 · ЧТО ДЕЛАЕТ «СВОЯЕДА»</a:t>
+            </a:r>
+            <a:endParaRPr lang="en-US" sz="1300" dirty="0"/>
+          </a:p>
+        </p:txBody>
+      </p:sp>
+      <p:sp>
+        <p:nvSpPr>
+          <p:cNvPr id="4" name="Text 2"/>
+          <p:cNvSpPr txBox="1"/>
+          <p:nvPr/>
+        </p:nvSpPr>
+        <p:spPr>
+          <a:xfrm>
+            <a:off x="822960" y="1463040"/>
             <a:ext cx="10515600" cy="914400"/>
           </a:xfrm>
           <a:prstGeom prst="rect">
@@ -2206,7 +2278,7 @@
                 <a:ea typeface="Cambria" pitchFamily="34" charset="-122"/>
                 <a:cs typeface="Cambria" pitchFamily="34" charset="-120"/>
               </a:rPr>
-              <a:t>Сосед </a:t>
+              <a:t>То же ведро, но его </a:t>
             </a:r>
             <a:pPr algn="l" indent="0" marL="0">
               <a:buNone/>
@@ -2220,21 +2292,7 @@
                 <a:ea typeface="Cambria" pitchFamily="34" charset="-122"/>
                 <a:cs typeface="Cambria" pitchFamily="34" charset="-120"/>
               </a:rPr>
-              <a:t>видит</a:t>
-            </a:r>
-            <a:pPr algn="l" indent="0" marL="0">
-              <a:buNone/>
-            </a:pPr>
-            <a:r>
-              <a:rPr lang="en-US" sz="3800" dirty="0">
-                <a:solidFill>
-                  <a:srgbClr val="1A1A17"/>
-                </a:solidFill>
-                <a:latin typeface="Cambria" pitchFamily="34" charset="0"/>
-                <a:ea typeface="Cambria" pitchFamily="34" charset="-122"/>
-                <a:cs typeface="Cambria" pitchFamily="34" charset="-120"/>
-              </a:rPr>
-              <a:t> соседа</a:t>
+              <a:t>видно</a:t>
             </a:r>
             <a:endParaRPr lang="en-US" sz="3800" dirty="0"/>
           </a:p>
@@ -2242,14 +2300,14 @@
       </p:sp>
       <p:sp>
         <p:nvSpPr>
-          <p:cNvPr id="4" name="Text 2"/>
+          <p:cNvPr id="5" name="Text 3"/>
           <p:cNvSpPr txBox="1"/>
           <p:nvPr/>
         </p:nvSpPr>
         <p:spPr>
           <a:xfrm>
-            <a:off x="822960" y="2011680"/>
-            <a:ext cx="9601200" cy="457200"/>
+            <a:off x="822960" y="2240280"/>
+            <a:ext cx="9601200" cy="411480"/>
           </a:xfrm>
           <a:prstGeom prst="rect">
             <a:avLst/>
@@ -2270,7 +2328,7 @@
                   <a:srgbClr val="6B6B66"/>
                 </a:solidFill>
               </a:rPr>
-              <a:t>Место, где видно, что продаётся рядом с тобой прямо сейчас</a:t>
+              <a:t>Бабушка выкладывает клубнику за минуту — и соседи видят её на карте</a:t>
             </a:r>
             <a:endParaRPr lang="en-US" sz="1900" dirty="0"/>
           </a:p>
@@ -2278,18 +2336,18 @@
       </p:sp>
       <p:sp>
         <p:nvSpPr>
-          <p:cNvPr id="5" name="карта"/>
+          <p:cNvPr id="6" name="карта"/>
           <p:cNvSpPr/>
           <p:nvPr/>
         </p:nvSpPr>
         <p:spPr>
           <a:xfrm>
-            <a:off x="822960" y="2697480"/>
-            <a:ext cx="3291840" cy="1463040"/>
+            <a:off x="822960" y="2743200"/>
+            <a:ext cx="3291840" cy="1280160"/>
           </a:xfrm>
           <a:prstGeom prst="roundRect">
             <a:avLst>
-              <a:gd name="adj" fmla="val 6250"/>
+              <a:gd name="adj" fmla="val 7143"/>
             </a:avLst>
           </a:prstGeom>
           <a:solidFill>
@@ -2353,18 +2411,18 @@
       </p:sp>
       <p:sp>
         <p:nvSpPr>
-          <p:cNvPr id="6" name="каталог"/>
+          <p:cNvPr id="7" name="каталог"/>
           <p:cNvSpPr/>
           <p:nvPr/>
         </p:nvSpPr>
         <p:spPr>
           <a:xfrm>
-            <a:off x="4434840" y="2697480"/>
-            <a:ext cx="3291840" cy="1463040"/>
+            <a:off x="4434840" y="2743200"/>
+            <a:ext cx="3291840" cy="1280160"/>
           </a:xfrm>
           <a:prstGeom prst="roundRect">
             <a:avLst>
-              <a:gd name="adj" fmla="val 6250"/>
+              <a:gd name="adj" fmla="val 7143"/>
             </a:avLst>
           </a:prstGeom>
           <a:solidFill>
@@ -2428,18 +2486,18 @@
       </p:sp>
       <p:sp>
         <p:nvSpPr>
-          <p:cNvPr id="7" name="отзывы"/>
+          <p:cNvPr id="8" name="отзывы"/>
           <p:cNvSpPr/>
           <p:nvPr/>
         </p:nvSpPr>
         <p:spPr>
           <a:xfrm>
-            <a:off x="8046720" y="2697480"/>
-            <a:ext cx="3291840" cy="1463040"/>
+            <a:off x="8046720" y="2743200"/>
+            <a:ext cx="3291840" cy="1280160"/>
           </a:xfrm>
           <a:prstGeom prst="roundRect">
             <a:avLst>
-              <a:gd name="adj" fmla="val 6250"/>
+              <a:gd name="adj" fmla="val 7143"/>
             </a:avLst>
           </a:prstGeom>
           <a:solidFill>
@@ -2503,18 +2561,18 @@
       </p:sp>
       <p:sp>
         <p:nvSpPr>
-          <p:cNvPr id="8" name="самовывоз"/>
+          <p:cNvPr id="9" name="самовывоз"/>
           <p:cNvSpPr/>
           <p:nvPr/>
         </p:nvSpPr>
         <p:spPr>
           <a:xfrm>
-            <a:off x="822960" y="4343400"/>
-            <a:ext cx="3291840" cy="1371600"/>
+            <a:off x="822960" y="4160520"/>
+            <a:ext cx="3291840" cy="1280160"/>
           </a:xfrm>
           <a:prstGeom prst="roundRect">
             <a:avLst>
-              <a:gd name="adj" fmla="val 6667"/>
+              <a:gd name="adj" fmla="val 7143"/>
             </a:avLst>
           </a:prstGeom>
           <a:solidFill>
@@ -2578,18 +2636,18 @@
       </p:sp>
       <p:sp>
         <p:nvSpPr>
-          <p:cNvPr id="9" name="роли"/>
+          <p:cNvPr id="10" name="роли"/>
           <p:cNvSpPr/>
           <p:nvPr/>
         </p:nvSpPr>
         <p:spPr>
           <a:xfrm>
-            <a:off x="4434840" y="4343400"/>
-            <a:ext cx="3291840" cy="1371600"/>
+            <a:off x="4434840" y="4160520"/>
+            <a:ext cx="3291840" cy="1280160"/>
           </a:xfrm>
           <a:prstGeom prst="roundRect">
             <a:avLst>
-              <a:gd name="adj" fmla="val 6667"/>
+              <a:gd name="adj" fmla="val 7143"/>
             </a:avLst>
           </a:prstGeom>
           <a:solidFill>
@@ -2653,18 +2711,18 @@
       </p:sp>
       <p:sp>
         <p:nvSpPr>
-          <p:cNvPr id="10" name="телефон"/>
+          <p:cNvPr id="11" name="телефон"/>
           <p:cNvSpPr/>
           <p:nvPr/>
         </p:nvSpPr>
         <p:spPr>
           <a:xfrm>
-            <a:off x="8046720" y="4343400"/>
-            <a:ext cx="3291840" cy="1371600"/>
+            <a:off x="8046720" y="4160520"/>
+            <a:ext cx="3291840" cy="1280160"/>
           </a:xfrm>
           <a:prstGeom prst="roundRect">
             <a:avLst>
-              <a:gd name="adj" fmla="val 6667"/>
+              <a:gd name="adj" fmla="val 7143"/>
             </a:avLst>
           </a:prstGeom>
           <a:solidFill>
@@ -2721,6 +2779,42 @@
                 </a:solidFill>
               </a:rPr>
               <a:t>Открывается в браузере, ставить ничего не нужно</a:t>
+            </a:r>
+            <a:endParaRPr lang="en-US" sz="1600" dirty="0"/>
+          </a:p>
+        </p:txBody>
+      </p:sp>
+      <p:sp>
+        <p:nvSpPr>
+          <p:cNvPr id="12" name="Text 10"/>
+          <p:cNvSpPr txBox="1"/>
+          <p:nvPr/>
+        </p:nvSpPr>
+        <p:spPr>
+          <a:xfrm>
+            <a:off x="822960" y="5577840"/>
+            <a:ext cx="10515600" cy="457200"/>
+          </a:xfrm>
+          <a:prstGeom prst="rect">
+            <a:avLst/>
+          </a:prstGeom>
+          <a:noFill/>
+          <a:ln/>
+        </p:spPr>
+        <p:txBody>
+          <a:bodyPr wrap="square" lIns="0" tIns="0" rIns="0" bIns="0" rtlCol="0" anchor="t"/>
+          <a:lstStyle/>
+          <a:p>
+            <a:pPr indent="0" marL="0">
+              <a:buNone/>
+            </a:pPr>
+            <a:r>
+              <a:rPr lang="en-US" sz="1600" i="1" dirty="0">
+                <a:solidFill>
+                  <a:srgbClr val="6B6B66"/>
+                </a:solidFill>
+              </a:rPr>
+              <a:t>Ведро уходит в тот же вечер. Тут обычно спрашивают: а чем не подошли чат и Авито?</a:t>
             </a:r>
             <a:endParaRPr lang="en-US" sz="1600" dirty="0"/>
           </a:p>
@@ -2806,13 +2900,49 @@
       </p:sp>
       <p:sp>
         <p:nvSpPr>
-          <p:cNvPr id="3" name="Text 1"/>
+          <p:cNvPr id="3" name="шаг"/>
           <p:cNvSpPr txBox="1"/>
           <p:nvPr/>
         </p:nvSpPr>
         <p:spPr>
           <a:xfrm>
-            <a:off x="822960" y="1051560"/>
+            <a:off x="822960" y="914400"/>
+            <a:ext cx="10515600" cy="274320"/>
+          </a:xfrm>
+          <a:prstGeom prst="rect">
+            <a:avLst/>
+          </a:prstGeom>
+          <a:noFill/>
+          <a:ln/>
+        </p:spPr>
+        <p:txBody>
+          <a:bodyPr wrap="square" lIns="0" tIns="0" rIns="0" bIns="0" rtlCol="0" anchor="ctr"/>
+          <a:lstStyle/>
+          <a:p>
+            <a:pPr indent="0" marL="0">
+              <a:buNone/>
+            </a:pPr>
+            <a:r>
+              <a:rPr lang="en-US" sz="1300" b="1" dirty="0">
+                <a:solidFill>
+                  <a:srgbClr val="1E6B33"/>
+                </a:solidFill>
+              </a:rPr>
+              <a:t>ШАГ 3 · ВОЗРАЖЕНИЕ</a:t>
+            </a:r>
+            <a:endParaRPr lang="en-US" sz="1300" dirty="0"/>
+          </a:p>
+        </p:txBody>
+      </p:sp>
+      <p:sp>
+        <p:nvSpPr>
+          <p:cNvPr id="4" name="Text 2"/>
+          <p:cNvSpPr txBox="1"/>
+          <p:nvPr/>
+        </p:nvSpPr>
+        <p:spPr>
+          <a:xfrm>
+            <a:off x="822960" y="1463040"/>
             <a:ext cx="10515600" cy="914400"/>
           </a:xfrm>
           <a:prstGeom prst="rect">
@@ -2837,7 +2967,7 @@
                 <a:ea typeface="Cambria" pitchFamily="34" charset="-122"/>
                 <a:cs typeface="Cambria" pitchFamily="34" charset="-120"/>
               </a:rPr>
-              <a:t>Почему не чат и </a:t>
+              <a:t>Авито про вещи, мы — </a:t>
             </a:r>
             <a:pPr algn="l" indent="0" marL="0">
               <a:buNone/>
@@ -2851,7 +2981,7 @@
                 <a:ea typeface="Cambria" pitchFamily="34" charset="-122"/>
                 <a:cs typeface="Cambria" pitchFamily="34" charset="-120"/>
               </a:rPr>
-              <a:t>не Авито</a:t>
+              <a:t>про ужин</a:t>
             </a:r>
             <a:endParaRPr lang="en-US" sz="3800" dirty="0"/>
           </a:p>
@@ -2859,14 +2989,14 @@
       </p:sp>
       <p:sp>
         <p:nvSpPr>
-          <p:cNvPr id="4" name="Text 2"/>
+          <p:cNvPr id="5" name="Text 3"/>
           <p:cNvSpPr txBox="1"/>
           <p:nvPr/>
         </p:nvSpPr>
         <p:spPr>
           <a:xfrm>
-            <a:off x="822960" y="2011680"/>
-            <a:ext cx="9601200" cy="731520"/>
+            <a:off x="822960" y="2240280"/>
+            <a:ext cx="10058400" cy="914400"/>
           </a:xfrm>
           <a:prstGeom prst="rect">
             <a:avLst/>
@@ -2882,14 +3012,14 @@
               <a:buNone/>
             </a:pPr>
             <a:r>
-              <a:rPr lang="en-US" sz="1800" dirty="0">
+              <a:rPr lang="en-US" sz="1700" dirty="0">
                 <a:solidFill>
                   <a:srgbClr val="1A1A17"/>
                 </a:solidFill>
               </a:rPr>
-              <a:t>В чате объявление тонет за час, и всё равно не знаешь, у кого клубника вкусная. Здесь у продавца остаются отзывы — сразу видно, к кому идти второй раз.</a:t>
-            </a:r>
-            <a:endParaRPr lang="en-US" sz="1800" dirty="0"/>
+              <a:t>На Авито ищут диван и телефон, а не ведро клубники: объявление видно по всему городу, сделка идёт днями, а за свежей ягодой никто не поедет через полгорода. В чате объявление тонет за час, и всё равно непонятно, у кого вкусно.</a:t>
+            </a:r>
+            <a:endParaRPr lang="en-US" sz="1700" dirty="0"/>
           </a:p>
         </p:txBody>
       </p:sp>
@@ -2908,7 +3038,7 @@
           </p:nvPr>
         </p:nvGraphicFramePr>
         <p:xfrm>
-          <a:off x="822960" y="2971800"/>
+          <a:off x="822960" y="3291840"/>
           <a:ext cx="10515600" cy="914400"/>
         </p:xfrm>
         <a:graphic>
@@ -2939,7 +3069,7 @@
                           <a:ea typeface="Calibri" pitchFamily="34" charset="-122"/>
                           <a:cs typeface="Calibri" pitchFamily="34" charset="-120"/>
                         </a:rPr>
-                        <a:t>Как продают сейчас</a:t>
+                        <a:t>Где продают</a:t>
                       </a:r>
                       <a:endParaRPr lang="en-US" sz="1300" dirty="0">
                         <a:latin typeface="Calibri" charset="0"/>
@@ -3761,7 +3891,7 @@
                           <a:ea typeface="Calibri" pitchFamily="34" charset="-122"/>
                           <a:cs typeface="Calibri" pitchFamily="34" charset="-120"/>
                         </a:rPr>
-                        <a:t>Большие площадки</a:t>
+                        <a:t>Авито и доски объявлений</a:t>
                       </a:r>
                       <a:endParaRPr lang="en-US" sz="1300" dirty="0">
                         <a:latin typeface="Calibri" charset="0"/>
@@ -3897,7 +4027,7 @@
                           <a:ea typeface="Calibri" pitchFamily="34" charset="-122"/>
                           <a:cs typeface="Calibri" pitchFamily="34" charset="-120"/>
                         </a:rPr>
-                        <a:t>нет</a:t>
+                        <a:t>нет, весь город</a:t>
                       </a:r>
                       <a:endParaRPr lang="en-US" sz="1300" dirty="0">
                         <a:latin typeface="Calibri" charset="0"/>
@@ -4295,6 +4425,42 @@
           </a:graphicData>
         </a:graphic>
       </p:graphicFrame>
+      <p:sp>
+        <p:nvSpPr>
+          <p:cNvPr id="7" name="Text 4"/>
+          <p:cNvSpPr txBox="1"/>
+          <p:nvPr/>
+        </p:nvSpPr>
+        <p:spPr>
+          <a:xfrm>
+            <a:off x="822960" y="5486400"/>
+            <a:ext cx="10515600" cy="457200"/>
+          </a:xfrm>
+          <a:prstGeom prst="rect">
+            <a:avLst/>
+          </a:prstGeom>
+          <a:noFill/>
+          <a:ln/>
+        </p:spPr>
+        <p:txBody>
+          <a:bodyPr wrap="square" lIns="0" tIns="0" rIns="0" bIns="0" rtlCol="0" anchor="t"/>
+          <a:lstStyle/>
+          <a:p>
+            <a:pPr indent="0" marL="0">
+              <a:buNone/>
+            </a:pPr>
+            <a:r>
+              <a:rPr lang="en-US" sz="1600" i="1" dirty="0">
+                <a:solidFill>
+                  <a:srgbClr val="6B6B66"/>
+                </a:solidFill>
+              </a:rPr>
+              <a:t>Еду рядом ищут не так, как диван в другом конце города. Поэтому для неё нужна своя площадка.</a:t>
+            </a:r>
+            <a:endParaRPr lang="en-US" sz="1600" dirty="0"/>
+          </a:p>
+        </p:txBody>
+      </p:sp>
     </p:spTree>
   </p:cSld>
   <p:clrMapOvr>
@@ -4375,13 +4541,49 @@
       </p:sp>
       <p:sp>
         <p:nvSpPr>
-          <p:cNvPr id="3" name="Text 1"/>
+          <p:cNvPr id="3" name="шаг"/>
           <p:cNvSpPr txBox="1"/>
           <p:nvPr/>
         </p:nvSpPr>
         <p:spPr>
           <a:xfrm>
-            <a:off x="822960" y="1463040"/>
+            <a:off x="822960" y="914400"/>
+            <a:ext cx="10515600" cy="274320"/>
+          </a:xfrm>
+          <a:prstGeom prst="rect">
+            <a:avLst/>
+          </a:prstGeom>
+          <a:noFill/>
+          <a:ln/>
+        </p:spPr>
+        <p:txBody>
+          <a:bodyPr wrap="square" lIns="0" tIns="0" rIns="0" bIns="0" rtlCol="0" anchor="ctr"/>
+          <a:lstStyle/>
+          <a:p>
+            <a:pPr indent="0" marL="0">
+              <a:buNone/>
+            </a:pPr>
+            <a:r>
+              <a:rPr lang="en-US" sz="1300" b="1" dirty="0">
+                <a:solidFill>
+                  <a:srgbClr val="1E6B33"/>
+                </a:solidFill>
+              </a:rPr>
+              <a:t>ШАГ 4 · ЧТО ДАЛЬШЕ</a:t>
+            </a:r>
+            <a:endParaRPr lang="en-US" sz="1300" dirty="0"/>
+          </a:p>
+        </p:txBody>
+      </p:sp>
+      <p:sp>
+        <p:nvSpPr>
+          <p:cNvPr id="4" name="Text 2"/>
+          <p:cNvSpPr txBox="1"/>
+          <p:nvPr/>
+        </p:nvSpPr>
+        <p:spPr>
+          <a:xfrm>
+            <a:off x="822960" y="1600200"/>
             <a:ext cx="10515600" cy="914400"/>
           </a:xfrm>
           <a:prstGeom prst="rect">
@@ -4398,7 +4600,7 @@
               <a:buNone/>
             </a:pPr>
             <a:r>
-              <a:rPr lang="en-US" sz="4000" dirty="0">
+              <a:rPr lang="en-US" sz="3800" dirty="0">
                 <a:solidFill>
                   <a:srgbClr val="1A1A17"/>
                 </a:solidFill>
@@ -4406,13 +4608,13 @@
                 <a:ea typeface="Cambria" pitchFamily="34" charset="-122"/>
                 <a:cs typeface="Cambria" pitchFamily="34" charset="-120"/>
               </a:rPr>
-              <a:t>Своя еда — от </a:t>
+              <a:t>Одно ведро — и </a:t>
             </a:r>
             <a:pPr algn="l" indent="0" marL="0">
               <a:buNone/>
             </a:pPr>
             <a:r>
-              <a:rPr lang="en-US" sz="4000" i="1" dirty="0">
+              <a:rPr lang="en-US" sz="3800" i="1" dirty="0">
                 <a:solidFill>
                   <a:srgbClr val="1E6B33"/>
                 </a:solidFill>
@@ -4420,22 +4622,22 @@
                 <a:ea typeface="Cambria" pitchFamily="34" charset="-122"/>
                 <a:cs typeface="Cambria" pitchFamily="34" charset="-120"/>
               </a:rPr>
-              <a:t>своих людей</a:t>
-            </a:r>
-            <a:endParaRPr lang="en-US" sz="4000" dirty="0"/>
-          </a:p>
-        </p:txBody>
-      </p:sp>
-      <p:sp>
-        <p:nvSpPr>
-          <p:cNvPr id="4" name="Text 2"/>
+              <a:t>так же всё остальное</a:t>
+            </a:r>
+            <a:endParaRPr lang="en-US" sz="3800" dirty="0"/>
+          </a:p>
+        </p:txBody>
+      </p:sp>
+      <p:sp>
+        <p:nvSpPr>
+          <p:cNvPr id="5" name="Text 3"/>
           <p:cNvSpPr txBox="1"/>
           <p:nvPr/>
         </p:nvSpPr>
         <p:spPr>
           <a:xfrm>
             <a:off x="822960" y="2468880"/>
-            <a:ext cx="9144000" cy="822960"/>
+            <a:ext cx="10058400" cy="822960"/>
           </a:xfrm>
           <a:prstGeom prst="rect">
             <a:avLst/>
@@ -4451,26 +4653,26 @@
               <a:buNone/>
             </a:pPr>
             <a:r>
-              <a:rPr lang="en-US" sz="1900" dirty="0">
+              <a:rPr lang="en-US" sz="1800" dirty="0">
                 <a:solidFill>
                   <a:srgbClr val="6B6B66"/>
                 </a:solidFill>
               </a:rPr>
-              <a:t>Площадка работает одинаково в селе и в городе: везде есть те, кто готовит и выращивает, и те, кто рад купить рядом с домом.</a:t>
-            </a:r>
-            <a:endParaRPr lang="en-US" sz="1900" dirty="0"/>
-          </a:p>
-        </p:txBody>
-      </p:sp>
-      <p:sp>
-        <p:nvSpPr>
-          <p:cNvPr id="5" name="план 1"/>
+              <a:t>С клубникой получилось. Ровно так же продаются домашняя выпечка, мёд, молоко и обеды — и в селе, и в городе: везде есть те, кто готовит, и те, кто рад купить рядом с домом.</a:t>
+            </a:r>
+            <a:endParaRPr lang="en-US" sz="1800" dirty="0"/>
+          </a:p>
+        </p:txBody>
+      </p:sp>
+      <p:sp>
+        <p:nvSpPr>
+          <p:cNvPr id="6" name="план 1"/>
           <p:cNvSpPr/>
           <p:nvPr/>
         </p:nvSpPr>
         <p:spPr>
           <a:xfrm>
-            <a:off x="822960" y="3429000"/>
+            <a:off x="822960" y="3474720"/>
             <a:ext cx="3291840" cy="1234440"/>
           </a:xfrm>
           <a:prstGeom prst="roundRect">
@@ -4531,7 +4733,7 @@
                   <a:srgbClr val="6B6B66"/>
                 </a:solidFill>
               </a:rPr>
-              <a:t>те, кого уже знают</a:t>
+              <a:t>те, кого в районе уже знают</a:t>
             </a:r>
             <a:endParaRPr lang="en-US" sz="1500" dirty="0"/>
           </a:p>
@@ -4539,13 +4741,13 @@
       </p:sp>
       <p:sp>
         <p:nvSpPr>
-          <p:cNvPr id="6" name="план 2"/>
+          <p:cNvPr id="7" name="план 2"/>
           <p:cNvSpPr/>
           <p:nvPr/>
         </p:nvSpPr>
         <p:spPr>
           <a:xfrm>
-            <a:off x="4434840" y="3429000"/>
+            <a:off x="4434840" y="3474720"/>
             <a:ext cx="3291840" cy="1234440"/>
           </a:xfrm>
           <a:prstGeom prst="roundRect">
@@ -4606,7 +4808,7 @@
                   <a:srgbClr val="6B6B66"/>
                 </a:solidFill>
               </a:rPr>
-              <a:t>та же схема</a:t>
+              <a:t>та же схема, без переделок</a:t>
             </a:r>
             <a:endParaRPr lang="en-US" sz="1500" dirty="0"/>
           </a:p>
@@ -4614,13 +4816,13 @@
       </p:sp>
       <p:sp>
         <p:nvSpPr>
-          <p:cNvPr id="7" name="план 3"/>
+          <p:cNvPr id="8" name="план 3"/>
           <p:cNvSpPr/>
           <p:nvPr/>
         </p:nvSpPr>
         <p:spPr>
           <a:xfrm>
-            <a:off x="8046720" y="3429000"/>
+            <a:off x="8046720" y="3474720"/>
             <a:ext cx="3291840" cy="1234440"/>
           </a:xfrm>
           <a:prstGeom prst="roundRect">
@@ -4689,13 +4891,13 @@
       </p:sp>
       <p:sp>
         <p:nvSpPr>
-          <p:cNvPr id="8" name="финал"/>
+          <p:cNvPr id="9" name="финал"/>
           <p:cNvSpPr txBox="1"/>
           <p:nvPr/>
         </p:nvSpPr>
         <p:spPr>
           <a:xfrm>
-            <a:off x="822960" y="4937760"/>
+            <a:off x="822960" y="4983480"/>
             <a:ext cx="9144000" cy="914400"/>
           </a:xfrm>
           <a:prstGeom prst="rect">

--- a/deck/СвояЕда.pptx
+++ b/deck/СвояЕда.pptx
@@ -111,27 +111,27 @@
   <p:extLst>
     <p:ext uri="{521415D9-36F7-43E2-AB2F-B90AF26B5E84}">
       <p14:sectionLst xmlns:p14="http://schemas.microsoft.com/office/powerpoint/2010/main">
-        <p14:section name="Открытие" id="{0eef7893-1f52-0668-1fd0-317e320531e6}">
+        <p14:section name="Открытие" id="{92f0f5d1-9937-0756-da2e-46a92070a264}">
           <p14:sldIdLst>
             <p14:sldId id="256"/>
           </p14:sldIdLst>
         </p14:section>
-        <p14:section name="Проблема" id="{97b58e05-3399-6e7f-0396-173ce5d4725b}">
+        <p14:section name="Проблема" id="{b5672512-8ae7-f6c2-38f5-427f0a3b2554}">
           <p14:sldIdLst>
             <p14:sldId id="257"/>
           </p14:sldIdLst>
         </p14:section>
-        <p14:section name="Идея" id="{67e7c4b2-0a4b-ff91-c8e2-d54d1d53d226}">
+        <p14:section name="Идея" id="{b64d95e7-999a-bd49-3a53-403b0f2ca3a2}">
           <p14:sldIdLst>
             <p14:sldId id="258"/>
           </p14:sldIdLst>
         </p14:section>
-        <p14:section name="Отличие" id="{5961defd-53df-a23f-7823-6d70c99d878c}">
+        <p14:section name="Отличие" id="{4eecf868-3f0e-ddbb-41ce-58acad5de609}">
           <p14:sldIdLst>
             <p14:sldId id="259"/>
           </p14:sldIdLst>
         </p14:section>
-        <p14:section name="Итог" id="{33dada0c-8b98-623e-1d72-0147f686c46f}">
+        <p14:section name="Итог" id="{1303e108-89ab-f783-377d-60375cb2463b}">
           <p14:sldIdLst>
             <p14:sldId id="260"/>
           </p14:sldIdLst>
@@ -716,7 +716,7 @@
           <a:p>
             <a:r>
               <a:rPr lang="en-US" dirty="0"/>
-              <a:t>Показать карту с расстоянием — этого нет ни в чате, ни на Авито. Остальное перечислить бегло и сразу перейти к возражению.</a:t>
+              <a:t>Показать живой сайт: карточка товара с ценой и отзывы. Остальное перечислить бегло и сразу перейти к возражению.</a:t>
             </a:r>
             <a:endParaRPr lang="en-US" dirty="0"/>
           </a:p>
@@ -2328,7 +2328,7 @@
                   <a:srgbClr val="6B6B66"/>
                 </a:solidFill>
               </a:rPr>
-              <a:t>Бабушка выкладывает клубнику за минуту — и соседи видят её на карте</a:t>
+              <a:t>Бабушка выкладывает клубнику за минуту — и её сразу видят соседи</a:t>
             </a:r>
             <a:endParaRPr lang="en-US" sz="1900" dirty="0"/>
           </a:p>
@@ -2336,7 +2336,7 @@
       </p:sp>
       <p:sp>
         <p:nvSpPr>
-          <p:cNvPr id="6" name="карта"/>
+          <p:cNvPr id="6" name="каталог"/>
           <p:cNvSpPr/>
           <p:nvPr/>
         </p:nvSpPr>
@@ -2375,7 +2375,7 @@
                 <a:ea typeface="Cambria" pitchFamily="34" charset="-122"/>
                 <a:cs typeface="Cambria" pitchFamily="34" charset="-120"/>
               </a:rPr>
-              <a:t>Всё на карте</a:t>
+              <a:t>Товар и цена</a:t>
             </a:r>
             <a:endParaRPr lang="en-US" sz="1600" dirty="0"/>
           </a:p>
@@ -2403,7 +2403,7 @@
                   <a:srgbClr val="6B6B66"/>
                 </a:solidFill>
               </a:rPr>
-              <a:t>Видно, кто продаёт рядом и сколько до него идти</a:t>
+              <a:t>Фотография, цена и единица — клубника, ведро</a:t>
             </a:r>
             <a:endParaRPr lang="en-US" sz="1600" dirty="0"/>
           </a:p>
@@ -2411,7 +2411,7 @@
       </p:sp>
       <p:sp>
         <p:nvSpPr>
-          <p:cNvPr id="7" name="каталог"/>
+          <p:cNvPr id="7" name="отзывы"/>
           <p:cNvSpPr/>
           <p:nvPr/>
         </p:nvSpPr>
@@ -2450,7 +2450,7 @@
                 <a:ea typeface="Cambria" pitchFamily="34" charset="-122"/>
                 <a:cs typeface="Cambria" pitchFamily="34" charset="-120"/>
               </a:rPr>
-              <a:t>Товар и цена</a:t>
+              <a:t>Отзывы</a:t>
             </a:r>
             <a:endParaRPr lang="en-US" sz="1600" dirty="0"/>
           </a:p>
@@ -2478,7 +2478,7 @@
                   <a:srgbClr val="6B6B66"/>
                 </a:solidFill>
               </a:rPr>
-              <a:t>Фотография, цена и единица — клубника, ведро</a:t>
+              <a:t>Видно, у кого покупать второй раз</a:t>
             </a:r>
             <a:endParaRPr lang="en-US" sz="1600" dirty="0"/>
           </a:p>
@@ -2486,7 +2486,7 @@
       </p:sp>
       <p:sp>
         <p:nvSpPr>
-          <p:cNvPr id="8" name="отзывы"/>
+          <p:cNvPr id="8" name="самовывоз"/>
           <p:cNvSpPr/>
           <p:nvPr/>
         </p:nvSpPr>
@@ -2525,7 +2525,7 @@
                 <a:ea typeface="Cambria" pitchFamily="34" charset="-122"/>
                 <a:cs typeface="Cambria" pitchFamily="34" charset="-120"/>
               </a:rPr>
-              <a:t>Отзывы</a:t>
+              <a:t>Самовывоз</a:t>
             </a:r>
             <a:endParaRPr lang="en-US" sz="1600" dirty="0"/>
           </a:p>
@@ -2553,7 +2553,7 @@
                   <a:srgbClr val="6B6B66"/>
                 </a:solidFill>
               </a:rPr>
-              <a:t>Видно, у кого покупать второй раз</a:t>
+              <a:t>Забрал по пути, без доставки и курьеров</a:t>
             </a:r>
             <a:endParaRPr lang="en-US" sz="1600" dirty="0"/>
           </a:p>
@@ -2561,7 +2561,7 @@
       </p:sp>
       <p:sp>
         <p:nvSpPr>
-          <p:cNvPr id="9" name="самовывоз"/>
+          <p:cNvPr id="9" name="роли"/>
           <p:cNvSpPr/>
           <p:nvPr/>
         </p:nvSpPr>
@@ -2600,7 +2600,7 @@
                 <a:ea typeface="Cambria" pitchFamily="34" charset="-122"/>
                 <a:cs typeface="Cambria" pitchFamily="34" charset="-120"/>
               </a:rPr>
-              <a:t>Самовывоз</a:t>
+              <a:t>Две роли</a:t>
             </a:r>
             <a:endParaRPr lang="en-US" sz="1600" dirty="0"/>
           </a:p>
@@ -2628,7 +2628,7 @@
                   <a:srgbClr val="6B6B66"/>
                 </a:solidFill>
               </a:rPr>
-              <a:t>Забрал по пути, без доставки и курьеров</a:t>
+              <a:t>Покупать или стать продавцом — в один клик</a:t>
             </a:r>
             <a:endParaRPr lang="en-US" sz="1600" dirty="0"/>
           </a:p>
@@ -2636,7 +2636,7 @@
       </p:sp>
       <p:sp>
         <p:nvSpPr>
-          <p:cNvPr id="10" name="роли"/>
+          <p:cNvPr id="10" name="телефон"/>
           <p:cNvSpPr/>
           <p:nvPr/>
         </p:nvSpPr>
@@ -2675,7 +2675,7 @@
                 <a:ea typeface="Cambria" pitchFamily="34" charset="-122"/>
                 <a:cs typeface="Cambria" pitchFamily="34" charset="-120"/>
               </a:rPr>
-              <a:t>Две роли</a:t>
+              <a:t>С телефона</a:t>
             </a:r>
             <a:endParaRPr lang="en-US" sz="1600" dirty="0"/>
           </a:p>
@@ -2703,7 +2703,7 @@
                   <a:srgbClr val="6B6B66"/>
                 </a:solidFill>
               </a:rPr>
-              <a:t>Покупать или стать продавцом — в один клик</a:t>
+              <a:t>Открывается в браузере, ставить ничего не нужно</a:t>
             </a:r>
             <a:endParaRPr lang="en-US" sz="1600" dirty="0"/>
           </a:p>
@@ -2711,82 +2711,7 @@
       </p:sp>
       <p:sp>
         <p:nvSpPr>
-          <p:cNvPr id="11" name="телефон"/>
-          <p:cNvSpPr/>
-          <p:nvPr/>
-        </p:nvSpPr>
-        <p:spPr>
-          <a:xfrm>
-            <a:off x="8046720" y="4160520"/>
-            <a:ext cx="3291840" cy="1280160"/>
-          </a:xfrm>
-          <a:prstGeom prst="roundRect">
-            <a:avLst>
-              <a:gd name="adj" fmla="val 7143"/>
-            </a:avLst>
-          </a:prstGeom>
-          <a:solidFill>
-            <a:srgbClr val="FFFFFF"/>
-          </a:solidFill>
-          <a:ln w="12700">
-            <a:solidFill>
-              <a:srgbClr val="E6E6DF"/>
-            </a:solidFill>
-          </a:ln>
-        </p:spPr>
-        <p:txBody>
-          <a:bodyPr wrap="square" lIns="177800" tIns="203200" rIns="203200" bIns="177800" rtlCol="0" anchor="t"/>
-          <a:lstStyle/>
-          <a:p>
-            <a:pPr algn="l" indent="0" marL="0">
-              <a:buNone/>
-            </a:pPr>
-            <a:r>
-              <a:rPr lang="en-US" sz="1600" b="1" dirty="0">
-                <a:solidFill>
-                  <a:srgbClr val="1A1A17"/>
-                </a:solidFill>
-                <a:latin typeface="Cambria" pitchFamily="34" charset="0"/>
-                <a:ea typeface="Cambria" pitchFamily="34" charset="-122"/>
-                <a:cs typeface="Cambria" pitchFamily="34" charset="-120"/>
-              </a:rPr>
-              <a:t>С телефона</a:t>
-            </a:r>
-            <a:endParaRPr lang="en-US" sz="1600" dirty="0"/>
-          </a:p>
-          <a:p>
-            <a:pPr algn="l" indent="0" marL="0">
-              <a:buNone/>
-            </a:pPr>
-            <a:r>
-              <a:rPr lang="en-US" sz="600" dirty="0">
-                <a:solidFill>
-                  <a:srgbClr val="000000"/>
-                </a:solidFill>
-              </a:rPr>
-              <a:t> </a:t>
-            </a:r>
-            <a:endParaRPr lang="en-US" sz="1600" dirty="0"/>
-          </a:p>
-          <a:p>
-            <a:pPr algn="l" indent="0" marL="0">
-              <a:buNone/>
-            </a:pPr>
-            <a:r>
-              <a:rPr lang="en-US" sz="1350" dirty="0">
-                <a:solidFill>
-                  <a:srgbClr val="6B6B66"/>
-                </a:solidFill>
-              </a:rPr>
-              <a:t>Открывается в браузере, ставить ничего не нужно</a:t>
-            </a:r>
-            <a:endParaRPr lang="en-US" sz="1600" dirty="0"/>
-          </a:p>
-        </p:txBody>
-      </p:sp>
-      <p:sp>
-        <p:nvSpPr>
-          <p:cNvPr id="12" name="Text 10"/>
+          <p:cNvPr id="11" name="Text 9"/>
           <p:cNvSpPr txBox="1"/>
           <p:nvPr/>
         </p:nvSpPr>
@@ -4301,7 +4226,7 @@
                           <a:ea typeface="Calibri" pitchFamily="34" charset="-122"/>
                           <a:cs typeface="Calibri" pitchFamily="34" charset="-120"/>
                         </a:rPr>
-                        <a:t>да, на карте</a:t>
+                        <a:t>да, соседи</a:t>
                       </a:r>
                       <a:endParaRPr lang="en-US" sz="1300" dirty="0">
                         <a:latin typeface="Calibri" charset="0"/>
@@ -4816,82 +4741,7 @@
       </p:sp>
       <p:sp>
         <p:nvSpPr>
-          <p:cNvPr id="8" name="план 3"/>
-          <p:cNvSpPr/>
-          <p:nvPr/>
-        </p:nvSpPr>
-        <p:spPr>
-          <a:xfrm>
-            <a:off x="8046720" y="3474720"/>
-            <a:ext cx="3291840" cy="1234440"/>
-          </a:xfrm>
-          <a:prstGeom prst="roundRect">
-            <a:avLst>
-              <a:gd name="adj" fmla="val 7407"/>
-            </a:avLst>
-          </a:prstGeom>
-          <a:solidFill>
-            <a:srgbClr val="FFFFFF"/>
-          </a:solidFill>
-          <a:ln w="12700">
-            <a:solidFill>
-              <a:srgbClr val="E6E6DF"/>
-            </a:solidFill>
-          </a:ln>
-        </p:spPr>
-        <p:txBody>
-          <a:bodyPr wrap="square" lIns="177800" tIns="203200" rIns="203200" bIns="177800" rtlCol="0" anchor="t"/>
-          <a:lstStyle/>
-          <a:p>
-            <a:pPr algn="l" indent="0" marL="0">
-              <a:buNone/>
-            </a:pPr>
-            <a:r>
-              <a:rPr lang="en-US" sz="1500" b="1" dirty="0">
-                <a:solidFill>
-                  <a:srgbClr val="1A1A17"/>
-                </a:solidFill>
-                <a:latin typeface="Cambria" pitchFamily="34" charset="0"/>
-                <a:ea typeface="Cambria" pitchFamily="34" charset="-122"/>
-                <a:cs typeface="Cambria" pitchFamily="34" charset="-120"/>
-              </a:rPr>
-              <a:t>Уведомления</a:t>
-            </a:r>
-            <a:endParaRPr lang="en-US" sz="1500" dirty="0"/>
-          </a:p>
-          <a:p>
-            <a:pPr algn="l" indent="0" marL="0">
-              <a:buNone/>
-            </a:pPr>
-            <a:r>
-              <a:rPr lang="en-US" sz="600" dirty="0">
-                <a:solidFill>
-                  <a:srgbClr val="000000"/>
-                </a:solidFill>
-              </a:rPr>
-              <a:t> </a:t>
-            </a:r>
-            <a:endParaRPr lang="en-US" sz="1500" dirty="0"/>
-          </a:p>
-          <a:p>
-            <a:pPr algn="l" indent="0" marL="0">
-              <a:buNone/>
-            </a:pPr>
-            <a:r>
-              <a:rPr lang="en-US" sz="1300" dirty="0">
-                <a:solidFill>
-                  <a:srgbClr val="6B6B66"/>
-                </a:solidFill>
-              </a:rPr>
-              <a:t>«рядом появилась клубника»</a:t>
-            </a:r>
-            <a:endParaRPr lang="en-US" sz="1500" dirty="0"/>
-          </a:p>
-        </p:txBody>
-      </p:sp>
-      <p:sp>
-        <p:nvSpPr>
-          <p:cNvPr id="9" name="финал"/>
+          <p:cNvPr id="8" name="финал"/>
           <p:cNvSpPr txBox="1"/>
           <p:nvPr/>
         </p:nvSpPr>

--- a/deck/СвояЕда.pptx
+++ b/deck/СвояЕда.pptx
@@ -111,27 +111,27 @@
   <p:extLst>
     <p:ext uri="{521415D9-36F7-43E2-AB2F-B90AF26B5E84}">
       <p14:sectionLst xmlns:p14="http://schemas.microsoft.com/office/powerpoint/2010/main">
-        <p14:section name="Открытие" id="{92f0f5d1-9937-0756-da2e-46a92070a264}">
+        <p14:section name="Открытие" id="{52757183-c3af-5f22-fc4d-7259d27eac26}">
           <p14:sldIdLst>
             <p14:sldId id="256"/>
           </p14:sldIdLst>
         </p14:section>
-        <p14:section name="Проблема" id="{b5672512-8ae7-f6c2-38f5-427f0a3b2554}">
+        <p14:section name="Проблема" id="{abd54704-1fa9-e6af-ebec-696385ab657d}">
           <p14:sldIdLst>
             <p14:sldId id="257"/>
           </p14:sldIdLst>
         </p14:section>
-        <p14:section name="Идея" id="{b64d95e7-999a-bd49-3a53-403b0f2ca3a2}">
+        <p14:section name="Идея" id="{f9443dda-d83c-57b7-89d2-0a4af19be1be}">
           <p14:sldIdLst>
             <p14:sldId id="258"/>
           </p14:sldIdLst>
         </p14:section>
-        <p14:section name="Отличие" id="{4eecf868-3f0e-ddbb-41ce-58acad5de609}">
+        <p14:section name="Отличие" id="{a4dab15f-703a-c1bd-8403-f323f2e6c392}">
           <p14:sldIdLst>
             <p14:sldId id="259"/>
           </p14:sldIdLst>
         </p14:section>
-        <p14:section name="Итог" id="{1303e108-89ab-f783-377d-60375cb2463b}">
+        <p14:section name="Итог" id="{8e3c852e-775b-267c-e9dc-60af430b6301}">
           <p14:sldIdLst>
             <p14:sldId id="260"/>
           </p14:sldIdLst>
@@ -988,42 +988,6 @@
           <a:chExt cx="0" cy="0"/>
         </a:xfrm>
       </p:grpSpPr>
-      <p:sp>
-        <p:nvSpPr>
-          <p:cNvPr id="2" name="Text 0"/>
-          <p:cNvSpPr txBox="1"/>
-          <p:nvPr/>
-        </p:nvSpPr>
-        <p:spPr>
-          <a:xfrm>
-            <a:off x="7680960" y="365760"/>
-            <a:ext cx="3657600" cy="320040"/>
-          </a:xfrm>
-          <a:prstGeom prst="rect">
-            <a:avLst/>
-          </a:prstGeom>
-          <a:noFill/>
-          <a:ln/>
-        </p:spPr>
-        <p:txBody>
-          <a:bodyPr wrap="square" lIns="0" tIns="0" rIns="0" bIns="0" rtlCol="0" anchor="ctr"/>
-          <a:lstStyle/>
-          <a:p>
-            <a:pPr algn="r" indent="0" marL="0">
-              <a:buNone/>
-            </a:pPr>
-            <a:r>
-              <a:rPr lang="en-US" sz="1200" dirty="0">
-                <a:solidFill>
-                  <a:srgbClr val="6B6B66"/>
-                </a:solidFill>
-              </a:rPr>
-              <a:t>svoya-eda.tatnet.app</a:t>
-            </a:r>
-            <a:endParaRPr lang="en-US" sz="1200" dirty="0"/>
-          </a:p>
-        </p:txBody>
-      </p:sp>
     </p:spTree>
   </p:cSld>
   <p:clrMapOvr>

--- a/deck/СвояЕда.pptx
+++ b/deck/СвояЕда.pptx
@@ -111,27 +111,27 @@
   <p:extLst>
     <p:ext uri="{521415D9-36F7-43E2-AB2F-B90AF26B5E84}">
       <p14:sectionLst xmlns:p14="http://schemas.microsoft.com/office/powerpoint/2010/main">
-        <p14:section name="Открытие" id="{52757183-c3af-5f22-fc4d-7259d27eac26}">
+        <p14:section name="Открытие" id="{ea4be431-da1b-afba-05d5-e0fa5b3dded9}">
           <p14:sldIdLst>
             <p14:sldId id="256"/>
           </p14:sldIdLst>
         </p14:section>
-        <p14:section name="Проблема" id="{abd54704-1fa9-e6af-ebec-696385ab657d}">
+        <p14:section name="Проблема" id="{b1fe6725-6fca-bc64-29e4-565e94f81740}">
           <p14:sldIdLst>
             <p14:sldId id="257"/>
           </p14:sldIdLst>
         </p14:section>
-        <p14:section name="Идея" id="{f9443dda-d83c-57b7-89d2-0a4af19be1be}">
+        <p14:section name="Идея" id="{b944415d-bf72-20dd-a017-364758c47861}">
           <p14:sldIdLst>
             <p14:sldId id="258"/>
           </p14:sldIdLst>
         </p14:section>
-        <p14:section name="Отличие" id="{a4dab15f-703a-c1bd-8403-f323f2e6c392}">
+        <p14:section name="Отличие" id="{4e5a8524-d2e3-9b99-88a0-207b43c2ca31}">
           <p14:sldIdLst>
             <p14:sldId id="259"/>
           </p14:sldIdLst>
         </p14:section>
-        <p14:section name="Итог" id="{8e3c852e-775b-267c-e9dc-60af430b6301}">
+        <p14:section name="Итог" id="{33e42c4c-b677-b064-f696-bec330c951b9}">
           <p14:sldIdLst>
             <p14:sldId id="260"/>
           </p14:sldIdLst>
@@ -1291,9 +1291,32 @@
           <a:chExt cx="0" cy="0"/>
         </a:xfrm>
       </p:grpSpPr>
-      <p:sp>
-        <p:nvSpPr>
-          <p:cNvPr id="2" name="логотип"/>
+      <p:pic>
+        <p:nvPicPr>
+          <p:cNvPr id="2" name="фото клубники" descr="/home/user/project/deck/img/klubnika.jpg">    </p:cNvPr>
+          <p:cNvPicPr>
+            <a:picLocks noChangeAspect="1"/>
+          </p:cNvPicPr>
+          <p:nvPr/>
+        </p:nvPicPr>
+        <p:blipFill>
+          <a:blip r:embed="rId1"/>
+          <a:srcRect l="0" r="0" t="0" b="0"/>
+          <a:stretch/>
+        </p:blipFill>
+        <p:spPr>
+          <a:xfrm>
+            <a:off x="7772400" y="0"/>
+            <a:ext cx="4389120" cy="6858000"/>
+          </a:xfrm>
+          <a:prstGeom prst="rect">
+            <a:avLst/>
+          </a:prstGeom>
+        </p:spPr>
+      </p:pic>
+      <p:sp>
+        <p:nvSpPr>
+          <p:cNvPr id="3" name="логотип"/>
           <p:cNvSpPr txBox="1"/>
           <p:nvPr/>
         </p:nvSpPr>
@@ -1346,14 +1369,14 @@
       </p:sp>
       <p:sp>
         <p:nvSpPr>
-          <p:cNvPr id="3" name="Text 1"/>
+          <p:cNvPr id="4" name="Text 1"/>
           <p:cNvSpPr txBox="1"/>
           <p:nvPr/>
         </p:nvSpPr>
         <p:spPr>
           <a:xfrm>
             <a:off x="822960" y="2011680"/>
-            <a:ext cx="10515600" cy="1188720"/>
+            <a:ext cx="6675120" cy="1188720"/>
           </a:xfrm>
           <a:prstGeom prst="rect">
             <a:avLst/>
@@ -1369,7 +1392,7 @@
               <a:buNone/>
             </a:pPr>
             <a:r>
-              <a:rPr lang="en-US" sz="5400" dirty="0">
+              <a:rPr lang="en-US" sz="5000" dirty="0">
                 <a:solidFill>
                   <a:srgbClr val="1A1A17"/>
                 </a:solidFill>
@@ -1383,7 +1406,7 @@
               <a:buNone/>
             </a:pPr>
             <a:r>
-              <a:rPr lang="en-US" sz="5400" i="1" dirty="0">
+              <a:rPr lang="en-US" sz="5000" i="1" dirty="0">
                 <a:solidFill>
                   <a:srgbClr val="1E6B33"/>
                 </a:solidFill>
@@ -1393,20 +1416,20 @@
               </a:rPr>
               <a:t>своих</a:t>
             </a:r>
-            <a:endParaRPr lang="en-US" sz="5400" dirty="0"/>
-          </a:p>
-        </p:txBody>
-      </p:sp>
-      <p:sp>
-        <p:nvSpPr>
-          <p:cNvPr id="4" name="Text 2"/>
+            <a:endParaRPr lang="en-US" sz="5000" dirty="0"/>
+          </a:p>
+        </p:txBody>
+      </p:sp>
+      <p:sp>
+        <p:nvSpPr>
+          <p:cNvPr id="5" name="Text 2"/>
           <p:cNvSpPr txBox="1"/>
           <p:nvPr/>
         </p:nvSpPr>
         <p:spPr>
           <a:xfrm>
             <a:off x="822960" y="3246120"/>
-            <a:ext cx="8229600" cy="822960"/>
+            <a:ext cx="6675120" cy="822960"/>
           </a:xfrm>
           <a:prstGeom prst="rect">
             <a:avLst/>
@@ -1427,7 +1450,7 @@
                   <a:srgbClr val="6B6B66"/>
                 </a:solidFill>
               </a:rPr>
-              <a:t>Площадка, где видно, кто готовит и выращивает на продажу</a:t>
+              <a:t>Площадка, где видно, кто готовит и выращивает</a:t>
             </a:r>
             <a:endParaRPr lang="en-US" sz="1900" dirty="0"/>
           </a:p>
@@ -1441,7 +1464,7 @@
                   <a:srgbClr val="6B6B66"/>
                 </a:solidFill>
               </a:rPr>
-              <a:t>на соседних улицах. Дальше — одна история, от ведра клубники до заказа.</a:t>
+              <a:t>на продажу на соседних улицах</a:t>
             </a:r>
             <a:endParaRPr lang="en-US" sz="1900" dirty="0"/>
           </a:p>
@@ -1449,7 +1472,7 @@
       </p:sp>
       <p:sp>
         <p:nvSpPr>
-          <p:cNvPr id="5" name="метка 1"/>
+          <p:cNvPr id="6" name="метка 1"/>
           <p:cNvSpPr/>
           <p:nvPr/>
         </p:nvSpPr>
@@ -1489,7 +1512,7 @@
       </p:sp>
       <p:sp>
         <p:nvSpPr>
-          <p:cNvPr id="6" name="метка 2"/>
+          <p:cNvPr id="7" name="метка 2"/>
           <p:cNvSpPr/>
           <p:nvPr/>
         </p:nvSpPr>
@@ -1529,7 +1552,7 @@
       </p:sp>
       <p:sp>
         <p:nvSpPr>
-          <p:cNvPr id="7" name="метка 3"/>
+          <p:cNvPr id="8" name="метка 3"/>
           <p:cNvSpPr/>
           <p:nvPr/>
         </p:nvSpPr>
@@ -1569,7 +1592,7 @@
       </p:sp>
       <p:sp>
         <p:nvSpPr>
-          <p:cNvPr id="8" name="подпись"/>
+          <p:cNvPr id="9" name="подпись"/>
           <p:cNvSpPr txBox="1"/>
           <p:nvPr/>
         </p:nvSpPr>
@@ -4703,9 +4726,32 @@
           </a:p>
         </p:txBody>
       </p:sp>
-      <p:sp>
-        <p:nvSpPr>
-          <p:cNvPr id="8" name="финал"/>
+      <p:pic>
+        <p:nvPicPr>
+          <p:cNvPr id="8" name="фото хлеба" descr="/home/user/project/deck/img/hleb.jpg">    </p:cNvPr>
+          <p:cNvPicPr>
+            <a:picLocks noChangeAspect="1"/>
+          </p:cNvPicPr>
+          <p:nvPr/>
+        </p:nvPicPr>
+        <p:blipFill>
+          <a:blip r:embed="rId1"/>
+          <a:srcRect l="0" r="0" t="0" b="0"/>
+          <a:stretch/>
+        </p:blipFill>
+        <p:spPr>
+          <a:xfrm>
+            <a:off x="8046720" y="3474720"/>
+            <a:ext cx="3291840" cy="1234440"/>
+          </a:xfrm>
+          <a:prstGeom prst="rect">
+            <a:avLst/>
+          </a:prstGeom>
+        </p:spPr>
+      </p:pic>
+      <p:sp>
+        <p:nvSpPr>
+          <p:cNvPr id="9" name="финал"/>
           <p:cNvSpPr txBox="1"/>
           <p:nvPr/>
         </p:nvSpPr>
@@ -4750,7 +4796,7 @@
                   <a:srgbClr val="6B6B66"/>
                 </a:solidFill>
               </a:rPr>
-              <a:t>Спасибо. Готов ответить на вопросы</a:t>
+              <a:t>Спасибо за внимание</a:t>
             </a:r>
             <a:endParaRPr lang="en-US" sz="2200" dirty="0"/>
           </a:p>

--- a/deck/СвояЕда.pptx
+++ b/deck/СвояЕда.pptx
@@ -111,27 +111,27 @@
   <p:extLst>
     <p:ext uri="{521415D9-36F7-43E2-AB2F-B90AF26B5E84}">
       <p14:sectionLst xmlns:p14="http://schemas.microsoft.com/office/powerpoint/2010/main">
-        <p14:section name="Открытие" id="{ea4be431-da1b-afba-05d5-e0fa5b3dded9}">
+        <p14:section name="Открытие" id="{8110ec88-cf79-fd8b-0650-ce2605430c28}">
           <p14:sldIdLst>
             <p14:sldId id="256"/>
           </p14:sldIdLst>
         </p14:section>
-        <p14:section name="Проблема" id="{b1fe6725-6fca-bc64-29e4-565e94f81740}">
+        <p14:section name="Проблема" id="{8c5dd259-12cb-769c-e0a5-45af82ddaa93}">
           <p14:sldIdLst>
             <p14:sldId id="257"/>
           </p14:sldIdLst>
         </p14:section>
-        <p14:section name="Идея" id="{b944415d-bf72-20dd-a017-364758c47861}">
+        <p14:section name="Идея" id="{d5e8ef51-dda0-7619-b51f-ab3da70ae802}">
           <p14:sldIdLst>
             <p14:sldId id="258"/>
           </p14:sldIdLst>
         </p14:section>
-        <p14:section name="Отличие" id="{4e5a8524-d2e3-9b99-88a0-207b43c2ca31}">
+        <p14:section name="Отличие" id="{896f6a0f-7a98-8e9f-c07c-7d2458ef8410}">
           <p14:sldIdLst>
             <p14:sldId id="259"/>
           </p14:sldIdLst>
         </p14:section>
-        <p14:section name="Итог" id="{33e42c4c-b677-b064-f696-bec330c951b9}">
+        <p14:section name="Итог" id="{dbd6ed7c-7fcf-ca95-7789-dc83fa18df56}">
           <p14:sldIdLst>
             <p14:sldId id="260"/>
           </p14:sldIdLst>
@@ -1293,7 +1293,7 @@
       </p:grpSpPr>
       <p:pic>
         <p:nvPicPr>
-          <p:cNvPr id="2" name="фото клубники" descr="/home/user/project/deck/img/klubnika.jpg">    </p:cNvPr>
+          <p:cNvPr id="2" name="сайт на телефоне" descr="/home/user/project/deck/img/sait-telefon.png">    </p:cNvPr>
           <p:cNvPicPr>
             <a:picLocks noChangeAspect="1"/>
           </p:cNvPicPr>
@@ -1301,13 +1301,14 @@
         </p:nvPicPr>
         <p:blipFill>
           <a:blip r:embed="rId1"/>
-          <a:srcRect l="0" r="0" t="0" b="0"/>
-          <a:stretch/>
+          <a:stretch>
+            <a:fillRect/>
+          </a:stretch>
         </p:blipFill>
         <p:spPr>
           <a:xfrm>
-            <a:off x="7772400" y="0"/>
-            <a:ext cx="4389120" cy="6858000"/>
+            <a:off x="8092440" y="182880"/>
+            <a:ext cx="3383280" cy="5623560"/>
           </a:xfrm>
           <a:prstGeom prst="rect">
             <a:avLst/>
@@ -4549,7 +4550,7 @@
         <p:spPr>
           <a:xfrm>
             <a:off x="822960" y="2468880"/>
-            <a:ext cx="10058400" cy="822960"/>
+            <a:ext cx="7406640" cy="914400"/>
           </a:xfrm>
           <a:prstGeom prst="rect">
             <a:avLst/>
@@ -4570,7 +4571,21 @@
                   <a:srgbClr val="6B6B66"/>
                 </a:solidFill>
               </a:rPr>
-              <a:t>С клубникой получилось. Ровно так же продаются домашняя выпечка, мёд, молоко и обеды — и в селе, и в городе: везде есть те, кто готовит, и те, кто рад купить рядом с домом.</a:t>
+              <a:t>С клубникой получилось. Ровно так же продаются выпечка, мёд,</a:t>
+            </a:r>
+            <a:endParaRPr lang="en-US" sz="1800" dirty="0"/>
+          </a:p>
+          <a:p>
+            <a:pPr algn="l" indent="0" marL="0">
+              <a:buNone/>
+            </a:pPr>
+            <a:r>
+              <a:rPr lang="en-US" sz="1800" dirty="0">
+                <a:solidFill>
+                  <a:srgbClr val="6B6B66"/>
+                </a:solidFill>
+              </a:rPr>
+              <a:t>молоко и обеды — и в селе, и в городе.</a:t>
             </a:r>
             <a:endParaRPr lang="en-US" sz="1800" dirty="0"/>
           </a:p>
@@ -4728,7 +4743,7 @@
       </p:sp>
       <p:pic>
         <p:nvPicPr>
-          <p:cNvPr id="8" name="фото хлеба" descr="/home/user/project/deck/img/hleb.jpg">    </p:cNvPr>
+          <p:cNvPr id="8" name="сайт на экране" descr="/home/user/project/deck/img/sait-ekran.png">    </p:cNvPr>
           <p:cNvPicPr>
             <a:picLocks noChangeAspect="1"/>
           </p:cNvPicPr>
@@ -4736,13 +4751,14 @@
         </p:nvPicPr>
         <p:blipFill>
           <a:blip r:embed="rId1"/>
-          <a:srcRect l="0" r="0" t="0" b="0"/>
-          <a:stretch/>
+          <a:stretch>
+            <a:fillRect/>
+          </a:stretch>
         </p:blipFill>
         <p:spPr>
           <a:xfrm>
-            <a:off x="8046720" y="3474720"/>
-            <a:ext cx="3291840" cy="1234440"/>
+            <a:off x="8046720" y="2468880"/>
+            <a:ext cx="3291840" cy="2240280"/>
           </a:xfrm>
           <a:prstGeom prst="rect">
             <a:avLst/>

--- a/deck/СвояЕда.pptx
+++ b/deck/СвояЕда.pptx
@@ -111,27 +111,27 @@
   <p:extLst>
     <p:ext uri="{521415D9-36F7-43E2-AB2F-B90AF26B5E84}">
       <p14:sectionLst xmlns:p14="http://schemas.microsoft.com/office/powerpoint/2010/main">
-        <p14:section name="Открытие" id="{8110ec88-cf79-fd8b-0650-ce2605430c28}">
+        <p14:section name="Открытие" id="{5edb5aab-1e2b-b598-c65c-6e96860aef77}">
           <p14:sldIdLst>
             <p14:sldId id="256"/>
           </p14:sldIdLst>
         </p14:section>
-        <p14:section name="Проблема" id="{8c5dd259-12cb-769c-e0a5-45af82ddaa93}">
+        <p14:section name="Проблема" id="{3c3b74ee-6c3d-ea37-40d4-8eef24fe5c4e}">
           <p14:sldIdLst>
             <p14:sldId id="257"/>
           </p14:sldIdLst>
         </p14:section>
-        <p14:section name="Идея" id="{d5e8ef51-dda0-7619-b51f-ab3da70ae802}">
+        <p14:section name="Идея" id="{7ce6d647-70e8-7f65-c57c-c8a566d1133b}">
           <p14:sldIdLst>
             <p14:sldId id="258"/>
           </p14:sldIdLst>
         </p14:section>
-        <p14:section name="Отличие" id="{896f6a0f-7a98-8e9f-c07c-7d2458ef8410}">
+        <p14:section name="Отличие" id="{d97b8445-cace-16e1-433b-9d2b23ac7432}">
           <p14:sldIdLst>
             <p14:sldId id="259"/>
           </p14:sldIdLst>
         </p14:section>
-        <p14:section name="Итог" id="{dbd6ed7c-7fcf-ca95-7789-dc83fa18df56}">
+        <p14:section name="Итог" id="{7c8e4928-8cd2-8752-f02a-1088919ea7fd}">
           <p14:sldIdLst>
             <p14:sldId id="260"/>
           </p14:sldIdLst>
@@ -1291,33 +1291,9 @@
           <a:chExt cx="0" cy="0"/>
         </a:xfrm>
       </p:grpSpPr>
-      <p:pic>
-        <p:nvPicPr>
-          <p:cNvPr id="2" name="сайт на телефоне" descr="/home/user/project/deck/img/sait-telefon.png">    </p:cNvPr>
-          <p:cNvPicPr>
-            <a:picLocks noChangeAspect="1"/>
-          </p:cNvPicPr>
-          <p:nvPr/>
-        </p:nvPicPr>
-        <p:blipFill>
-          <a:blip r:embed="rId1"/>
-          <a:stretch>
-            <a:fillRect/>
-          </a:stretch>
-        </p:blipFill>
-        <p:spPr>
-          <a:xfrm>
-            <a:off x="8092440" y="182880"/>
-            <a:ext cx="3383280" cy="5623560"/>
-          </a:xfrm>
-          <a:prstGeom prst="rect">
-            <a:avLst/>
-          </a:prstGeom>
-        </p:spPr>
-      </p:pic>
-      <p:sp>
-        <p:nvSpPr>
-          <p:cNvPr id="3" name="логотип"/>
+      <p:sp>
+        <p:nvSpPr>
+          <p:cNvPr id="2" name="логотип"/>
           <p:cNvSpPr txBox="1"/>
           <p:nvPr/>
         </p:nvSpPr>
@@ -1370,14 +1346,14 @@
       </p:sp>
       <p:sp>
         <p:nvSpPr>
-          <p:cNvPr id="4" name="Text 1"/>
+          <p:cNvPr id="3" name="Text 1"/>
           <p:cNvSpPr txBox="1"/>
           <p:nvPr/>
         </p:nvSpPr>
         <p:spPr>
           <a:xfrm>
             <a:off x="822960" y="2011680"/>
-            <a:ext cx="6675120" cy="1188720"/>
+            <a:ext cx="10515600" cy="1188720"/>
           </a:xfrm>
           <a:prstGeom prst="rect">
             <a:avLst/>
@@ -1393,7 +1369,7 @@
               <a:buNone/>
             </a:pPr>
             <a:r>
-              <a:rPr lang="en-US" sz="5000" dirty="0">
+              <a:rPr lang="en-US" sz="5400" dirty="0">
                 <a:solidFill>
                   <a:srgbClr val="1A1A17"/>
                 </a:solidFill>
@@ -1407,7 +1383,7 @@
               <a:buNone/>
             </a:pPr>
             <a:r>
-              <a:rPr lang="en-US" sz="5000" i="1" dirty="0">
+              <a:rPr lang="en-US" sz="5400" i="1" dirty="0">
                 <a:solidFill>
                   <a:srgbClr val="1E6B33"/>
                 </a:solidFill>
@@ -1417,20 +1393,20 @@
               </a:rPr>
               <a:t>своих</a:t>
             </a:r>
-            <a:endParaRPr lang="en-US" sz="5000" dirty="0"/>
-          </a:p>
-        </p:txBody>
-      </p:sp>
-      <p:sp>
-        <p:nvSpPr>
-          <p:cNvPr id="5" name="Text 2"/>
+            <a:endParaRPr lang="en-US" sz="5400" dirty="0"/>
+          </a:p>
+        </p:txBody>
+      </p:sp>
+      <p:sp>
+        <p:nvSpPr>
+          <p:cNvPr id="4" name="Text 2"/>
           <p:cNvSpPr txBox="1"/>
           <p:nvPr/>
         </p:nvSpPr>
         <p:spPr>
           <a:xfrm>
             <a:off x="822960" y="3246120"/>
-            <a:ext cx="6675120" cy="822960"/>
+            <a:ext cx="8229600" cy="822960"/>
           </a:xfrm>
           <a:prstGeom prst="rect">
             <a:avLst/>
@@ -1451,7 +1427,7 @@
                   <a:srgbClr val="6B6B66"/>
                 </a:solidFill>
               </a:rPr>
-              <a:t>Площадка, где видно, кто готовит и выращивает</a:t>
+              <a:t>Площадка, где видно, кто готовит и выращивает на продажу</a:t>
             </a:r>
             <a:endParaRPr lang="en-US" sz="1900" dirty="0"/>
           </a:p>
@@ -1465,7 +1441,7 @@
                   <a:srgbClr val="6B6B66"/>
                 </a:solidFill>
               </a:rPr>
-              <a:t>на продажу на соседних улицах</a:t>
+              <a:t>на соседних улицах. Дальше — одна история, от ведра клубники до заказа.</a:t>
             </a:r>
             <a:endParaRPr lang="en-US" sz="1900" dirty="0"/>
           </a:p>
@@ -1473,7 +1449,7 @@
       </p:sp>
       <p:sp>
         <p:nvSpPr>
-          <p:cNvPr id="6" name="метка 1"/>
+          <p:cNvPr id="5" name="метка 1"/>
           <p:cNvSpPr/>
           <p:nvPr/>
         </p:nvSpPr>
@@ -1513,7 +1489,7 @@
       </p:sp>
       <p:sp>
         <p:nvSpPr>
-          <p:cNvPr id="7" name="метка 2"/>
+          <p:cNvPr id="6" name="метка 2"/>
           <p:cNvSpPr/>
           <p:nvPr/>
         </p:nvSpPr>
@@ -1553,7 +1529,7 @@
       </p:sp>
       <p:sp>
         <p:nvSpPr>
-          <p:cNvPr id="8" name="метка 3"/>
+          <p:cNvPr id="7" name="метка 3"/>
           <p:cNvSpPr/>
           <p:nvPr/>
         </p:nvSpPr>
@@ -1593,7 +1569,7 @@
       </p:sp>
       <p:sp>
         <p:nvSpPr>
-          <p:cNvPr id="9" name="подпись"/>
+          <p:cNvPr id="8" name="подпись"/>
           <p:cNvSpPr txBox="1"/>
           <p:nvPr/>
         </p:nvSpPr>
@@ -4550,7 +4526,7 @@
         <p:spPr>
           <a:xfrm>
             <a:off x="822960" y="2468880"/>
-            <a:ext cx="7406640" cy="914400"/>
+            <a:ext cx="10058400" cy="822960"/>
           </a:xfrm>
           <a:prstGeom prst="rect">
             <a:avLst/>
@@ -4571,21 +4547,7 @@
                   <a:srgbClr val="6B6B66"/>
                 </a:solidFill>
               </a:rPr>
-              <a:t>С клубникой получилось. Ровно так же продаются выпечка, мёд,</a:t>
-            </a:r>
-            <a:endParaRPr lang="en-US" sz="1800" dirty="0"/>
-          </a:p>
-          <a:p>
-            <a:pPr algn="l" indent="0" marL="0">
-              <a:buNone/>
-            </a:pPr>
-            <a:r>
-              <a:rPr lang="en-US" sz="1800" dirty="0">
-                <a:solidFill>
-                  <a:srgbClr val="6B6B66"/>
-                </a:solidFill>
-              </a:rPr>
-              <a:t>молоко и обеды — и в селе, и в городе.</a:t>
+              <a:t>С клубникой получилось. Ровно так же продаются домашняя выпечка, мёд, молоко и обеды — и в селе, и в городе: везде есть те, кто готовит, и те, кто рад купить рядом с домом.</a:t>
             </a:r>
             <a:endParaRPr lang="en-US" sz="1800" dirty="0"/>
           </a:p>
@@ -4741,33 +4703,9 @@
           </a:p>
         </p:txBody>
       </p:sp>
-      <p:pic>
-        <p:nvPicPr>
-          <p:cNvPr id="8" name="сайт на экране" descr="/home/user/project/deck/img/sait-ekran.png">    </p:cNvPr>
-          <p:cNvPicPr>
-            <a:picLocks noChangeAspect="1"/>
-          </p:cNvPicPr>
-          <p:nvPr/>
-        </p:nvPicPr>
-        <p:blipFill>
-          <a:blip r:embed="rId1"/>
-          <a:stretch>
-            <a:fillRect/>
-          </a:stretch>
-        </p:blipFill>
-        <p:spPr>
-          <a:xfrm>
-            <a:off x="8046720" y="2468880"/>
-            <a:ext cx="3291840" cy="2240280"/>
-          </a:xfrm>
-          <a:prstGeom prst="rect">
-            <a:avLst/>
-          </a:prstGeom>
-        </p:spPr>
-      </p:pic>
-      <p:sp>
-        <p:nvSpPr>
-          <p:cNvPr id="9" name="финал"/>
+      <p:sp>
+        <p:nvSpPr>
+          <p:cNvPr id="8" name="финал"/>
           <p:cNvSpPr txBox="1"/>
           <p:nvPr/>
         </p:nvSpPr>
